--- a/XBox Controller Layout.pptx
+++ b/XBox Controller Layout.pptx
@@ -42,7 +42,7 @@
       </p:grpSpPr>
       <p:sp>
         <p:nvSpPr>
-          <p:cNvPr id="5" name="PlaceHolder 1"/>
+          <p:cNvPr id="7" name="PlaceHolder 1"/>
           <p:cNvSpPr>
             <a:spLocks noGrp="1"/>
           </p:cNvSpPr>
@@ -53,7 +53,7 @@
         <p:spPr>
           <a:xfrm>
             <a:off x="1523880" y="1122480"/>
-            <a:ext cx="9143280" cy="2386800"/>
+            <a:ext cx="9142920" cy="2386440"/>
           </a:xfrm>
           <a:prstGeom prst="rect">
             <a:avLst/>
@@ -64,17 +64,19 @@
           </a:ln>
         </p:spPr>
         <p:txBody>
-          <a:bodyPr lIns="0" rIns="0" tIns="0" bIns="0" anchor="ctr">
-            <a:noAutofit/>
+          <a:bodyPr lIns="0" tIns="0" rIns="0" bIns="0" anchor="ctr">
+            <a:spAutoFit/>
           </a:bodyPr>
           <a:p>
             <a:pPr indent="0" algn="ctr">
               <a:buNone/>
             </a:pPr>
-            <a:endParaRPr b="0" lang="en-US" sz="4400" spc="-1" strike="noStrike">
-              <a:solidFill>
-                <a:srgbClr val="000000"/>
-              </a:solidFill>
+            <a:endParaRPr lang="en-US" sz="4400" b="0" u="none" strike="noStrike">
+              <a:solidFill>
+                <a:srgbClr val="000000"/>
+              </a:solidFill>
+              <a:effectLst/>
+              <a:uFillTx/>
               <a:latin typeface="Arial"/>
             </a:endParaRPr>
           </a:p>
@@ -82,7 +84,7 @@
       </p:sp>
       <p:sp>
         <p:nvSpPr>
-          <p:cNvPr id="6" name="PlaceHolder 2"/>
+          <p:cNvPr id="8" name="PlaceHolder 2"/>
           <p:cNvSpPr>
             <a:spLocks noGrp="1"/>
           </p:cNvSpPr>
@@ -93,7 +95,7 @@
         <p:spPr>
           <a:xfrm>
             <a:off x="609480" y="1604520"/>
-            <a:ext cx="10972440" cy="3977280"/>
+            <a:ext cx="10972080" cy="3976920"/>
           </a:xfrm>
           <a:prstGeom prst="rect">
             <a:avLst/>
@@ -104,17 +106,19 @@
           </a:ln>
         </p:spPr>
         <p:txBody>
-          <a:bodyPr lIns="0" rIns="0" tIns="0" bIns="0" anchor="ctr">
-            <a:noAutofit/>
+          <a:bodyPr lIns="0" tIns="0" rIns="0" bIns="0" anchor="ctr">
+            <a:spAutoFit/>
           </a:bodyPr>
           <a:p>
             <a:pPr indent="0" algn="ctr">
               <a:buNone/>
             </a:pPr>
-            <a:endParaRPr b="0" lang="en-US" sz="3200" spc="-1" strike="noStrike">
-              <a:solidFill>
-                <a:srgbClr val="000000"/>
-              </a:solidFill>
+            <a:endParaRPr lang="en-US" sz="3200" b="0" u="none" strike="noStrike">
+              <a:solidFill>
+                <a:srgbClr val="000000"/>
+              </a:solidFill>
+              <a:effectLst/>
+              <a:uFillTx/>
               <a:latin typeface="Arial"/>
             </a:endParaRPr>
           </a:p>
@@ -154,7 +158,7 @@
         <p:txBody>
           <a:bodyPr/>
           <a:p>
-            <a:fld id="{8237E229-4A52-4112-9655-7412762B9BA4}" type="slidenum">
+            <a:fld id="{B8D5CEDD-BA7B-4D65-9093-3BF3D76DBE62}" type="slidenum">
               <a:t>&lt;#&gt;</a:t>
             </a:fld>
           </a:p>
@@ -237,7 +241,7 @@
         <p:txBody>
           <a:bodyPr/>
           <a:p>
-            <a:fld id="{4664DC7C-4ACA-4F05-B0DD-D4940E0732FF}" type="slidenum">
+            <a:fld id="{B20A9708-0B1C-4CCF-9D6A-0611E365EC25}" type="slidenum">
               <a:t>&lt;#&gt;</a:t>
             </a:fld>
           </a:p>
@@ -320,7 +324,7 @@
         <p:txBody>
           <a:bodyPr/>
           <a:p>
-            <a:fld id="{57D43643-CC31-4369-B467-85B7C0CDF286}" type="slidenum">
+            <a:fld id="{21790FC9-7F14-4005-96C0-12C8749B7B4F}" type="slidenum">
               <a:t>&lt;#&gt;</a:t>
             </a:fld>
           </a:p>
@@ -371,7 +375,94 @@
       </p:grpSpPr>
       <p:sp>
         <p:nvSpPr>
-          <p:cNvPr id="2" name="PlaceHolder 1"/>
+          <p:cNvPr id="12" name="PlaceHolder 1"/>
+          <p:cNvSpPr>
+            <a:spLocks noGrp="1"/>
+          </p:cNvSpPr>
+          <p:nvPr>
+            <p:ph type="title"/>
+          </p:nvPr>
+        </p:nvSpPr>
+        <p:spPr>
+          <a:xfrm>
+            <a:off x="1523880" y="1122480"/>
+            <a:ext cx="9142920" cy="2386440"/>
+          </a:xfrm>
+          <a:prstGeom prst="rect">
+            <a:avLst/>
+          </a:prstGeom>
+          <a:noFill/>
+          <a:ln w="0">
+            <a:noFill/>
+          </a:ln>
+        </p:spPr>
+        <p:txBody>
+          <a:bodyPr lIns="0" tIns="0" rIns="0" bIns="0" anchor="ctr">
+            <a:spAutoFit/>
+          </a:bodyPr>
+          <a:p>
+            <a:pPr indent="0" algn="ctr">
+              <a:buNone/>
+            </a:pPr>
+            <a:endParaRPr lang="en-US" sz="4400" b="0" u="none" strike="noStrike">
+              <a:solidFill>
+                <a:srgbClr val="000000"/>
+              </a:solidFill>
+              <a:effectLst/>
+              <a:uFillTx/>
+              <a:latin typeface="Arial"/>
+            </a:endParaRPr>
+          </a:p>
+        </p:txBody>
+      </p:sp>
+      <p:sp>
+        <p:nvSpPr>
+          <p:cNvPr id="13" name="PlaceHolder 2"/>
+          <p:cNvSpPr>
+            <a:spLocks noGrp="1"/>
+          </p:cNvSpPr>
+          <p:nvPr>
+            <p:ph/>
+          </p:nvPr>
+        </p:nvSpPr>
+        <p:spPr>
+          <a:xfrm>
+            <a:off x="609480" y="1604520"/>
+            <a:ext cx="10972080" cy="3976920"/>
+          </a:xfrm>
+          <a:prstGeom prst="rect">
+            <a:avLst/>
+          </a:prstGeom>
+          <a:noFill/>
+          <a:ln w="0">
+            <a:noFill/>
+          </a:ln>
+        </p:spPr>
+        <p:txBody>
+          <a:bodyPr lIns="0" tIns="0" rIns="0" bIns="0" anchor="t" vert="eaVert">
+            <a:normAutofit/>
+          </a:bodyPr>
+          <a:p>
+            <a:pPr indent="0" algn="l">
+              <a:spcBef>
+                <a:spcPts val="1417"/>
+              </a:spcBef>
+              <a:buNone/>
+            </a:pPr>
+            <a:endParaRPr lang="en-US" sz="3200" b="0" u="none" strike="noStrike">
+              <a:solidFill>
+                <a:srgbClr val="000000"/>
+              </a:solidFill>
+              <a:effectLst/>
+              <a:uFillTx/>
+              <a:latin typeface="Arial"/>
+            </a:endParaRPr>
+          </a:p>
+        </p:txBody>
+      </p:sp>
+      <p:sp>
+        <p:nvSpPr>
+          <p:cNvPr id="4" name="PlaceHolder 3"/>
           <p:cNvSpPr>
             <a:spLocks noGrp="1"/>
           </p:cNvSpPr>
@@ -391,7 +482,7 @@
       </p:sp>
       <p:sp>
         <p:nvSpPr>
-          <p:cNvPr id="3" name="PlaceHolder 2"/>
+          <p:cNvPr id="5" name="PlaceHolder 4"/>
           <p:cNvSpPr>
             <a:spLocks noGrp="1"/>
           </p:cNvSpPr>
@@ -403,7 +494,7 @@
         <p:txBody>
           <a:bodyPr/>
           <a:p>
-            <a:fld id="{7B19CBB2-457F-409F-AE3D-7A70622D8937}" type="slidenum">
+            <a:fld id="{303C4239-3832-4880-9F18-6568F3F9F7F9}" type="slidenum">
               <a:t>&lt;#&gt;</a:t>
             </a:fld>
           </a:p>
@@ -411,7 +502,7 @@
       </p:sp>
       <p:sp>
         <p:nvSpPr>
-          <p:cNvPr id="4" name="PlaceHolder 3"/>
+          <p:cNvPr id="6" name="PlaceHolder 5"/>
           <p:cNvSpPr>
             <a:spLocks noGrp="1"/>
           </p:cNvSpPr>
@@ -454,7 +545,94 @@
       </p:grpSpPr>
       <p:sp>
         <p:nvSpPr>
-          <p:cNvPr id="2" name="PlaceHolder 1"/>
+          <p:cNvPr id="17" name="PlaceHolder 1"/>
+          <p:cNvSpPr>
+            <a:spLocks noGrp="1"/>
+          </p:cNvSpPr>
+          <p:nvPr>
+            <p:ph type="title"/>
+          </p:nvPr>
+        </p:nvSpPr>
+        <p:spPr>
+          <a:xfrm>
+            <a:off x="9395640" y="1122480"/>
+            <a:ext cx="1272240" cy="11063520"/>
+          </a:xfrm>
+          <a:prstGeom prst="rect">
+            <a:avLst/>
+          </a:prstGeom>
+          <a:noFill/>
+          <a:ln w="0">
+            <a:noFill/>
+          </a:ln>
+        </p:spPr>
+        <p:txBody>
+          <a:bodyPr lIns="0" tIns="0" rIns="0" bIns="0" anchor="t" anchorCtr="1" vert="eaVert">
+            <a:noAutofit/>
+          </a:bodyPr>
+          <a:p>
+            <a:pPr indent="0" algn="ctr">
+              <a:buNone/>
+            </a:pPr>
+            <a:endParaRPr lang="en-US" sz="4400" b="0" u="none" strike="noStrike">
+              <a:solidFill>
+                <a:srgbClr val="000000"/>
+              </a:solidFill>
+              <a:effectLst/>
+              <a:uFillTx/>
+              <a:latin typeface="Arial"/>
+            </a:endParaRPr>
+          </a:p>
+        </p:txBody>
+      </p:sp>
+      <p:sp>
+        <p:nvSpPr>
+          <p:cNvPr id="18" name="PlaceHolder 2"/>
+          <p:cNvSpPr>
+            <a:spLocks noGrp="1"/>
+          </p:cNvSpPr>
+          <p:nvPr>
+            <p:ph/>
+          </p:nvPr>
+        </p:nvSpPr>
+        <p:spPr>
+          <a:xfrm>
+            <a:off x="609480" y="273240"/>
+            <a:ext cx="8533800" cy="5308200"/>
+          </a:xfrm>
+          <a:prstGeom prst="rect">
+            <a:avLst/>
+          </a:prstGeom>
+          <a:noFill/>
+          <a:ln w="0">
+            <a:noFill/>
+          </a:ln>
+        </p:spPr>
+        <p:txBody>
+          <a:bodyPr lIns="0" tIns="0" rIns="0" bIns="0" anchor="t" vert="eaVert">
+            <a:normAutofit/>
+          </a:bodyPr>
+          <a:p>
+            <a:pPr indent="0" algn="l">
+              <a:spcBef>
+                <a:spcPts val="1417"/>
+              </a:spcBef>
+              <a:buNone/>
+            </a:pPr>
+            <a:endParaRPr lang="en-US" sz="3200" b="0" u="none" strike="noStrike">
+              <a:solidFill>
+                <a:srgbClr val="000000"/>
+              </a:solidFill>
+              <a:effectLst/>
+              <a:uFillTx/>
+              <a:latin typeface="Arial"/>
+            </a:endParaRPr>
+          </a:p>
+        </p:txBody>
+      </p:sp>
+      <p:sp>
+        <p:nvSpPr>
+          <p:cNvPr id="4" name="PlaceHolder 3"/>
           <p:cNvSpPr>
             <a:spLocks noGrp="1"/>
           </p:cNvSpPr>
@@ -474,7 +652,7 @@
       </p:sp>
       <p:sp>
         <p:nvSpPr>
-          <p:cNvPr id="3" name="PlaceHolder 2"/>
+          <p:cNvPr id="5" name="PlaceHolder 4"/>
           <p:cNvSpPr>
             <a:spLocks noGrp="1"/>
           </p:cNvSpPr>
@@ -486,7 +664,7 @@
         <p:txBody>
           <a:bodyPr/>
           <a:p>
-            <a:fld id="{C51DEFF7-7B3F-4DB6-AC66-579C753C8BA1}" type="slidenum">
+            <a:fld id="{11E262D2-6594-43C6-BFDA-68A7C9F7DCC7}" type="slidenum">
               <a:t>&lt;#&gt;</a:t>
             </a:fld>
           </a:p>
@@ -494,7 +672,7 @@
       </p:sp>
       <p:sp>
         <p:nvSpPr>
-          <p:cNvPr id="4" name="PlaceHolder 3"/>
+          <p:cNvPr id="6" name="PlaceHolder 5"/>
           <p:cNvSpPr>
             <a:spLocks noGrp="1"/>
           </p:cNvSpPr>
@@ -537,7 +715,7 @@
       </p:grpSpPr>
       <p:sp>
         <p:nvSpPr>
-          <p:cNvPr id="18" name="PlaceHolder 1"/>
+          <p:cNvPr id="24" name="PlaceHolder 1"/>
           <p:cNvSpPr>
             <a:spLocks noGrp="1"/>
           </p:cNvSpPr>
@@ -548,7 +726,7 @@
         <p:spPr>
           <a:xfrm>
             <a:off x="1523880" y="1122480"/>
-            <a:ext cx="9143280" cy="2386800"/>
+            <a:ext cx="9142920" cy="2386440"/>
           </a:xfrm>
           <a:prstGeom prst="rect">
             <a:avLst/>
@@ -559,17 +737,19 @@
           </a:ln>
         </p:spPr>
         <p:txBody>
-          <a:bodyPr lIns="0" rIns="0" tIns="0" bIns="0" anchor="ctr">
-            <a:noAutofit/>
+          <a:bodyPr lIns="0" tIns="0" rIns="0" bIns="0" anchor="ctr">
+            <a:spAutoFit/>
           </a:bodyPr>
           <a:p>
             <a:pPr indent="0" algn="ctr">
               <a:buNone/>
             </a:pPr>
-            <a:endParaRPr b="0" lang="en-US" sz="4400" spc="-1" strike="noStrike">
-              <a:solidFill>
-                <a:srgbClr val="000000"/>
-              </a:solidFill>
+            <a:endParaRPr lang="en-US" sz="4400" b="0" u="none" strike="noStrike">
+              <a:solidFill>
+                <a:srgbClr val="000000"/>
+              </a:solidFill>
+              <a:effectLst/>
+              <a:uFillTx/>
               <a:latin typeface="Arial"/>
             </a:endParaRPr>
           </a:p>
@@ -577,7 +757,7 @@
       </p:sp>
       <p:sp>
         <p:nvSpPr>
-          <p:cNvPr id="19" name="PlaceHolder 2"/>
+          <p:cNvPr id="25" name="PlaceHolder 2"/>
           <p:cNvSpPr>
             <a:spLocks noGrp="1"/>
           </p:cNvSpPr>
@@ -588,7 +768,7 @@
         <p:spPr>
           <a:xfrm>
             <a:off x="609480" y="1604520"/>
-            <a:ext cx="10972440" cy="3977280"/>
+            <a:ext cx="10972080" cy="3976920"/>
           </a:xfrm>
           <a:prstGeom prst="rect">
             <a:avLst/>
@@ -599,20 +779,22 @@
           </a:ln>
         </p:spPr>
         <p:txBody>
-          <a:bodyPr lIns="0" rIns="0" tIns="0" bIns="0" anchor="t">
+          <a:bodyPr lIns="0" tIns="0" rIns="0" bIns="0" anchor="t">
             <a:normAutofit/>
           </a:bodyPr>
           <a:p>
-            <a:pPr indent="0">
+            <a:pPr indent="0" algn="l">
               <a:spcBef>
                 <a:spcPts val="1417"/>
               </a:spcBef>
               <a:buNone/>
             </a:pPr>
-            <a:endParaRPr b="0" lang="en-US" sz="3200" spc="-1" strike="noStrike">
-              <a:solidFill>
-                <a:srgbClr val="000000"/>
-              </a:solidFill>
+            <a:endParaRPr lang="en-US" sz="3200" b="0" u="none" strike="noStrike">
+              <a:solidFill>
+                <a:srgbClr val="000000"/>
+              </a:solidFill>
+              <a:effectLst/>
+              <a:uFillTx/>
               <a:latin typeface="Arial"/>
             </a:endParaRPr>
           </a:p>
@@ -652,7 +834,7 @@
         <p:txBody>
           <a:bodyPr/>
           <a:p>
-            <a:fld id="{9ACE77CF-7EED-4016-9510-DF26F03AB8E7}" type="slidenum">
+            <a:fld id="{95FE1AC5-1926-42F1-93D7-7E05A460D41A}" type="slidenum">
               <a:t>&lt;#&gt;</a:t>
             </a:fld>
           </a:p>
@@ -735,7 +917,7 @@
         <p:txBody>
           <a:bodyPr/>
           <a:p>
-            <a:fld id="{F8FB202D-809E-45AC-8036-C85BFC13DE72}" type="slidenum">
+            <a:fld id="{DE75BC96-B8BC-48C8-8400-FEEA6C8AB992}" type="slidenum">
               <a:t>&lt;#&gt;</a:t>
             </a:fld>
           </a:p>
@@ -786,7 +968,7 @@
       </p:grpSpPr>
       <p:sp>
         <p:nvSpPr>
-          <p:cNvPr id="29" name="PlaceHolder 1"/>
+          <p:cNvPr id="35" name="PlaceHolder 1"/>
           <p:cNvSpPr>
             <a:spLocks noGrp="1"/>
           </p:cNvSpPr>
@@ -797,7 +979,7 @@
         <p:spPr>
           <a:xfrm>
             <a:off x="1523880" y="1122480"/>
-            <a:ext cx="9143280" cy="2386800"/>
+            <a:ext cx="9142920" cy="2386440"/>
           </a:xfrm>
           <a:prstGeom prst="rect">
             <a:avLst/>
@@ -808,17 +990,19 @@
           </a:ln>
         </p:spPr>
         <p:txBody>
-          <a:bodyPr lIns="0" rIns="0" tIns="0" bIns="0" anchor="ctr">
-            <a:noAutofit/>
+          <a:bodyPr lIns="0" tIns="0" rIns="0" bIns="0" anchor="ctr">
+            <a:spAutoFit/>
           </a:bodyPr>
           <a:p>
             <a:pPr indent="0" algn="ctr">
               <a:buNone/>
             </a:pPr>
-            <a:endParaRPr b="0" lang="en-US" sz="4400" spc="-1" strike="noStrike">
-              <a:solidFill>
-                <a:srgbClr val="000000"/>
-              </a:solidFill>
+            <a:endParaRPr lang="en-US" sz="4400" b="0" u="none" strike="noStrike">
+              <a:solidFill>
+                <a:srgbClr val="000000"/>
+              </a:solidFill>
+              <a:effectLst/>
+              <a:uFillTx/>
               <a:latin typeface="Arial"/>
             </a:endParaRPr>
           </a:p>
@@ -826,7 +1010,7 @@
       </p:sp>
       <p:sp>
         <p:nvSpPr>
-          <p:cNvPr id="30" name="PlaceHolder 2"/>
+          <p:cNvPr id="36" name="PlaceHolder 2"/>
           <p:cNvSpPr>
             <a:spLocks noGrp="1"/>
           </p:cNvSpPr>
@@ -837,7 +1021,7 @@
         <p:spPr>
           <a:xfrm>
             <a:off x="609480" y="1604520"/>
-            <a:ext cx="5354280" cy="3977280"/>
+            <a:ext cx="5354280" cy="3976920"/>
           </a:xfrm>
           <a:prstGeom prst="rect">
             <a:avLst/>
@@ -848,20 +1032,22 @@
           </a:ln>
         </p:spPr>
         <p:txBody>
-          <a:bodyPr lIns="0" rIns="0" tIns="0" bIns="0" anchor="t">
+          <a:bodyPr lIns="0" tIns="0" rIns="0" bIns="0" anchor="t">
             <a:normAutofit/>
           </a:bodyPr>
           <a:p>
-            <a:pPr indent="0">
+            <a:pPr indent="0" algn="l">
               <a:spcBef>
                 <a:spcPts val="1417"/>
               </a:spcBef>
               <a:buNone/>
             </a:pPr>
-            <a:endParaRPr b="0" lang="en-US" sz="3200" spc="-1" strike="noStrike">
-              <a:solidFill>
-                <a:srgbClr val="000000"/>
-              </a:solidFill>
+            <a:endParaRPr lang="en-US" sz="3200" b="0" u="none" strike="noStrike">
+              <a:solidFill>
+                <a:srgbClr val="000000"/>
+              </a:solidFill>
+              <a:effectLst/>
+              <a:uFillTx/>
               <a:latin typeface="Arial"/>
             </a:endParaRPr>
           </a:p>
@@ -869,7 +1055,7 @@
       </p:sp>
       <p:sp>
         <p:nvSpPr>
-          <p:cNvPr id="31" name="PlaceHolder 3"/>
+          <p:cNvPr id="37" name="PlaceHolder 3"/>
           <p:cNvSpPr>
             <a:spLocks noGrp="1"/>
           </p:cNvSpPr>
@@ -880,7 +1066,7 @@
         <p:spPr>
           <a:xfrm>
             <a:off x="6231960" y="1604520"/>
-            <a:ext cx="5354280" cy="3977280"/>
+            <a:ext cx="5354280" cy="3976920"/>
           </a:xfrm>
           <a:prstGeom prst="rect">
             <a:avLst/>
@@ -891,20 +1077,22 @@
           </a:ln>
         </p:spPr>
         <p:txBody>
-          <a:bodyPr lIns="0" rIns="0" tIns="0" bIns="0" anchor="t">
+          <a:bodyPr lIns="0" tIns="0" rIns="0" bIns="0" anchor="t">
             <a:normAutofit/>
           </a:bodyPr>
           <a:p>
-            <a:pPr indent="0">
+            <a:pPr indent="0" algn="l">
               <a:spcBef>
                 <a:spcPts val="1417"/>
               </a:spcBef>
               <a:buNone/>
             </a:pPr>
-            <a:endParaRPr b="0" lang="en-US" sz="3200" spc="-1" strike="noStrike">
-              <a:solidFill>
-                <a:srgbClr val="000000"/>
-              </a:solidFill>
+            <a:endParaRPr lang="en-US" sz="3200" b="0" u="none" strike="noStrike">
+              <a:solidFill>
+                <a:srgbClr val="000000"/>
+              </a:solidFill>
+              <a:effectLst/>
+              <a:uFillTx/>
               <a:latin typeface="Arial"/>
             </a:endParaRPr>
           </a:p>
@@ -944,7 +1132,7 @@
         <p:txBody>
           <a:bodyPr/>
           <a:p>
-            <a:fld id="{E1CF80F6-811C-4A55-8CF7-FD3923D19528}" type="slidenum">
+            <a:fld id="{4ABE13CD-3ECC-4B02-97DE-308D5E8409B7}" type="slidenum">
               <a:t>&lt;#&gt;</a:t>
             </a:fld>
           </a:p>
@@ -1027,7 +1215,7 @@
         <p:txBody>
           <a:bodyPr/>
           <a:p>
-            <a:fld id="{188E4CB0-97FA-42AA-8A63-9EC3D6B69878}" type="slidenum">
+            <a:fld id="{DCFC27C7-3328-4164-A219-583AFA669721}" type="slidenum">
               <a:t>&lt;#&gt;</a:t>
             </a:fld>
           </a:p>
@@ -1078,7 +1266,7 @@
       </p:grpSpPr>
       <p:sp>
         <p:nvSpPr>
-          <p:cNvPr id="39" name="PlaceHolder 1"/>
+          <p:cNvPr id="45" name="PlaceHolder 1"/>
           <p:cNvSpPr>
             <a:spLocks noGrp="1"/>
           </p:cNvSpPr>
@@ -1089,7 +1277,7 @@
         <p:spPr>
           <a:xfrm>
             <a:off x="1523880" y="1122480"/>
-            <a:ext cx="9143280" cy="2386800"/>
+            <a:ext cx="9142920" cy="2386440"/>
           </a:xfrm>
           <a:prstGeom prst="rect">
             <a:avLst/>
@@ -1100,17 +1288,19 @@
           </a:ln>
         </p:spPr>
         <p:txBody>
-          <a:bodyPr lIns="0" rIns="0" tIns="0" bIns="0" anchor="ctr">
-            <a:noAutofit/>
+          <a:bodyPr lIns="0" tIns="0" rIns="0" bIns="0" anchor="ctr">
+            <a:spAutoFit/>
           </a:bodyPr>
           <a:p>
             <a:pPr indent="0" algn="ctr">
               <a:buNone/>
             </a:pPr>
-            <a:endParaRPr b="0" lang="en-US" sz="4400" spc="-1" strike="noStrike">
-              <a:solidFill>
-                <a:srgbClr val="000000"/>
-              </a:solidFill>
+            <a:endParaRPr lang="en-US" sz="4400" b="0" u="none" strike="noStrike">
+              <a:solidFill>
+                <a:srgbClr val="000000"/>
+              </a:solidFill>
+              <a:effectLst/>
+              <a:uFillTx/>
               <a:latin typeface="Arial"/>
             </a:endParaRPr>
           </a:p>
@@ -1150,7 +1340,7 @@
         <p:txBody>
           <a:bodyPr/>
           <a:p>
-            <a:fld id="{B53A549E-AED2-4A95-82EC-6C4CFD3C3297}" type="slidenum">
+            <a:fld id="{54D1AFBA-F85B-47BC-93D7-943DC99D6341}" type="slidenum">
               <a:t>&lt;#&gt;</a:t>
             </a:fld>
           </a:p>
@@ -1233,7 +1423,7 @@
         <p:txBody>
           <a:bodyPr/>
           <a:p>
-            <a:fld id="{3DD6EC36-7C5A-46B5-B44E-0A825A59986E}" type="slidenum">
+            <a:fld id="{CB817FFD-E43D-421F-B250-D1B293608635}" type="slidenum">
               <a:t>&lt;#&gt;</a:t>
             </a:fld>
           </a:p>
@@ -1271,7 +1461,7 @@
     <p:bg>
       <p:bgPr>
         <a:solidFill>
-          <a:srgbClr val="ffffff"/>
+          <a:srgbClr val="FFFFFF"/>
         </a:solidFill>
       </p:bgPr>
     </p:bg>
@@ -1291,7 +1481,7 @@
       </p:grpSpPr>
       <p:sp>
         <p:nvSpPr>
-          <p:cNvPr id="0" name="PlaceHolder 1"/>
+          <p:cNvPr id="2" name="PlaceHolder 1"/>
           <p:cNvSpPr>
             <a:spLocks noGrp="1"/>
           </p:cNvSpPr>
@@ -1302,7 +1492,7 @@
         <p:spPr>
           <a:xfrm>
             <a:off x="1523880" y="1122480"/>
-            <a:ext cx="9143280" cy="2386800"/>
+            <a:ext cx="9142920" cy="2386440"/>
           </a:xfrm>
           <a:prstGeom prst="rect">
             <a:avLst/>
@@ -1313,26 +1503,43 @@
           </a:ln>
         </p:spPr>
         <p:txBody>
-          <a:bodyPr lIns="0" rIns="0" tIns="0" bIns="0" anchor="ctr">
+          <a:bodyPr lIns="0" tIns="0" rIns="0" bIns="0" anchor="ctr">
             <a:noAutofit/>
           </a:bodyPr>
-          <a:p>
-            <a:pPr indent="0">
+          <a:lstStyle>
+            <a:lvl1pPr indent="0" algn="l">
               <a:buNone/>
-            </a:pPr>
-            <a:r>
-              <a:rPr b="0" lang="en-US" sz="1800" spc="-1" strike="noStrike">
+              <a:defRPr lang="en-US" sz="1800" b="0" u="none" strike="noStrike">
                 <a:solidFill>
                   <a:srgbClr val="000000"/>
                 </a:solidFill>
+                <a:effectLst/>
+                <a:uFillTx/>
+                <a:latin typeface="Arial"/>
+              </a:defRPr>
+            </a:lvl1pPr>
+          </a:lstStyle>
+          <a:p>
+            <a:pPr indent="0" algn="l">
+              <a:buNone/>
+            </a:pPr>
+            <a:r>
+              <a:rPr lang="en-US" sz="1800" b="0" u="none" strike="noStrike">
+                <a:solidFill>
+                  <a:srgbClr val="000000"/>
+                </a:solidFill>
+                <a:effectLst/>
+                <a:uFillTx/>
                 <a:latin typeface="Arial"/>
               </a:rPr>
               <a:t>Click to edit the title text format</a:t>
             </a:r>
-            <a:endParaRPr b="0" lang="en-US" sz="1800" spc="-1" strike="noStrike">
-              <a:solidFill>
-                <a:srgbClr val="000000"/>
-              </a:solidFill>
+            <a:endParaRPr lang="en-US" sz="1800" b="0" u="none" strike="noStrike">
+              <a:solidFill>
+                <a:srgbClr val="000000"/>
+              </a:solidFill>
+              <a:effectLst/>
+              <a:uFillTx/>
               <a:latin typeface="Arial"/>
             </a:endParaRPr>
           </a:p>
@@ -1340,7 +1547,7 @@
       </p:sp>
       <p:sp>
         <p:nvSpPr>
-          <p:cNvPr id="1" name="PlaceHolder 2"/>
+          <p:cNvPr id="3" name="PlaceHolder 2"/>
           <p:cNvSpPr>
             <a:spLocks noGrp="1"/>
           </p:cNvSpPr>
@@ -1351,7 +1558,7 @@
         <p:spPr>
           <a:xfrm>
             <a:off x="4038480" y="6356520"/>
-            <a:ext cx="4114080" cy="364320"/>
+            <a:ext cx="4113720" cy="363960"/>
           </a:xfrm>
           <a:prstGeom prst="rect">
             <a:avLst/>
@@ -1362,7 +1569,7 @@
           </a:ln>
         </p:spPr>
         <p:txBody>
-          <a:bodyPr lIns="91440" rIns="91440" tIns="45720" bIns="45720" anchor="ctr">
+          <a:bodyPr lIns="91440" tIns="45720" rIns="91440" bIns="45720" anchor="ctr">
             <a:noAutofit/>
           </a:bodyPr>
           <a:lstStyle>
@@ -1372,12 +1579,14 @@
               </a:lnSpc>
               <a:buNone/>
               <a:tabLst>
-                <a:tab algn="l" pos="0"/>
+                <a:tab pos="0" algn="l"/>
               </a:tabLst>
-              <a:defRPr b="0" lang="en-US" sz="1400" spc="-1" strike="noStrike">
+              <a:defRPr lang="en-US" sz="1400" b="0" u="none" strike="noStrike">
                 <a:solidFill>
                   <a:srgbClr val="000000"/>
                 </a:solidFill>
+                <a:effectLst/>
+                <a:uFillTx/>
                 <a:latin typeface="Times New Roman"/>
               </a:defRPr>
             </a:lvl1pPr>
@@ -1389,22 +1598,26 @@
               </a:lnSpc>
               <a:buNone/>
               <a:tabLst>
-                <a:tab algn="l" pos="0"/>
+                <a:tab pos="0" algn="l"/>
               </a:tabLst>
             </a:pPr>
             <a:r>
-              <a:rPr b="0" lang="en-US" sz="1400" spc="-1" strike="noStrike">
+              <a:rPr lang="en-US" sz="1400" b="0" u="none" strike="noStrike">
                 <a:solidFill>
                   <a:srgbClr val="000000"/>
                 </a:solidFill>
+                <a:effectLst/>
+                <a:uFillTx/>
                 <a:latin typeface="Times New Roman"/>
               </a:rPr>
               <a:t>&lt;footer&gt;</a:t>
             </a:r>
-            <a:endParaRPr b="0" lang="en-US" sz="1400" spc="-1" strike="noStrike">
-              <a:solidFill>
-                <a:srgbClr val="000000"/>
-              </a:solidFill>
+            <a:endParaRPr lang="en-US" sz="1400" b="0" u="none" strike="noStrike">
+              <a:solidFill>
+                <a:srgbClr val="000000"/>
+              </a:solidFill>
+              <a:effectLst/>
+              <a:uFillTx/>
               <a:latin typeface="Times New Roman"/>
             </a:endParaRPr>
           </a:p>
@@ -1412,7 +1625,7 @@
       </p:sp>
       <p:sp>
         <p:nvSpPr>
-          <p:cNvPr id="2" name="PlaceHolder 3"/>
+          <p:cNvPr id="4" name="PlaceHolder 3"/>
           <p:cNvSpPr>
             <a:spLocks noGrp="1"/>
           </p:cNvSpPr>
@@ -1423,7 +1636,7 @@
         <p:spPr>
           <a:xfrm>
             <a:off x="8610480" y="6356520"/>
-            <a:ext cx="2742480" cy="364320"/>
+            <a:ext cx="2742120" cy="363960"/>
           </a:xfrm>
           <a:prstGeom prst="rect">
             <a:avLst/>
@@ -1434,7 +1647,7 @@
           </a:ln>
         </p:spPr>
         <p:txBody>
-          <a:bodyPr lIns="91440" rIns="91440" tIns="45720" bIns="45720" anchor="ctr">
+          <a:bodyPr lIns="91440" tIns="45720" rIns="91440" bIns="45720" anchor="ctr">
             <a:noAutofit/>
           </a:bodyPr>
           <a:lstStyle>
@@ -1444,14 +1657,16 @@
               </a:lnSpc>
               <a:buNone/>
               <a:tabLst>
-                <a:tab algn="l" pos="0"/>
+                <a:tab pos="0" algn="l"/>
               </a:tabLst>
-              <a:defRPr b="0" lang="en-US" sz="1200" spc="-1" strike="noStrike">
+              <a:defRPr lang="en-US" sz="1200" b="0" u="none" strike="noStrike">
                 <a:solidFill>
                   <a:schemeClr val="dk1">
                     <a:tint val="75000"/>
                   </a:schemeClr>
                 </a:solidFill>
+                <a:effectLst/>
+                <a:uFillTx/>
                 <a:latin typeface="Calibri"/>
               </a:defRPr>
             </a:lvl1pPr>
@@ -1463,24 +1678,28 @@
               </a:lnSpc>
               <a:buNone/>
               <a:tabLst>
-                <a:tab algn="l" pos="0"/>
+                <a:tab pos="0" algn="l"/>
               </a:tabLst>
             </a:pPr>
-            <a:fld id="{80B15552-76C6-4891-ABC6-F5C1E950E62F}" type="slidenum">
-              <a:rPr b="0" lang="en-US" sz="1200" spc="-1" strike="noStrike">
+            <a:fld id="{0DB30779-487B-48A4-BA9F-346FB6558A48}" type="slidenum">
+              <a:rPr lang="en-US" sz="1200" b="0" u="none" strike="noStrike">
                 <a:solidFill>
                   <a:schemeClr val="dk1">
                     <a:tint val="75000"/>
                   </a:schemeClr>
                 </a:solidFill>
+                <a:effectLst/>
+                <a:uFillTx/>
                 <a:latin typeface="Calibri"/>
               </a:rPr>
               <a:t>&lt;number&gt;</a:t>
             </a:fld>
-            <a:endParaRPr b="0" lang="en-US" sz="1200" spc="-1" strike="noStrike">
-              <a:solidFill>
-                <a:srgbClr val="000000"/>
-              </a:solidFill>
+            <a:endParaRPr lang="en-US" sz="1200" b="0" u="none" strike="noStrike">
+              <a:solidFill>
+                <a:srgbClr val="000000"/>
+              </a:solidFill>
+              <a:effectLst/>
+              <a:uFillTx/>
               <a:latin typeface="Times New Roman"/>
             </a:endParaRPr>
           </a:p>
@@ -1488,7 +1707,7 @@
       </p:sp>
       <p:sp>
         <p:nvSpPr>
-          <p:cNvPr id="3" name="PlaceHolder 4"/>
+          <p:cNvPr id="5" name="PlaceHolder 4"/>
           <p:cNvSpPr>
             <a:spLocks noGrp="1"/>
           </p:cNvSpPr>
@@ -1499,7 +1718,7 @@
         <p:spPr>
           <a:xfrm>
             <a:off x="838080" y="6356520"/>
-            <a:ext cx="2742480" cy="364320"/>
+            <a:ext cx="2742120" cy="363960"/>
           </a:xfrm>
           <a:prstGeom prst="rect">
             <a:avLst/>
@@ -1510,37 +1729,43 @@
           </a:ln>
         </p:spPr>
         <p:txBody>
-          <a:bodyPr lIns="91440" rIns="91440" tIns="45720" bIns="45720" anchor="ctr">
+          <a:bodyPr lIns="91440" tIns="45720" rIns="91440" bIns="45720" anchor="ctr">
             <a:noAutofit/>
           </a:bodyPr>
           <a:lstStyle>
-            <a:lvl1pPr indent="0">
+            <a:lvl1pPr indent="0" algn="l">
               <a:buNone/>
-              <a:defRPr b="0" lang="en-US" sz="1400" spc="-1" strike="noStrike">
+              <a:defRPr lang="en-US" sz="1400" b="0" u="none" strike="noStrike">
                 <a:solidFill>
                   <a:srgbClr val="000000"/>
                 </a:solidFill>
+                <a:effectLst/>
+                <a:uFillTx/>
                 <a:latin typeface="Times New Roman"/>
               </a:defRPr>
             </a:lvl1pPr>
           </a:lstStyle>
           <a:p>
-            <a:pPr indent="0">
+            <a:pPr indent="0" algn="l">
               <a:buNone/>
             </a:pPr>
             <a:r>
-              <a:rPr b="0" lang="en-US" sz="1400" spc="-1" strike="noStrike">
+              <a:rPr lang="en-US" sz="1400" b="0" u="none" strike="noStrike">
                 <a:solidFill>
                   <a:srgbClr val="000000"/>
                 </a:solidFill>
+                <a:effectLst/>
+                <a:uFillTx/>
                 <a:latin typeface="Times New Roman"/>
               </a:rPr>
               <a:t>&lt;date/time&gt;</a:t>
             </a:r>
-            <a:endParaRPr b="0" lang="en-US" sz="1400" spc="-1" strike="noStrike">
-              <a:solidFill>
-                <a:srgbClr val="000000"/>
-              </a:solidFill>
+            <a:endParaRPr lang="en-US" sz="1400" b="0" u="none" strike="noStrike">
+              <a:solidFill>
+                <a:srgbClr val="000000"/>
+              </a:solidFill>
+              <a:effectLst/>
+              <a:uFillTx/>
               <a:latin typeface="Times New Roman"/>
             </a:endParaRPr>
           </a:p>
@@ -1548,7 +1773,7 @@
       </p:sp>
       <p:sp>
         <p:nvSpPr>
-          <p:cNvPr id="4" name="PlaceHolder 5"/>
+          <p:cNvPr id="6" name="PlaceHolder 5"/>
           <p:cNvSpPr>
             <a:spLocks noGrp="1"/>
           </p:cNvSpPr>
@@ -1570,11 +1795,11 @@
           </a:ln>
         </p:spPr>
         <p:txBody>
-          <a:bodyPr lIns="0" rIns="0" tIns="0" bIns="0" anchor="t">
+          <a:bodyPr lIns="0" tIns="0" rIns="0" bIns="0" anchor="t">
             <a:normAutofit/>
           </a:bodyPr>
-          <a:p>
-            <a:pPr marL="432000" indent="-324000">
+          <a:lstStyle>
+            <a:lvl1pPr algn="l">
               <a:spcBef>
                 <a:spcPts val="1417"/>
               </a:spcBef>
@@ -1584,25 +1809,16 @@
               <a:buSzPct val="45000"/>
               <a:buFont typeface="Wingdings" charset="2"/>
               <a:buChar char=""/>
-            </a:pPr>
-            <a:r>
-              <a:rPr b="0" lang="en-US" sz="3200" spc="-1" strike="noStrike">
+              <a:defRPr lang="en-US" sz="3200" b="0" u="none" strike="noStrike">
                 <a:solidFill>
                   <a:srgbClr val="000000"/>
                 </a:solidFill>
+                <a:effectLst/>
+                <a:uFillTx/>
                 <a:latin typeface="Arial"/>
-              </a:rPr>
-              <a:t>Click to edit the outline text format</a:t>
-            </a:r>
-            <a:endParaRPr b="0" lang="en-US" sz="3200" spc="-1" strike="noStrike">
-              <a:solidFill>
-                <a:srgbClr val="000000"/>
-              </a:solidFill>
-              <a:latin typeface="Arial"/>
-            </a:endParaRPr>
-          </a:p>
-          <a:p>
-            <a:pPr lvl="1" marL="864000" indent="-324000">
+              </a:defRPr>
+            </a:lvl1pPr>
+            <a:lvl2pPr lvl="1" algn="l">
               <a:spcBef>
                 <a:spcPts val="1134"/>
               </a:spcBef>
@@ -1612,25 +1828,16 @@
               <a:buSzPct val="75000"/>
               <a:buFont typeface="Symbol" charset="2"/>
               <a:buChar char=""/>
-            </a:pPr>
-            <a:r>
-              <a:rPr b="0" lang="en-US" sz="2800" spc="-1" strike="noStrike">
+              <a:defRPr lang="en-US" sz="2800" b="0" u="none" strike="noStrike">
                 <a:solidFill>
                   <a:srgbClr val="000000"/>
                 </a:solidFill>
+                <a:effectLst/>
+                <a:uFillTx/>
                 <a:latin typeface="Arial"/>
-              </a:rPr>
-              <a:t>Second Outline Level</a:t>
-            </a:r>
-            <a:endParaRPr b="0" lang="en-US" sz="2800" spc="-1" strike="noStrike">
-              <a:solidFill>
-                <a:srgbClr val="000000"/>
-              </a:solidFill>
-              <a:latin typeface="Arial"/>
-            </a:endParaRPr>
-          </a:p>
-          <a:p>
-            <a:pPr lvl="2" marL="1296000" indent="-288000">
+              </a:defRPr>
+            </a:lvl2pPr>
+            <a:lvl3pPr lvl="2" algn="l">
               <a:spcBef>
                 <a:spcPts val="850"/>
               </a:spcBef>
@@ -1640,25 +1847,16 @@
               <a:buSzPct val="45000"/>
               <a:buFont typeface="Wingdings" charset="2"/>
               <a:buChar char=""/>
-            </a:pPr>
-            <a:r>
-              <a:rPr b="0" lang="en-US" sz="2400" spc="-1" strike="noStrike">
+              <a:defRPr lang="en-US" sz="2400" b="0" u="none" strike="noStrike">
                 <a:solidFill>
                   <a:srgbClr val="000000"/>
                 </a:solidFill>
+                <a:effectLst/>
+                <a:uFillTx/>
                 <a:latin typeface="Arial"/>
-              </a:rPr>
-              <a:t>Third Outline Level</a:t>
-            </a:r>
-            <a:endParaRPr b="0" lang="en-US" sz="2400" spc="-1" strike="noStrike">
-              <a:solidFill>
-                <a:srgbClr val="000000"/>
-              </a:solidFill>
-              <a:latin typeface="Arial"/>
-            </a:endParaRPr>
-          </a:p>
-          <a:p>
-            <a:pPr lvl="3" marL="1728000" indent="-216000">
+              </a:defRPr>
+            </a:lvl3pPr>
+            <a:lvl4pPr lvl="3" algn="l">
               <a:spcBef>
                 <a:spcPts val="567"/>
               </a:spcBef>
@@ -1668,25 +1866,16 @@
               <a:buSzPct val="75000"/>
               <a:buFont typeface="Symbol" charset="2"/>
               <a:buChar char=""/>
-            </a:pPr>
-            <a:r>
-              <a:rPr b="0" lang="en-US" sz="2000" spc="-1" strike="noStrike">
+              <a:defRPr lang="en-US" sz="2000" b="0" u="none" strike="noStrike">
                 <a:solidFill>
                   <a:srgbClr val="000000"/>
                 </a:solidFill>
+                <a:effectLst/>
+                <a:uFillTx/>
                 <a:latin typeface="Arial"/>
-              </a:rPr>
-              <a:t>Fourth Outline Level</a:t>
-            </a:r>
-            <a:endParaRPr b="0" lang="en-US" sz="2000" spc="-1" strike="noStrike">
-              <a:solidFill>
-                <a:srgbClr val="000000"/>
-              </a:solidFill>
-              <a:latin typeface="Arial"/>
-            </a:endParaRPr>
-          </a:p>
-          <a:p>
-            <a:pPr lvl="4" marL="2160000" indent="-216000">
+              </a:defRPr>
+            </a:lvl4pPr>
+            <a:lvl5pPr lvl="4" algn="l">
               <a:spcBef>
                 <a:spcPts val="283"/>
               </a:spcBef>
@@ -1696,25 +1885,16 @@
               <a:buSzPct val="45000"/>
               <a:buFont typeface="Wingdings" charset="2"/>
               <a:buChar char=""/>
-            </a:pPr>
-            <a:r>
-              <a:rPr b="0" lang="en-US" sz="2000" spc="-1" strike="noStrike">
+              <a:defRPr lang="en-US" sz="2000" b="0" u="none" strike="noStrike">
                 <a:solidFill>
                   <a:srgbClr val="000000"/>
                 </a:solidFill>
+                <a:effectLst/>
+                <a:uFillTx/>
                 <a:latin typeface="Arial"/>
-              </a:rPr>
-              <a:t>Fifth Outline Level</a:t>
-            </a:r>
-            <a:endParaRPr b="0" lang="en-US" sz="2000" spc="-1" strike="noStrike">
-              <a:solidFill>
-                <a:srgbClr val="000000"/>
-              </a:solidFill>
-              <a:latin typeface="Arial"/>
-            </a:endParaRPr>
-          </a:p>
-          <a:p>
-            <a:pPr lvl="5" marL="2592000" indent="-216000">
+              </a:defRPr>
+            </a:lvl5pPr>
+            <a:lvl6pPr lvl="5" algn="l">
               <a:spcBef>
                 <a:spcPts val="283"/>
               </a:spcBef>
@@ -1724,25 +1904,16 @@
               <a:buSzPct val="45000"/>
               <a:buFont typeface="Wingdings" charset="2"/>
               <a:buChar char=""/>
-            </a:pPr>
-            <a:r>
-              <a:rPr b="0" lang="en-US" sz="2000" spc="-1" strike="noStrike">
+              <a:defRPr lang="en-US" sz="2000" b="0" u="none" strike="noStrike">
                 <a:solidFill>
                   <a:srgbClr val="000000"/>
                 </a:solidFill>
+                <a:effectLst/>
+                <a:uFillTx/>
                 <a:latin typeface="Arial"/>
-              </a:rPr>
-              <a:t>Sixth Outline Level</a:t>
-            </a:r>
-            <a:endParaRPr b="0" lang="en-US" sz="2000" spc="-1" strike="noStrike">
-              <a:solidFill>
-                <a:srgbClr val="000000"/>
-              </a:solidFill>
-              <a:latin typeface="Arial"/>
-            </a:endParaRPr>
-          </a:p>
-          <a:p>
-            <a:pPr lvl="6" marL="3024000" indent="-216000">
+              </a:defRPr>
+            </a:lvl6pPr>
+            <a:lvl7pPr lvl="6" algn="l">
               <a:spcBef>
                 <a:spcPts val="283"/>
               </a:spcBef>
@@ -1752,20 +1923,237 @@
               <a:buSzPct val="45000"/>
               <a:buFont typeface="Wingdings" charset="2"/>
               <a:buChar char=""/>
-            </a:pPr>
-            <a:r>
-              <a:rPr b="0" lang="en-US" sz="2000" spc="-1" strike="noStrike">
+              <a:defRPr lang="en-US" sz="2000" b="0" u="none" strike="noStrike">
                 <a:solidFill>
                   <a:srgbClr val="000000"/>
                 </a:solidFill>
+                <a:effectLst/>
+                <a:uFillTx/>
+                <a:latin typeface="Arial"/>
+              </a:defRPr>
+            </a:lvl7pPr>
+          </a:lstStyle>
+          <a:p>
+            <a:pPr marL="432000" indent="-324000" algn="l">
+              <a:spcBef>
+                <a:spcPts val="1417"/>
+              </a:spcBef>
+              <a:buClr>
+                <a:srgbClr val="000000"/>
+              </a:buClr>
+              <a:buSzPct val="45000"/>
+              <a:buFont typeface="Wingdings" charset="2"/>
+              <a:buChar char=""/>
+            </a:pPr>
+            <a:r>
+              <a:rPr lang="en-US" sz="3200" b="0" u="none" strike="noStrike">
+                <a:solidFill>
+                  <a:srgbClr val="000000"/>
+                </a:solidFill>
+                <a:effectLst/>
+                <a:uFillTx/>
+                <a:latin typeface="Arial"/>
+              </a:rPr>
+              <a:t>Click to edit the outline text format</a:t>
+            </a:r>
+            <a:endParaRPr lang="en-US" sz="3200" b="0" u="none" strike="noStrike">
+              <a:solidFill>
+                <a:srgbClr val="000000"/>
+              </a:solidFill>
+              <a:effectLst/>
+              <a:uFillTx/>
+              <a:latin typeface="Arial"/>
+            </a:endParaRPr>
+          </a:p>
+          <a:p>
+            <a:pPr marL="864000" lvl="1" indent="-324000" algn="l">
+              <a:spcBef>
+                <a:spcPts val="1134"/>
+              </a:spcBef>
+              <a:buClr>
+                <a:srgbClr val="000000"/>
+              </a:buClr>
+              <a:buSzPct val="75000"/>
+              <a:buFont typeface="Symbol" charset="2"/>
+              <a:buChar char=""/>
+            </a:pPr>
+            <a:r>
+              <a:rPr lang="en-US" sz="2800" b="0" u="none" strike="noStrike">
+                <a:solidFill>
+                  <a:srgbClr val="000000"/>
+                </a:solidFill>
+                <a:effectLst/>
+                <a:uFillTx/>
+                <a:latin typeface="Arial"/>
+              </a:rPr>
+              <a:t>Second Outline Level</a:t>
+            </a:r>
+            <a:endParaRPr lang="en-US" sz="2800" b="0" u="none" strike="noStrike">
+              <a:solidFill>
+                <a:srgbClr val="000000"/>
+              </a:solidFill>
+              <a:effectLst/>
+              <a:uFillTx/>
+              <a:latin typeface="Arial"/>
+            </a:endParaRPr>
+          </a:p>
+          <a:p>
+            <a:pPr marL="1296000" lvl="2" indent="-288000" algn="l">
+              <a:spcBef>
+                <a:spcPts val="850"/>
+              </a:spcBef>
+              <a:buClr>
+                <a:srgbClr val="000000"/>
+              </a:buClr>
+              <a:buSzPct val="45000"/>
+              <a:buFont typeface="Wingdings" charset="2"/>
+              <a:buChar char=""/>
+            </a:pPr>
+            <a:r>
+              <a:rPr lang="en-US" sz="2400" b="0" u="none" strike="noStrike">
+                <a:solidFill>
+                  <a:srgbClr val="000000"/>
+                </a:solidFill>
+                <a:effectLst/>
+                <a:uFillTx/>
+                <a:latin typeface="Arial"/>
+              </a:rPr>
+              <a:t>Third Outline Level</a:t>
+            </a:r>
+            <a:endParaRPr lang="en-US" sz="2400" b="0" u="none" strike="noStrike">
+              <a:solidFill>
+                <a:srgbClr val="000000"/>
+              </a:solidFill>
+              <a:effectLst/>
+              <a:uFillTx/>
+              <a:latin typeface="Arial"/>
+            </a:endParaRPr>
+          </a:p>
+          <a:p>
+            <a:pPr marL="1728000" lvl="3" indent="-216000" algn="l">
+              <a:spcBef>
+                <a:spcPts val="567"/>
+              </a:spcBef>
+              <a:buClr>
+                <a:srgbClr val="000000"/>
+              </a:buClr>
+              <a:buSzPct val="75000"/>
+              <a:buFont typeface="Symbol" charset="2"/>
+              <a:buChar char=""/>
+            </a:pPr>
+            <a:r>
+              <a:rPr lang="en-US" sz="2000" b="0" u="none" strike="noStrike">
+                <a:solidFill>
+                  <a:srgbClr val="000000"/>
+                </a:solidFill>
+                <a:effectLst/>
+                <a:uFillTx/>
+                <a:latin typeface="Arial"/>
+              </a:rPr>
+              <a:t>Fourth Outline Level</a:t>
+            </a:r>
+            <a:endParaRPr lang="en-US" sz="2000" b="0" u="none" strike="noStrike">
+              <a:solidFill>
+                <a:srgbClr val="000000"/>
+              </a:solidFill>
+              <a:effectLst/>
+              <a:uFillTx/>
+              <a:latin typeface="Arial"/>
+            </a:endParaRPr>
+          </a:p>
+          <a:p>
+            <a:pPr marL="2160000" lvl="4" indent="-216000" algn="l">
+              <a:spcBef>
+                <a:spcPts val="283"/>
+              </a:spcBef>
+              <a:buClr>
+                <a:srgbClr val="000000"/>
+              </a:buClr>
+              <a:buSzPct val="45000"/>
+              <a:buFont typeface="Wingdings" charset="2"/>
+              <a:buChar char=""/>
+            </a:pPr>
+            <a:r>
+              <a:rPr lang="en-US" sz="2000" b="0" u="none" strike="noStrike">
+                <a:solidFill>
+                  <a:srgbClr val="000000"/>
+                </a:solidFill>
+                <a:effectLst/>
+                <a:uFillTx/>
+                <a:latin typeface="Arial"/>
+              </a:rPr>
+              <a:t>Fifth Outline Level</a:t>
+            </a:r>
+            <a:endParaRPr lang="en-US" sz="2000" b="0" u="none" strike="noStrike">
+              <a:solidFill>
+                <a:srgbClr val="000000"/>
+              </a:solidFill>
+              <a:effectLst/>
+              <a:uFillTx/>
+              <a:latin typeface="Arial"/>
+            </a:endParaRPr>
+          </a:p>
+          <a:p>
+            <a:pPr marL="2592000" lvl="5" indent="-216000" algn="l">
+              <a:spcBef>
+                <a:spcPts val="283"/>
+              </a:spcBef>
+              <a:buClr>
+                <a:srgbClr val="000000"/>
+              </a:buClr>
+              <a:buSzPct val="45000"/>
+              <a:buFont typeface="Wingdings" charset="2"/>
+              <a:buChar char=""/>
+            </a:pPr>
+            <a:r>
+              <a:rPr lang="en-US" sz="2000" b="0" u="none" strike="noStrike">
+                <a:solidFill>
+                  <a:srgbClr val="000000"/>
+                </a:solidFill>
+                <a:effectLst/>
+                <a:uFillTx/>
+                <a:latin typeface="Arial"/>
+              </a:rPr>
+              <a:t>Sixth Outline Level</a:t>
+            </a:r>
+            <a:endParaRPr lang="en-US" sz="2000" b="0" u="none" strike="noStrike">
+              <a:solidFill>
+                <a:srgbClr val="000000"/>
+              </a:solidFill>
+              <a:effectLst/>
+              <a:uFillTx/>
+              <a:latin typeface="Arial"/>
+            </a:endParaRPr>
+          </a:p>
+          <a:p>
+            <a:pPr marL="3024000" lvl="6" indent="-216000" algn="l">
+              <a:spcBef>
+                <a:spcPts val="283"/>
+              </a:spcBef>
+              <a:buClr>
+                <a:srgbClr val="000000"/>
+              </a:buClr>
+              <a:buSzPct val="45000"/>
+              <a:buFont typeface="Wingdings" charset="2"/>
+              <a:buChar char=""/>
+            </a:pPr>
+            <a:r>
+              <a:rPr lang="en-US" sz="2000" b="0" u="none" strike="noStrike">
+                <a:solidFill>
+                  <a:srgbClr val="000000"/>
+                </a:solidFill>
+                <a:effectLst/>
+                <a:uFillTx/>
                 <a:latin typeface="Arial"/>
               </a:rPr>
               <a:t>Seventh Outline Level</a:t>
             </a:r>
-            <a:endParaRPr b="0" lang="en-US" sz="2000" spc="-1" strike="noStrike">
-              <a:solidFill>
-                <a:srgbClr val="000000"/>
-              </a:solidFill>
+            <a:endParaRPr lang="en-US" sz="2000" b="0" u="none" strike="noStrike">
+              <a:solidFill>
+                <a:srgbClr val="000000"/>
+              </a:solidFill>
+              <a:effectLst/>
+              <a:uFillTx/>
               <a:latin typeface="Arial"/>
             </a:endParaRPr>
           </a:p>
@@ -1773,7 +2161,7 @@
       </p:sp>
     </p:spTree>
   </p:cSld>
-  <p:clrMap bg1="lt1" bg2="lt2" tx1="dk1" tx2="dk2" accent1="accent1" accent2="accent2" accent3="accent3" accent4="accent4" accent5="accent5" accent6="accent6" hlink="hlink" folHlink="folHlink"/>
+  <p:clrMap bg1="lt1" tx1="dk1" bg2="lt2" tx2="dk2" accent1="accent1" accent2="accent2" accent3="accent3" accent4="accent4" accent5="accent5" accent6="accent6" hlink="hlink" folHlink="folHlink"/>
   <p:sldLayoutIdLst>
     <p:sldLayoutId id="2147483649" r:id="rId2"/>
   </p:sldLayoutIdLst>
@@ -1786,7 +2174,7 @@
     <p:bg>
       <p:bgPr>
         <a:solidFill>
-          <a:srgbClr val="ffffff"/>
+          <a:srgbClr val="FFFFFF"/>
         </a:solidFill>
       </p:bgPr>
     </p:bg>
@@ -1806,7 +2194,7 @@
       </p:grpSpPr>
       <p:sp>
         <p:nvSpPr>
-          <p:cNvPr id="43" name="PlaceHolder 1"/>
+          <p:cNvPr id="49" name="PlaceHolder 1"/>
           <p:cNvSpPr>
             <a:spLocks noGrp="1"/>
           </p:cNvSpPr>
@@ -1817,7 +2205,7 @@
         <p:spPr>
           <a:xfrm>
             <a:off x="4038480" y="6356520"/>
-            <a:ext cx="4114080" cy="364320"/>
+            <a:ext cx="4113720" cy="363960"/>
           </a:xfrm>
           <a:prstGeom prst="rect">
             <a:avLst/>
@@ -1828,7 +2216,7 @@
           </a:ln>
         </p:spPr>
         <p:txBody>
-          <a:bodyPr lIns="91440" rIns="91440" tIns="45720" bIns="45720" anchor="ctr">
+          <a:bodyPr lIns="91440" tIns="45720" rIns="91440" bIns="45720" anchor="ctr">
             <a:noAutofit/>
           </a:bodyPr>
           <a:lstStyle>
@@ -1838,12 +2226,14 @@
               </a:lnSpc>
               <a:buNone/>
               <a:tabLst>
-                <a:tab algn="l" pos="0"/>
+                <a:tab pos="0" algn="l"/>
               </a:tabLst>
-              <a:defRPr b="0" lang="en-US" sz="1400" spc="-1" strike="noStrike">
+              <a:defRPr lang="en-US" sz="1400" b="0" u="none" strike="noStrike">
                 <a:solidFill>
                   <a:srgbClr val="000000"/>
                 </a:solidFill>
+                <a:effectLst/>
+                <a:uFillTx/>
                 <a:latin typeface="Times New Roman"/>
               </a:defRPr>
             </a:lvl1pPr>
@@ -1855,22 +2245,26 @@
               </a:lnSpc>
               <a:buNone/>
               <a:tabLst>
-                <a:tab algn="l" pos="0"/>
+                <a:tab pos="0" algn="l"/>
               </a:tabLst>
             </a:pPr>
             <a:r>
-              <a:rPr b="0" lang="en-US" sz="1400" spc="-1" strike="noStrike">
+              <a:rPr lang="en-US" sz="1400" b="0" u="none" strike="noStrike">
                 <a:solidFill>
                   <a:srgbClr val="000000"/>
                 </a:solidFill>
+                <a:effectLst/>
+                <a:uFillTx/>
                 <a:latin typeface="Times New Roman"/>
               </a:rPr>
-              <a:t>&lt;footer&gt;</a:t>
-            </a:r>
-            <a:endParaRPr b="0" lang="en-US" sz="1400" spc="-1" strike="noStrike">
-              <a:solidFill>
-                <a:srgbClr val="000000"/>
-              </a:solidFill>
+              <a:t> </a:t>
+            </a:r>
+            <a:endParaRPr lang="en-US" sz="1400" b="0" u="none" strike="noStrike">
+              <a:solidFill>
+                <a:srgbClr val="000000"/>
+              </a:solidFill>
+              <a:effectLst/>
+              <a:uFillTx/>
               <a:latin typeface="Times New Roman"/>
             </a:endParaRPr>
           </a:p>
@@ -1878,7 +2272,7 @@
       </p:sp>
       <p:sp>
         <p:nvSpPr>
-          <p:cNvPr id="44" name="PlaceHolder 2"/>
+          <p:cNvPr id="50" name="PlaceHolder 2"/>
           <p:cNvSpPr>
             <a:spLocks noGrp="1"/>
           </p:cNvSpPr>
@@ -1889,7 +2283,7 @@
         <p:spPr>
           <a:xfrm>
             <a:off x="8610480" y="6356520"/>
-            <a:ext cx="2742480" cy="364320"/>
+            <a:ext cx="2742120" cy="363960"/>
           </a:xfrm>
           <a:prstGeom prst="rect">
             <a:avLst/>
@@ -1900,7 +2294,7 @@
           </a:ln>
         </p:spPr>
         <p:txBody>
-          <a:bodyPr lIns="91440" rIns="91440" tIns="45720" bIns="45720" anchor="ctr">
+          <a:bodyPr lIns="91440" tIns="45720" rIns="91440" bIns="45720" anchor="ctr">
             <a:noAutofit/>
           </a:bodyPr>
           <a:lstStyle>
@@ -1910,14 +2304,16 @@
               </a:lnSpc>
               <a:buNone/>
               <a:tabLst>
-                <a:tab algn="l" pos="0"/>
+                <a:tab pos="0" algn="l"/>
               </a:tabLst>
-              <a:defRPr b="0" lang="en-US" sz="1200" spc="-1" strike="noStrike">
+              <a:defRPr lang="en-US" sz="1200" b="0" u="none" strike="noStrike">
                 <a:solidFill>
                   <a:schemeClr val="dk1">
                     <a:tint val="75000"/>
                   </a:schemeClr>
                 </a:solidFill>
+                <a:effectLst/>
+                <a:uFillTx/>
                 <a:latin typeface="Calibri"/>
               </a:defRPr>
             </a:lvl1pPr>
@@ -1929,24 +2325,28 @@
               </a:lnSpc>
               <a:buNone/>
               <a:tabLst>
-                <a:tab algn="l" pos="0"/>
+                <a:tab pos="0" algn="l"/>
               </a:tabLst>
             </a:pPr>
-            <a:fld id="{4D9AAE48-58F5-4961-B03B-2164C6CDEE5D}" type="slidenum">
-              <a:rPr b="0" lang="en-US" sz="1200" spc="-1" strike="noStrike">
+            <a:fld id="{BC24A4C1-95AF-43CE-920B-53968672B6DB}" type="slidenum">
+              <a:rPr lang="en-US" sz="1200" b="0" u="none" strike="noStrike">
                 <a:solidFill>
                   <a:schemeClr val="dk1">
                     <a:tint val="75000"/>
                   </a:schemeClr>
                 </a:solidFill>
+                <a:effectLst/>
+                <a:uFillTx/>
                 <a:latin typeface="Calibri"/>
               </a:rPr>
-              <a:t>&lt;number&gt;</a:t>
+              <a:t>1</a:t>
             </a:fld>
-            <a:endParaRPr b="0" lang="en-US" sz="1200" spc="-1" strike="noStrike">
-              <a:solidFill>
-                <a:srgbClr val="000000"/>
-              </a:solidFill>
+            <a:endParaRPr lang="en-US" sz="1200" b="0" u="none" strike="noStrike">
+              <a:solidFill>
+                <a:srgbClr val="000000"/>
+              </a:solidFill>
+              <a:effectLst/>
+              <a:uFillTx/>
               <a:latin typeface="Times New Roman"/>
             </a:endParaRPr>
           </a:p>
@@ -1954,7 +2354,7 @@
       </p:sp>
       <p:sp>
         <p:nvSpPr>
-          <p:cNvPr id="45" name="PlaceHolder 3"/>
+          <p:cNvPr id="51" name="PlaceHolder 3"/>
           <p:cNvSpPr>
             <a:spLocks noGrp="1"/>
           </p:cNvSpPr>
@@ -1965,7 +2365,7 @@
         <p:spPr>
           <a:xfrm>
             <a:off x="838080" y="6356520"/>
-            <a:ext cx="2742480" cy="364320"/>
+            <a:ext cx="2742120" cy="363960"/>
           </a:xfrm>
           <a:prstGeom prst="rect">
             <a:avLst/>
@@ -1976,37 +2376,43 @@
           </a:ln>
         </p:spPr>
         <p:txBody>
-          <a:bodyPr lIns="91440" rIns="91440" tIns="45720" bIns="45720" anchor="ctr">
+          <a:bodyPr lIns="91440" tIns="45720" rIns="91440" bIns="45720" anchor="ctr">
             <a:noAutofit/>
           </a:bodyPr>
           <a:lstStyle>
-            <a:lvl1pPr indent="0">
+            <a:lvl1pPr indent="0" algn="l">
               <a:buNone/>
-              <a:defRPr b="0" lang="en-US" sz="1400" spc="-1" strike="noStrike">
+              <a:defRPr lang="en-US" sz="1400" b="0" u="none" strike="noStrike">
                 <a:solidFill>
                   <a:srgbClr val="000000"/>
                 </a:solidFill>
+                <a:effectLst/>
+                <a:uFillTx/>
                 <a:latin typeface="Times New Roman"/>
               </a:defRPr>
             </a:lvl1pPr>
           </a:lstStyle>
           <a:p>
-            <a:pPr indent="0">
+            <a:pPr indent="0" algn="l">
               <a:buNone/>
             </a:pPr>
             <a:r>
-              <a:rPr b="0" lang="en-US" sz="1400" spc="-1" strike="noStrike">
+              <a:rPr lang="en-US" sz="1400" b="0" u="none" strike="noStrike">
                 <a:solidFill>
                   <a:srgbClr val="000000"/>
                 </a:solidFill>
+                <a:effectLst/>
+                <a:uFillTx/>
                 <a:latin typeface="Times New Roman"/>
               </a:rPr>
-              <a:t>&lt;date/time&gt;</a:t>
-            </a:r>
-            <a:endParaRPr b="0" lang="en-US" sz="1400" spc="-1" strike="noStrike">
-              <a:solidFill>
-                <a:srgbClr val="000000"/>
-              </a:solidFill>
+              <a:t> </a:t>
+            </a:r>
+            <a:endParaRPr lang="en-US" sz="1400" b="0" u="none" strike="noStrike">
+              <a:solidFill>
+                <a:srgbClr val="000000"/>
+              </a:solidFill>
+              <a:effectLst/>
+              <a:uFillTx/>
               <a:latin typeface="Times New Roman"/>
             </a:endParaRPr>
           </a:p>
@@ -2014,7 +2420,7 @@
       </p:sp>
     </p:spTree>
   </p:cSld>
-  <p:clrMap bg1="lt1" bg2="lt2" tx1="dk1" tx2="dk2" accent1="accent1" accent2="accent2" accent3="accent3" accent4="accent4" accent5="accent5" accent6="accent6" hlink="hlink" folHlink="folHlink"/>
+  <p:clrMap bg1="lt1" tx1="dk1" bg2="lt2" tx2="dk2" accent1="accent1" accent2="accent2" accent3="accent3" accent4="accent4" accent5="accent5" accent6="accent6" hlink="hlink" folHlink="folHlink"/>
   <p:sldLayoutIdLst>
     <p:sldLayoutId id="2147483667" r:id="rId2"/>
   </p:sldLayoutIdLst>
@@ -2027,7 +2433,7 @@
     <p:bg>
       <p:bgPr>
         <a:solidFill>
-          <a:srgbClr val="ffffff"/>
+          <a:srgbClr val="FFFFFF"/>
         </a:solidFill>
       </p:bgPr>
     </p:bg>
@@ -2047,7 +2453,7 @@
       </p:grpSpPr>
       <p:sp>
         <p:nvSpPr>
-          <p:cNvPr id="46" name="PlaceHolder 1"/>
+          <p:cNvPr id="52" name="PlaceHolder 1"/>
           <p:cNvSpPr>
             <a:spLocks noGrp="1"/>
           </p:cNvSpPr>
@@ -2058,7 +2464,7 @@
         <p:spPr>
           <a:xfrm>
             <a:off x="4038480" y="6356520"/>
-            <a:ext cx="4114080" cy="364320"/>
+            <a:ext cx="4113720" cy="363960"/>
           </a:xfrm>
           <a:prstGeom prst="rect">
             <a:avLst/>
@@ -2069,7 +2475,7 @@
           </a:ln>
         </p:spPr>
         <p:txBody>
-          <a:bodyPr lIns="91440" rIns="91440" tIns="45720" bIns="45720" anchor="ctr">
+          <a:bodyPr lIns="91440" tIns="45720" rIns="91440" bIns="45720" anchor="ctr">
             <a:noAutofit/>
           </a:bodyPr>
           <a:lstStyle>
@@ -2079,12 +2485,14 @@
               </a:lnSpc>
               <a:buNone/>
               <a:tabLst>
-                <a:tab algn="l" pos="0"/>
+                <a:tab pos="0" algn="l"/>
               </a:tabLst>
-              <a:defRPr b="0" lang="en-US" sz="1400" spc="-1" strike="noStrike">
+              <a:defRPr lang="en-US" sz="1400" b="0" u="none" strike="noStrike">
                 <a:solidFill>
                   <a:srgbClr val="000000"/>
                 </a:solidFill>
+                <a:effectLst/>
+                <a:uFillTx/>
                 <a:latin typeface="Times New Roman"/>
               </a:defRPr>
             </a:lvl1pPr>
@@ -2096,22 +2504,26 @@
               </a:lnSpc>
               <a:buNone/>
               <a:tabLst>
-                <a:tab algn="l" pos="0"/>
+                <a:tab pos="0" algn="l"/>
               </a:tabLst>
             </a:pPr>
             <a:r>
-              <a:rPr b="0" lang="en-US" sz="1400" spc="-1" strike="noStrike">
+              <a:rPr lang="en-US" sz="1400" b="0" u="none" strike="noStrike">
                 <a:solidFill>
                   <a:srgbClr val="000000"/>
                 </a:solidFill>
+                <a:effectLst/>
+                <a:uFillTx/>
                 <a:latin typeface="Times New Roman"/>
               </a:rPr>
-              <a:t>&lt;footer&gt;</a:t>
-            </a:r>
-            <a:endParaRPr b="0" lang="en-US" sz="1400" spc="-1" strike="noStrike">
-              <a:solidFill>
-                <a:srgbClr val="000000"/>
-              </a:solidFill>
+              <a:t> </a:t>
+            </a:r>
+            <a:endParaRPr lang="en-US" sz="1400" b="0" u="none" strike="noStrike">
+              <a:solidFill>
+                <a:srgbClr val="000000"/>
+              </a:solidFill>
+              <a:effectLst/>
+              <a:uFillTx/>
               <a:latin typeface="Times New Roman"/>
             </a:endParaRPr>
           </a:p>
@@ -2119,7 +2531,7 @@
       </p:sp>
       <p:sp>
         <p:nvSpPr>
-          <p:cNvPr id="47" name="PlaceHolder 2"/>
+          <p:cNvPr id="53" name="PlaceHolder 2"/>
           <p:cNvSpPr>
             <a:spLocks noGrp="1"/>
           </p:cNvSpPr>
@@ -2130,7 +2542,7 @@
         <p:spPr>
           <a:xfrm>
             <a:off x="8610480" y="6356520"/>
-            <a:ext cx="2742480" cy="364320"/>
+            <a:ext cx="2742120" cy="363960"/>
           </a:xfrm>
           <a:prstGeom prst="rect">
             <a:avLst/>
@@ -2141,7 +2553,7 @@
           </a:ln>
         </p:spPr>
         <p:txBody>
-          <a:bodyPr lIns="91440" rIns="91440" tIns="45720" bIns="45720" anchor="ctr">
+          <a:bodyPr lIns="91440" tIns="45720" rIns="91440" bIns="45720" anchor="ctr">
             <a:noAutofit/>
           </a:bodyPr>
           <a:lstStyle>
@@ -2151,14 +2563,16 @@
               </a:lnSpc>
               <a:buNone/>
               <a:tabLst>
-                <a:tab algn="l" pos="0"/>
+                <a:tab pos="0" algn="l"/>
               </a:tabLst>
-              <a:defRPr b="0" lang="en-US" sz="1200" spc="-1" strike="noStrike">
+              <a:defRPr lang="en-US" sz="1200" b="0" u="none" strike="noStrike">
                 <a:solidFill>
                   <a:schemeClr val="dk1">
                     <a:tint val="75000"/>
                   </a:schemeClr>
                 </a:solidFill>
+                <a:effectLst/>
+                <a:uFillTx/>
                 <a:latin typeface="Calibri"/>
               </a:defRPr>
             </a:lvl1pPr>
@@ -2170,24 +2584,28 @@
               </a:lnSpc>
               <a:buNone/>
               <a:tabLst>
-                <a:tab algn="l" pos="0"/>
+                <a:tab pos="0" algn="l"/>
               </a:tabLst>
             </a:pPr>
-            <a:fld id="{633049AD-1DBA-4CD4-A9C5-48E39D1E4032}" type="slidenum">
-              <a:rPr b="0" lang="en-US" sz="1200" spc="-1" strike="noStrike">
+            <a:fld id="{CA718ADE-CE6A-47CB-8B41-200D0402C517}" type="slidenum">
+              <a:rPr lang="en-US" sz="1200" b="0" u="none" strike="noStrike">
                 <a:solidFill>
                   <a:schemeClr val="dk1">
                     <a:tint val="75000"/>
                   </a:schemeClr>
                 </a:solidFill>
+                <a:effectLst/>
+                <a:uFillTx/>
                 <a:latin typeface="Calibri"/>
               </a:rPr>
-              <a:t>&lt;number&gt;</a:t>
+              <a:t>1</a:t>
             </a:fld>
-            <a:endParaRPr b="0" lang="en-US" sz="1200" spc="-1" strike="noStrike">
-              <a:solidFill>
-                <a:srgbClr val="000000"/>
-              </a:solidFill>
+            <a:endParaRPr lang="en-US" sz="1200" b="0" u="none" strike="noStrike">
+              <a:solidFill>
+                <a:srgbClr val="000000"/>
+              </a:solidFill>
+              <a:effectLst/>
+              <a:uFillTx/>
               <a:latin typeface="Times New Roman"/>
             </a:endParaRPr>
           </a:p>
@@ -2195,7 +2613,7 @@
       </p:sp>
       <p:sp>
         <p:nvSpPr>
-          <p:cNvPr id="48" name="PlaceHolder 3"/>
+          <p:cNvPr id="54" name="PlaceHolder 3"/>
           <p:cNvSpPr>
             <a:spLocks noGrp="1"/>
           </p:cNvSpPr>
@@ -2206,7 +2624,7 @@
         <p:spPr>
           <a:xfrm>
             <a:off x="838080" y="6356520"/>
-            <a:ext cx="2742480" cy="364320"/>
+            <a:ext cx="2742120" cy="363960"/>
           </a:xfrm>
           <a:prstGeom prst="rect">
             <a:avLst/>
@@ -2217,37 +2635,43 @@
           </a:ln>
         </p:spPr>
         <p:txBody>
-          <a:bodyPr lIns="91440" rIns="91440" tIns="45720" bIns="45720" anchor="ctr">
+          <a:bodyPr lIns="91440" tIns="45720" rIns="91440" bIns="45720" anchor="ctr">
             <a:noAutofit/>
           </a:bodyPr>
           <a:lstStyle>
-            <a:lvl1pPr indent="0">
+            <a:lvl1pPr indent="0" algn="l">
               <a:buNone/>
-              <a:defRPr b="0" lang="en-US" sz="1400" spc="-1" strike="noStrike">
+              <a:defRPr lang="en-US" sz="1400" b="0" u="none" strike="noStrike">
                 <a:solidFill>
                   <a:srgbClr val="000000"/>
                 </a:solidFill>
+                <a:effectLst/>
+                <a:uFillTx/>
                 <a:latin typeface="Times New Roman"/>
               </a:defRPr>
             </a:lvl1pPr>
           </a:lstStyle>
           <a:p>
-            <a:pPr indent="0">
+            <a:pPr indent="0" algn="l">
               <a:buNone/>
             </a:pPr>
             <a:r>
-              <a:rPr b="0" lang="en-US" sz="1400" spc="-1" strike="noStrike">
+              <a:rPr lang="en-US" sz="1400" b="0" u="none" strike="noStrike">
                 <a:solidFill>
                   <a:srgbClr val="000000"/>
                 </a:solidFill>
+                <a:effectLst/>
+                <a:uFillTx/>
                 <a:latin typeface="Times New Roman"/>
               </a:rPr>
-              <a:t>&lt;date/time&gt;</a:t>
-            </a:r>
-            <a:endParaRPr b="0" lang="en-US" sz="1400" spc="-1" strike="noStrike">
-              <a:solidFill>
-                <a:srgbClr val="000000"/>
-              </a:solidFill>
+              <a:t> </a:t>
+            </a:r>
+            <a:endParaRPr lang="en-US" sz="1400" b="0" u="none" strike="noStrike">
+              <a:solidFill>
+                <a:srgbClr val="000000"/>
+              </a:solidFill>
+              <a:effectLst/>
+              <a:uFillTx/>
               <a:latin typeface="Times New Roman"/>
             </a:endParaRPr>
           </a:p>
@@ -2255,7 +2679,7 @@
       </p:sp>
     </p:spTree>
   </p:cSld>
-  <p:clrMap bg1="lt1" bg2="lt2" tx1="dk1" tx2="dk2" accent1="accent1" accent2="accent2" accent3="accent3" accent4="accent4" accent5="accent5" accent6="accent6" hlink="hlink" folHlink="folHlink"/>
+  <p:clrMap bg1="lt1" tx1="dk1" bg2="lt2" tx2="dk2" accent1="accent1" accent2="accent2" accent3="accent3" accent4="accent4" accent5="accent5" accent6="accent6" hlink="hlink" folHlink="folHlink"/>
   <p:sldLayoutIdLst>
     <p:sldLayoutId id="2147483669" r:id="rId2"/>
   </p:sldLayoutIdLst>
@@ -2268,7 +2692,7 @@
     <p:bg>
       <p:bgPr>
         <a:solidFill>
-          <a:srgbClr val="ffffff"/>
+          <a:srgbClr val="FFFFFF"/>
         </a:solidFill>
       </p:bgPr>
     </p:bg>
@@ -2288,7 +2712,7 @@
       </p:grpSpPr>
       <p:sp>
         <p:nvSpPr>
-          <p:cNvPr id="7" name="PlaceHolder 1"/>
+          <p:cNvPr id="9" name="PlaceHolder 1"/>
           <p:cNvSpPr>
             <a:spLocks noGrp="1"/>
           </p:cNvSpPr>
@@ -2299,7 +2723,7 @@
         <p:spPr>
           <a:xfrm>
             <a:off x="4038480" y="6356520"/>
-            <a:ext cx="4114080" cy="364320"/>
+            <a:ext cx="4113720" cy="363960"/>
           </a:xfrm>
           <a:prstGeom prst="rect">
             <a:avLst/>
@@ -2310,7 +2734,7 @@
           </a:ln>
         </p:spPr>
         <p:txBody>
-          <a:bodyPr lIns="91440" rIns="91440" tIns="45720" bIns="45720" anchor="ctr">
+          <a:bodyPr lIns="91440" tIns="45720" rIns="91440" bIns="45720" anchor="ctr">
             <a:noAutofit/>
           </a:bodyPr>
           <a:lstStyle>
@@ -2320,12 +2744,14 @@
               </a:lnSpc>
               <a:buNone/>
               <a:tabLst>
-                <a:tab algn="l" pos="0"/>
+                <a:tab pos="0" algn="l"/>
               </a:tabLst>
-              <a:defRPr b="0" lang="en-US" sz="1400" spc="-1" strike="noStrike">
+              <a:defRPr lang="en-US" sz="1400" b="0" u="none" strike="noStrike">
                 <a:solidFill>
                   <a:srgbClr val="000000"/>
                 </a:solidFill>
+                <a:effectLst/>
+                <a:uFillTx/>
                 <a:latin typeface="Times New Roman"/>
               </a:defRPr>
             </a:lvl1pPr>
@@ -2337,22 +2763,26 @@
               </a:lnSpc>
               <a:buNone/>
               <a:tabLst>
-                <a:tab algn="l" pos="0"/>
+                <a:tab pos="0" algn="l"/>
               </a:tabLst>
             </a:pPr>
             <a:r>
-              <a:rPr b="0" lang="en-US" sz="1400" spc="-1" strike="noStrike">
+              <a:rPr lang="en-US" sz="1400" b="0" u="none" strike="noStrike">
                 <a:solidFill>
                   <a:srgbClr val="000000"/>
                 </a:solidFill>
+                <a:effectLst/>
+                <a:uFillTx/>
                 <a:latin typeface="Times New Roman"/>
               </a:rPr>
-              <a:t>&lt;footer&gt;</a:t>
-            </a:r>
-            <a:endParaRPr b="0" lang="en-US" sz="1400" spc="-1" strike="noStrike">
-              <a:solidFill>
-                <a:srgbClr val="000000"/>
-              </a:solidFill>
+              <a:t> </a:t>
+            </a:r>
+            <a:endParaRPr lang="en-US" sz="1400" b="0" u="none" strike="noStrike">
+              <a:solidFill>
+                <a:srgbClr val="000000"/>
+              </a:solidFill>
+              <a:effectLst/>
+              <a:uFillTx/>
               <a:latin typeface="Times New Roman"/>
             </a:endParaRPr>
           </a:p>
@@ -2360,7 +2790,7 @@
       </p:sp>
       <p:sp>
         <p:nvSpPr>
-          <p:cNvPr id="8" name="PlaceHolder 2"/>
+          <p:cNvPr id="10" name="PlaceHolder 2"/>
           <p:cNvSpPr>
             <a:spLocks noGrp="1"/>
           </p:cNvSpPr>
@@ -2371,7 +2801,7 @@
         <p:spPr>
           <a:xfrm>
             <a:off x="8610480" y="6356520"/>
-            <a:ext cx="2742480" cy="364320"/>
+            <a:ext cx="2742120" cy="363960"/>
           </a:xfrm>
           <a:prstGeom prst="rect">
             <a:avLst/>
@@ -2382,7 +2812,7 @@
           </a:ln>
         </p:spPr>
         <p:txBody>
-          <a:bodyPr lIns="91440" rIns="91440" tIns="45720" bIns="45720" anchor="ctr">
+          <a:bodyPr lIns="91440" tIns="45720" rIns="91440" bIns="45720" anchor="ctr">
             <a:noAutofit/>
           </a:bodyPr>
           <a:lstStyle>
@@ -2392,14 +2822,16 @@
               </a:lnSpc>
               <a:buNone/>
               <a:tabLst>
-                <a:tab algn="l" pos="0"/>
+                <a:tab pos="0" algn="l"/>
               </a:tabLst>
-              <a:defRPr b="0" lang="en-US" sz="1200" spc="-1" strike="noStrike">
+              <a:defRPr lang="en-US" sz="1200" b="0" u="none" strike="noStrike">
                 <a:solidFill>
                   <a:schemeClr val="dk1">
                     <a:tint val="75000"/>
                   </a:schemeClr>
                 </a:solidFill>
+                <a:effectLst/>
+                <a:uFillTx/>
                 <a:latin typeface="Calibri"/>
               </a:defRPr>
             </a:lvl1pPr>
@@ -2411,24 +2843,28 @@
               </a:lnSpc>
               <a:buNone/>
               <a:tabLst>
-                <a:tab algn="l" pos="0"/>
+                <a:tab pos="0" algn="l"/>
               </a:tabLst>
             </a:pPr>
-            <a:fld id="{2E8D116B-9954-47CC-A8DB-FD0F211DFCA2}" type="slidenum">
-              <a:rPr b="0" lang="en-US" sz="1200" spc="-1" strike="noStrike">
+            <a:fld id="{078964DF-59E3-4447-9266-7318F2602BE8}" type="slidenum">
+              <a:rPr lang="en-US" sz="1200" b="0" u="none" strike="noStrike">
                 <a:solidFill>
                   <a:schemeClr val="dk1">
                     <a:tint val="75000"/>
                   </a:schemeClr>
                 </a:solidFill>
+                <a:effectLst/>
+                <a:uFillTx/>
                 <a:latin typeface="Calibri"/>
               </a:rPr>
-              <a:t>&lt;number&gt;</a:t>
+              <a:t>1</a:t>
             </a:fld>
-            <a:endParaRPr b="0" lang="en-US" sz="1200" spc="-1" strike="noStrike">
-              <a:solidFill>
-                <a:srgbClr val="000000"/>
-              </a:solidFill>
+            <a:endParaRPr lang="en-US" sz="1200" b="0" u="none" strike="noStrike">
+              <a:solidFill>
+                <a:srgbClr val="000000"/>
+              </a:solidFill>
+              <a:effectLst/>
+              <a:uFillTx/>
               <a:latin typeface="Times New Roman"/>
             </a:endParaRPr>
           </a:p>
@@ -2436,7 +2872,7 @@
       </p:sp>
       <p:sp>
         <p:nvSpPr>
-          <p:cNvPr id="9" name="PlaceHolder 3"/>
+          <p:cNvPr id="11" name="PlaceHolder 3"/>
           <p:cNvSpPr>
             <a:spLocks noGrp="1"/>
           </p:cNvSpPr>
@@ -2447,7 +2883,7 @@
         <p:spPr>
           <a:xfrm>
             <a:off x="838080" y="6356520"/>
-            <a:ext cx="2742480" cy="364320"/>
+            <a:ext cx="2742120" cy="363960"/>
           </a:xfrm>
           <a:prstGeom prst="rect">
             <a:avLst/>
@@ -2458,37 +2894,43 @@
           </a:ln>
         </p:spPr>
         <p:txBody>
-          <a:bodyPr lIns="91440" rIns="91440" tIns="45720" bIns="45720" anchor="ctr">
+          <a:bodyPr lIns="91440" tIns="45720" rIns="91440" bIns="45720" anchor="ctr">
             <a:noAutofit/>
           </a:bodyPr>
           <a:lstStyle>
-            <a:lvl1pPr indent="0">
+            <a:lvl1pPr indent="0" algn="l">
               <a:buNone/>
-              <a:defRPr b="0" lang="en-US" sz="1400" spc="-1" strike="noStrike">
+              <a:defRPr lang="en-US" sz="1400" b="0" u="none" strike="noStrike">
                 <a:solidFill>
                   <a:srgbClr val="000000"/>
                 </a:solidFill>
+                <a:effectLst/>
+                <a:uFillTx/>
                 <a:latin typeface="Times New Roman"/>
               </a:defRPr>
             </a:lvl1pPr>
           </a:lstStyle>
           <a:p>
-            <a:pPr indent="0">
+            <a:pPr indent="0" algn="l">
               <a:buNone/>
             </a:pPr>
             <a:r>
-              <a:rPr b="0" lang="en-US" sz="1400" spc="-1" strike="noStrike">
+              <a:rPr lang="en-US" sz="1400" b="0" u="none" strike="noStrike">
                 <a:solidFill>
                   <a:srgbClr val="000000"/>
                 </a:solidFill>
+                <a:effectLst/>
+                <a:uFillTx/>
                 <a:latin typeface="Times New Roman"/>
               </a:rPr>
-              <a:t>&lt;date/time&gt;</a:t>
-            </a:r>
-            <a:endParaRPr b="0" lang="en-US" sz="1400" spc="-1" strike="noStrike">
-              <a:solidFill>
-                <a:srgbClr val="000000"/>
-              </a:solidFill>
+              <a:t> </a:t>
+            </a:r>
+            <a:endParaRPr lang="en-US" sz="1400" b="0" u="none" strike="noStrike">
+              <a:solidFill>
+                <a:srgbClr val="000000"/>
+              </a:solidFill>
+              <a:effectLst/>
+              <a:uFillTx/>
               <a:latin typeface="Times New Roman"/>
             </a:endParaRPr>
           </a:p>
@@ -2496,7 +2938,7 @@
       </p:sp>
     </p:spTree>
   </p:cSld>
-  <p:clrMap bg1="lt1" bg2="lt2" tx1="dk1" tx2="dk2" accent1="accent1" accent2="accent2" accent3="accent3" accent4="accent4" accent5="accent5" accent6="accent6" hlink="hlink" folHlink="folHlink"/>
+  <p:clrMap bg1="lt1" tx1="dk1" bg2="lt2" tx2="dk2" accent1="accent1" accent2="accent2" accent3="accent3" accent4="accent4" accent5="accent5" accent6="accent6" hlink="hlink" folHlink="folHlink"/>
   <p:sldLayoutIdLst>
     <p:sldLayoutId id="2147483651" r:id="rId2"/>
   </p:sldLayoutIdLst>
@@ -2509,7 +2951,7 @@
     <p:bg>
       <p:bgPr>
         <a:solidFill>
-          <a:srgbClr val="ffffff"/>
+          <a:srgbClr val="FFFFFF"/>
         </a:solidFill>
       </p:bgPr>
     </p:bg>
@@ -2529,7 +2971,7 @@
       </p:grpSpPr>
       <p:sp>
         <p:nvSpPr>
-          <p:cNvPr id="10" name="PlaceHolder 1"/>
+          <p:cNvPr id="14" name="PlaceHolder 1"/>
           <p:cNvSpPr>
             <a:spLocks noGrp="1"/>
           </p:cNvSpPr>
@@ -2540,7 +2982,7 @@
         <p:spPr>
           <a:xfrm>
             <a:off x="4038480" y="6356520"/>
-            <a:ext cx="4114080" cy="364320"/>
+            <a:ext cx="4113720" cy="363960"/>
           </a:xfrm>
           <a:prstGeom prst="rect">
             <a:avLst/>
@@ -2551,7 +2993,7 @@
           </a:ln>
         </p:spPr>
         <p:txBody>
-          <a:bodyPr lIns="91440" rIns="91440" tIns="45720" bIns="45720" anchor="ctr">
+          <a:bodyPr lIns="91440" tIns="45720" rIns="91440" bIns="45720" anchor="ctr">
             <a:noAutofit/>
           </a:bodyPr>
           <a:lstStyle>
@@ -2561,12 +3003,14 @@
               </a:lnSpc>
               <a:buNone/>
               <a:tabLst>
-                <a:tab algn="l" pos="0"/>
+                <a:tab pos="0" algn="l"/>
               </a:tabLst>
-              <a:defRPr b="0" lang="en-US" sz="1400" spc="-1" strike="noStrike">
+              <a:defRPr lang="en-US" sz="1400" b="0" u="none" strike="noStrike">
                 <a:solidFill>
                   <a:srgbClr val="000000"/>
                 </a:solidFill>
+                <a:effectLst/>
+                <a:uFillTx/>
                 <a:latin typeface="Times New Roman"/>
               </a:defRPr>
             </a:lvl1pPr>
@@ -2578,22 +3022,26 @@
               </a:lnSpc>
               <a:buNone/>
               <a:tabLst>
-                <a:tab algn="l" pos="0"/>
+                <a:tab pos="0" algn="l"/>
               </a:tabLst>
             </a:pPr>
             <a:r>
-              <a:rPr b="0" lang="en-US" sz="1400" spc="-1" strike="noStrike">
+              <a:rPr lang="en-US" sz="1400" b="0" u="none" strike="noStrike">
                 <a:solidFill>
                   <a:srgbClr val="000000"/>
                 </a:solidFill>
+                <a:effectLst/>
+                <a:uFillTx/>
                 <a:latin typeface="Times New Roman"/>
               </a:rPr>
-              <a:t>&lt;footer&gt;</a:t>
-            </a:r>
-            <a:endParaRPr b="0" lang="en-US" sz="1400" spc="-1" strike="noStrike">
-              <a:solidFill>
-                <a:srgbClr val="000000"/>
-              </a:solidFill>
+              <a:t> </a:t>
+            </a:r>
+            <a:endParaRPr lang="en-US" sz="1400" b="0" u="none" strike="noStrike">
+              <a:solidFill>
+                <a:srgbClr val="000000"/>
+              </a:solidFill>
+              <a:effectLst/>
+              <a:uFillTx/>
               <a:latin typeface="Times New Roman"/>
             </a:endParaRPr>
           </a:p>
@@ -2601,7 +3049,7 @@
       </p:sp>
       <p:sp>
         <p:nvSpPr>
-          <p:cNvPr id="11" name="PlaceHolder 2"/>
+          <p:cNvPr id="15" name="PlaceHolder 2"/>
           <p:cNvSpPr>
             <a:spLocks noGrp="1"/>
           </p:cNvSpPr>
@@ -2612,7 +3060,7 @@
         <p:spPr>
           <a:xfrm>
             <a:off x="8610480" y="6356520"/>
-            <a:ext cx="2742480" cy="364320"/>
+            <a:ext cx="2742120" cy="363960"/>
           </a:xfrm>
           <a:prstGeom prst="rect">
             <a:avLst/>
@@ -2623,7 +3071,7 @@
           </a:ln>
         </p:spPr>
         <p:txBody>
-          <a:bodyPr lIns="91440" rIns="91440" tIns="45720" bIns="45720" anchor="ctr">
+          <a:bodyPr lIns="91440" tIns="45720" rIns="91440" bIns="45720" anchor="ctr">
             <a:noAutofit/>
           </a:bodyPr>
           <a:lstStyle>
@@ -2633,14 +3081,16 @@
               </a:lnSpc>
               <a:buNone/>
               <a:tabLst>
-                <a:tab algn="l" pos="0"/>
+                <a:tab pos="0" algn="l"/>
               </a:tabLst>
-              <a:defRPr b="0" lang="en-US" sz="1200" spc="-1" strike="noStrike">
+              <a:defRPr lang="en-US" sz="1200" b="0" u="none" strike="noStrike">
                 <a:solidFill>
                   <a:schemeClr val="dk1">
                     <a:tint val="75000"/>
                   </a:schemeClr>
                 </a:solidFill>
+                <a:effectLst/>
+                <a:uFillTx/>
                 <a:latin typeface="Calibri"/>
               </a:defRPr>
             </a:lvl1pPr>
@@ -2652,24 +3102,28 @@
               </a:lnSpc>
               <a:buNone/>
               <a:tabLst>
-                <a:tab algn="l" pos="0"/>
+                <a:tab pos="0" algn="l"/>
               </a:tabLst>
             </a:pPr>
-            <a:fld id="{A2126CA8-2F94-44F7-BE53-31ACB5DC0A62}" type="slidenum">
-              <a:rPr b="0" lang="en-US" sz="1200" spc="-1" strike="noStrike">
+            <a:fld id="{065F7BCB-9BA7-4173-B6F4-CA98F06F511D}" type="slidenum">
+              <a:rPr lang="en-US" sz="1200" b="0" u="none" strike="noStrike">
                 <a:solidFill>
                   <a:schemeClr val="dk1">
                     <a:tint val="75000"/>
                   </a:schemeClr>
                 </a:solidFill>
+                <a:effectLst/>
+                <a:uFillTx/>
                 <a:latin typeface="Calibri"/>
               </a:rPr>
-              <a:t>&lt;number&gt;</a:t>
+              <a:t>1</a:t>
             </a:fld>
-            <a:endParaRPr b="0" lang="en-US" sz="1200" spc="-1" strike="noStrike">
-              <a:solidFill>
-                <a:srgbClr val="000000"/>
-              </a:solidFill>
+            <a:endParaRPr lang="en-US" sz="1200" b="0" u="none" strike="noStrike">
+              <a:solidFill>
+                <a:srgbClr val="000000"/>
+              </a:solidFill>
+              <a:effectLst/>
+              <a:uFillTx/>
               <a:latin typeface="Times New Roman"/>
             </a:endParaRPr>
           </a:p>
@@ -2677,7 +3131,7 @@
       </p:sp>
       <p:sp>
         <p:nvSpPr>
-          <p:cNvPr id="12" name="PlaceHolder 3"/>
+          <p:cNvPr id="16" name="PlaceHolder 3"/>
           <p:cNvSpPr>
             <a:spLocks noGrp="1"/>
           </p:cNvSpPr>
@@ -2688,7 +3142,7 @@
         <p:spPr>
           <a:xfrm>
             <a:off x="838080" y="6356520"/>
-            <a:ext cx="2742480" cy="364320"/>
+            <a:ext cx="2742120" cy="363960"/>
           </a:xfrm>
           <a:prstGeom prst="rect">
             <a:avLst/>
@@ -2699,37 +3153,43 @@
           </a:ln>
         </p:spPr>
         <p:txBody>
-          <a:bodyPr lIns="91440" rIns="91440" tIns="45720" bIns="45720" anchor="ctr">
+          <a:bodyPr lIns="91440" tIns="45720" rIns="91440" bIns="45720" anchor="ctr">
             <a:noAutofit/>
           </a:bodyPr>
           <a:lstStyle>
-            <a:lvl1pPr indent="0">
+            <a:lvl1pPr indent="0" algn="l">
               <a:buNone/>
-              <a:defRPr b="0" lang="en-US" sz="1400" spc="-1" strike="noStrike">
+              <a:defRPr lang="en-US" sz="1400" b="0" u="none" strike="noStrike">
                 <a:solidFill>
                   <a:srgbClr val="000000"/>
                 </a:solidFill>
+                <a:effectLst/>
+                <a:uFillTx/>
                 <a:latin typeface="Times New Roman"/>
               </a:defRPr>
             </a:lvl1pPr>
           </a:lstStyle>
           <a:p>
-            <a:pPr indent="0">
+            <a:pPr indent="0" algn="l">
               <a:buNone/>
             </a:pPr>
             <a:r>
-              <a:rPr b="0" lang="en-US" sz="1400" spc="-1" strike="noStrike">
+              <a:rPr lang="en-US" sz="1400" b="0" u="none" strike="noStrike">
                 <a:solidFill>
                   <a:srgbClr val="000000"/>
                 </a:solidFill>
+                <a:effectLst/>
+                <a:uFillTx/>
                 <a:latin typeface="Times New Roman"/>
               </a:rPr>
-              <a:t>&lt;date/time&gt;</a:t>
-            </a:r>
-            <a:endParaRPr b="0" lang="en-US" sz="1400" spc="-1" strike="noStrike">
-              <a:solidFill>
-                <a:srgbClr val="000000"/>
-              </a:solidFill>
+              <a:t> </a:t>
+            </a:r>
+            <a:endParaRPr lang="en-US" sz="1400" b="0" u="none" strike="noStrike">
+              <a:solidFill>
+                <a:srgbClr val="000000"/>
+              </a:solidFill>
+              <a:effectLst/>
+              <a:uFillTx/>
               <a:latin typeface="Times New Roman"/>
             </a:endParaRPr>
           </a:p>
@@ -2737,7 +3197,7 @@
       </p:sp>
     </p:spTree>
   </p:cSld>
-  <p:clrMap bg1="lt1" bg2="lt2" tx1="dk1" tx2="dk2" accent1="accent1" accent2="accent2" accent3="accent3" accent4="accent4" accent5="accent5" accent6="accent6" hlink="hlink" folHlink="folHlink"/>
+  <p:clrMap bg1="lt1" tx1="dk1" bg2="lt2" tx2="dk2" accent1="accent1" accent2="accent2" accent3="accent3" accent4="accent4" accent5="accent5" accent6="accent6" hlink="hlink" folHlink="folHlink"/>
   <p:sldLayoutIdLst>
     <p:sldLayoutId id="2147483653" r:id="rId2"/>
   </p:sldLayoutIdLst>
@@ -2750,7 +3210,7 @@
     <p:bg>
       <p:bgPr>
         <a:solidFill>
-          <a:srgbClr val="ffffff"/>
+          <a:srgbClr val="FFFFFF"/>
         </a:solidFill>
       </p:bgPr>
     </p:bg>
@@ -2770,7 +3230,7 @@
       </p:grpSpPr>
       <p:sp>
         <p:nvSpPr>
-          <p:cNvPr id="13" name="PlaceHolder 1"/>
+          <p:cNvPr id="19" name="PlaceHolder 1"/>
           <p:cNvSpPr>
             <a:spLocks noGrp="1"/>
           </p:cNvSpPr>
@@ -2781,7 +3241,7 @@
         <p:spPr>
           <a:xfrm>
             <a:off x="1523880" y="1122480"/>
-            <a:ext cx="9143280" cy="2386800"/>
+            <a:ext cx="9142920" cy="2386440"/>
           </a:xfrm>
           <a:prstGeom prst="rect">
             <a:avLst/>
@@ -2792,26 +3252,43 @@
           </a:ln>
         </p:spPr>
         <p:txBody>
-          <a:bodyPr lIns="0" rIns="0" tIns="0" bIns="0" anchor="ctr">
+          <a:bodyPr lIns="0" tIns="0" rIns="0" bIns="0" anchor="ctr">
             <a:noAutofit/>
           </a:bodyPr>
-          <a:p>
-            <a:pPr indent="0">
+          <a:lstStyle>
+            <a:lvl1pPr indent="0" algn="l">
               <a:buNone/>
-            </a:pPr>
-            <a:r>
-              <a:rPr b="0" lang="en-US" sz="1800" spc="-1" strike="noStrike">
+              <a:defRPr lang="en-US" sz="1800" b="0" u="none" strike="noStrike">
                 <a:solidFill>
                   <a:srgbClr val="000000"/>
                 </a:solidFill>
+                <a:effectLst/>
+                <a:uFillTx/>
+                <a:latin typeface="Arial"/>
+              </a:defRPr>
+            </a:lvl1pPr>
+          </a:lstStyle>
+          <a:p>
+            <a:pPr indent="0" algn="l">
+              <a:buNone/>
+            </a:pPr>
+            <a:r>
+              <a:rPr lang="en-US" sz="1800" b="0" u="none" strike="noStrike">
+                <a:solidFill>
+                  <a:srgbClr val="000000"/>
+                </a:solidFill>
+                <a:effectLst/>
+                <a:uFillTx/>
                 <a:latin typeface="Arial"/>
               </a:rPr>
               <a:t>Click to edit the title text format</a:t>
             </a:r>
-            <a:endParaRPr b="0" lang="en-US" sz="1800" spc="-1" strike="noStrike">
-              <a:solidFill>
-                <a:srgbClr val="000000"/>
-              </a:solidFill>
+            <a:endParaRPr lang="en-US" sz="1800" b="0" u="none" strike="noStrike">
+              <a:solidFill>
+                <a:srgbClr val="000000"/>
+              </a:solidFill>
+              <a:effectLst/>
+              <a:uFillTx/>
               <a:latin typeface="Arial"/>
             </a:endParaRPr>
           </a:p>
@@ -2819,7 +3296,7 @@
       </p:sp>
       <p:sp>
         <p:nvSpPr>
-          <p:cNvPr id="14" name="PlaceHolder 2"/>
+          <p:cNvPr id="20" name="PlaceHolder 2"/>
           <p:cNvSpPr>
             <a:spLocks noGrp="1"/>
           </p:cNvSpPr>
@@ -2841,11 +3318,11 @@
           </a:ln>
         </p:spPr>
         <p:txBody>
-          <a:bodyPr lIns="0" rIns="0" tIns="0" bIns="0" anchor="t">
+          <a:bodyPr lIns="0" tIns="0" rIns="0" bIns="0" anchor="t">
             <a:normAutofit/>
           </a:bodyPr>
-          <a:p>
-            <a:pPr marL="432000" indent="-324000">
+          <a:lstStyle>
+            <a:lvl1pPr algn="l">
               <a:spcBef>
                 <a:spcPts val="1417"/>
               </a:spcBef>
@@ -2855,25 +3332,16 @@
               <a:buSzPct val="45000"/>
               <a:buFont typeface="Wingdings" charset="2"/>
               <a:buChar char=""/>
-            </a:pPr>
-            <a:r>
-              <a:rPr b="0" lang="en-US" sz="1800" spc="-1" strike="noStrike">
+              <a:defRPr lang="en-US" sz="1800" b="0" u="none" strike="noStrike">
                 <a:solidFill>
                   <a:srgbClr val="000000"/>
                 </a:solidFill>
+                <a:effectLst/>
+                <a:uFillTx/>
                 <a:latin typeface="Arial"/>
-              </a:rPr>
-              <a:t>Click to edit the outline text format</a:t>
-            </a:r>
-            <a:endParaRPr b="0" lang="en-US" sz="1800" spc="-1" strike="noStrike">
-              <a:solidFill>
-                <a:srgbClr val="000000"/>
-              </a:solidFill>
-              <a:latin typeface="Arial"/>
-            </a:endParaRPr>
-          </a:p>
-          <a:p>
-            <a:pPr lvl="1" marL="864000" indent="-324000">
+              </a:defRPr>
+            </a:lvl1pPr>
+            <a:lvl2pPr lvl="1" algn="l">
               <a:spcBef>
                 <a:spcPts val="1134"/>
               </a:spcBef>
@@ -2883,25 +3351,16 @@
               <a:buSzPct val="75000"/>
               <a:buFont typeface="Symbol" charset="2"/>
               <a:buChar char=""/>
-            </a:pPr>
-            <a:r>
-              <a:rPr b="0" lang="en-US" sz="1800" spc="-1" strike="noStrike">
+              <a:defRPr lang="en-US" sz="1800" b="0" u="none" strike="noStrike">
                 <a:solidFill>
                   <a:srgbClr val="000000"/>
                 </a:solidFill>
+                <a:effectLst/>
+                <a:uFillTx/>
                 <a:latin typeface="Arial"/>
-              </a:rPr>
-              <a:t>Second Outline Level</a:t>
-            </a:r>
-            <a:endParaRPr b="0" lang="en-US" sz="1800" spc="-1" strike="noStrike">
-              <a:solidFill>
-                <a:srgbClr val="000000"/>
-              </a:solidFill>
-              <a:latin typeface="Arial"/>
-            </a:endParaRPr>
-          </a:p>
-          <a:p>
-            <a:pPr lvl="2" marL="1296000" indent="-288000">
+              </a:defRPr>
+            </a:lvl2pPr>
+            <a:lvl3pPr lvl="2" algn="l">
               <a:spcBef>
                 <a:spcPts val="850"/>
               </a:spcBef>
@@ -2911,25 +3370,16 @@
               <a:buSzPct val="45000"/>
               <a:buFont typeface="Wingdings" charset="2"/>
               <a:buChar char=""/>
-            </a:pPr>
-            <a:r>
-              <a:rPr b="0" lang="en-US" sz="1800" spc="-1" strike="noStrike">
+              <a:defRPr lang="en-US" sz="1800" b="0" u="none" strike="noStrike">
                 <a:solidFill>
                   <a:srgbClr val="000000"/>
                 </a:solidFill>
+                <a:effectLst/>
+                <a:uFillTx/>
                 <a:latin typeface="Arial"/>
-              </a:rPr>
-              <a:t>Third Outline Level</a:t>
-            </a:r>
-            <a:endParaRPr b="0" lang="en-US" sz="1800" spc="-1" strike="noStrike">
-              <a:solidFill>
-                <a:srgbClr val="000000"/>
-              </a:solidFill>
-              <a:latin typeface="Arial"/>
-            </a:endParaRPr>
-          </a:p>
-          <a:p>
-            <a:pPr lvl="3" marL="1728000" indent="-216000">
+              </a:defRPr>
+            </a:lvl3pPr>
+            <a:lvl4pPr lvl="3" algn="l">
               <a:spcBef>
                 <a:spcPts val="567"/>
               </a:spcBef>
@@ -2939,25 +3389,16 @@
               <a:buSzPct val="75000"/>
               <a:buFont typeface="Symbol" charset="2"/>
               <a:buChar char=""/>
-            </a:pPr>
-            <a:r>
-              <a:rPr b="0" lang="en-US" sz="1800" spc="-1" strike="noStrike">
+              <a:defRPr lang="en-US" sz="1800" b="0" u="none" strike="noStrike">
                 <a:solidFill>
                   <a:srgbClr val="000000"/>
                 </a:solidFill>
+                <a:effectLst/>
+                <a:uFillTx/>
                 <a:latin typeface="Arial"/>
-              </a:rPr>
-              <a:t>Fourth Outline Level</a:t>
-            </a:r>
-            <a:endParaRPr b="0" lang="en-US" sz="1800" spc="-1" strike="noStrike">
-              <a:solidFill>
-                <a:srgbClr val="000000"/>
-              </a:solidFill>
-              <a:latin typeface="Arial"/>
-            </a:endParaRPr>
-          </a:p>
-          <a:p>
-            <a:pPr lvl="4" marL="2160000" indent="-216000">
+              </a:defRPr>
+            </a:lvl4pPr>
+            <a:lvl5pPr lvl="4" algn="l">
               <a:spcBef>
                 <a:spcPts val="283"/>
               </a:spcBef>
@@ -2967,25 +3408,16 @@
               <a:buSzPct val="45000"/>
               <a:buFont typeface="Wingdings" charset="2"/>
               <a:buChar char=""/>
-            </a:pPr>
-            <a:r>
-              <a:rPr b="0" lang="en-US" sz="1800" spc="-1" strike="noStrike">
+              <a:defRPr lang="en-US" sz="1800" b="0" u="none" strike="noStrike">
                 <a:solidFill>
                   <a:srgbClr val="000000"/>
                 </a:solidFill>
+                <a:effectLst/>
+                <a:uFillTx/>
                 <a:latin typeface="Arial"/>
-              </a:rPr>
-              <a:t>Fifth Outline Level</a:t>
-            </a:r>
-            <a:endParaRPr b="0" lang="en-US" sz="1800" spc="-1" strike="noStrike">
-              <a:solidFill>
-                <a:srgbClr val="000000"/>
-              </a:solidFill>
-              <a:latin typeface="Arial"/>
-            </a:endParaRPr>
-          </a:p>
-          <a:p>
-            <a:pPr lvl="5" marL="2592000" indent="-216000">
+              </a:defRPr>
+            </a:lvl5pPr>
+            <a:lvl6pPr lvl="5" algn="l">
               <a:spcBef>
                 <a:spcPts val="283"/>
               </a:spcBef>
@@ -2995,25 +3427,16 @@
               <a:buSzPct val="45000"/>
               <a:buFont typeface="Wingdings" charset="2"/>
               <a:buChar char=""/>
-            </a:pPr>
-            <a:r>
-              <a:rPr b="0" lang="en-US" sz="1800" spc="-1" strike="noStrike">
+              <a:defRPr lang="en-US" sz="1800" b="0" u="none" strike="noStrike">
                 <a:solidFill>
                   <a:srgbClr val="000000"/>
                 </a:solidFill>
+                <a:effectLst/>
+                <a:uFillTx/>
                 <a:latin typeface="Arial"/>
-              </a:rPr>
-              <a:t>Sixth Outline Level</a:t>
-            </a:r>
-            <a:endParaRPr b="0" lang="en-US" sz="1800" spc="-1" strike="noStrike">
-              <a:solidFill>
-                <a:srgbClr val="000000"/>
-              </a:solidFill>
-              <a:latin typeface="Arial"/>
-            </a:endParaRPr>
-          </a:p>
-          <a:p>
-            <a:pPr lvl="6" marL="3024000" indent="-216000">
+              </a:defRPr>
+            </a:lvl6pPr>
+            <a:lvl7pPr lvl="6" algn="l">
               <a:spcBef>
                 <a:spcPts val="283"/>
               </a:spcBef>
@@ -3023,20 +3446,237 @@
               <a:buSzPct val="45000"/>
               <a:buFont typeface="Wingdings" charset="2"/>
               <a:buChar char=""/>
-            </a:pPr>
-            <a:r>
-              <a:rPr b="0" lang="en-US" sz="1800" spc="-1" strike="noStrike">
+              <a:defRPr lang="en-US" sz="1800" b="0" u="none" strike="noStrike">
                 <a:solidFill>
                   <a:srgbClr val="000000"/>
                 </a:solidFill>
+                <a:effectLst/>
+                <a:uFillTx/>
+                <a:latin typeface="Arial"/>
+              </a:defRPr>
+            </a:lvl7pPr>
+          </a:lstStyle>
+          <a:p>
+            <a:pPr marL="432000" indent="-324000" algn="l">
+              <a:spcBef>
+                <a:spcPts val="1417"/>
+              </a:spcBef>
+              <a:buClr>
+                <a:srgbClr val="000000"/>
+              </a:buClr>
+              <a:buSzPct val="45000"/>
+              <a:buFont typeface="Wingdings" charset="2"/>
+              <a:buChar char=""/>
+            </a:pPr>
+            <a:r>
+              <a:rPr lang="en-US" sz="1800" b="0" u="none" strike="noStrike">
+                <a:solidFill>
+                  <a:srgbClr val="000000"/>
+                </a:solidFill>
+                <a:effectLst/>
+                <a:uFillTx/>
+                <a:latin typeface="Arial"/>
+              </a:rPr>
+              <a:t>Click to edit the outline text format</a:t>
+            </a:r>
+            <a:endParaRPr lang="en-US" sz="1800" b="0" u="none" strike="noStrike">
+              <a:solidFill>
+                <a:srgbClr val="000000"/>
+              </a:solidFill>
+              <a:effectLst/>
+              <a:uFillTx/>
+              <a:latin typeface="Arial"/>
+            </a:endParaRPr>
+          </a:p>
+          <a:p>
+            <a:pPr marL="864000" lvl="1" indent="-324000" algn="l">
+              <a:spcBef>
+                <a:spcPts val="1134"/>
+              </a:spcBef>
+              <a:buClr>
+                <a:srgbClr val="000000"/>
+              </a:buClr>
+              <a:buSzPct val="75000"/>
+              <a:buFont typeface="Symbol" charset="2"/>
+              <a:buChar char=""/>
+            </a:pPr>
+            <a:r>
+              <a:rPr lang="en-US" sz="1800" b="0" u="none" strike="noStrike">
+                <a:solidFill>
+                  <a:srgbClr val="000000"/>
+                </a:solidFill>
+                <a:effectLst/>
+                <a:uFillTx/>
+                <a:latin typeface="Arial"/>
+              </a:rPr>
+              <a:t>Second Outline Level</a:t>
+            </a:r>
+            <a:endParaRPr lang="en-US" sz="1800" b="0" u="none" strike="noStrike">
+              <a:solidFill>
+                <a:srgbClr val="000000"/>
+              </a:solidFill>
+              <a:effectLst/>
+              <a:uFillTx/>
+              <a:latin typeface="Arial"/>
+            </a:endParaRPr>
+          </a:p>
+          <a:p>
+            <a:pPr marL="1296000" lvl="2" indent="-288000" algn="l">
+              <a:spcBef>
+                <a:spcPts val="850"/>
+              </a:spcBef>
+              <a:buClr>
+                <a:srgbClr val="000000"/>
+              </a:buClr>
+              <a:buSzPct val="45000"/>
+              <a:buFont typeface="Wingdings" charset="2"/>
+              <a:buChar char=""/>
+            </a:pPr>
+            <a:r>
+              <a:rPr lang="en-US" sz="1800" b="0" u="none" strike="noStrike">
+                <a:solidFill>
+                  <a:srgbClr val="000000"/>
+                </a:solidFill>
+                <a:effectLst/>
+                <a:uFillTx/>
+                <a:latin typeface="Arial"/>
+              </a:rPr>
+              <a:t>Third Outline Level</a:t>
+            </a:r>
+            <a:endParaRPr lang="en-US" sz="1800" b="0" u="none" strike="noStrike">
+              <a:solidFill>
+                <a:srgbClr val="000000"/>
+              </a:solidFill>
+              <a:effectLst/>
+              <a:uFillTx/>
+              <a:latin typeface="Arial"/>
+            </a:endParaRPr>
+          </a:p>
+          <a:p>
+            <a:pPr marL="1728000" lvl="3" indent="-216000" algn="l">
+              <a:spcBef>
+                <a:spcPts val="567"/>
+              </a:spcBef>
+              <a:buClr>
+                <a:srgbClr val="000000"/>
+              </a:buClr>
+              <a:buSzPct val="75000"/>
+              <a:buFont typeface="Symbol" charset="2"/>
+              <a:buChar char=""/>
+            </a:pPr>
+            <a:r>
+              <a:rPr lang="en-US" sz="1800" b="0" u="none" strike="noStrike">
+                <a:solidFill>
+                  <a:srgbClr val="000000"/>
+                </a:solidFill>
+                <a:effectLst/>
+                <a:uFillTx/>
+                <a:latin typeface="Arial"/>
+              </a:rPr>
+              <a:t>Fourth Outline Level</a:t>
+            </a:r>
+            <a:endParaRPr lang="en-US" sz="1800" b="0" u="none" strike="noStrike">
+              <a:solidFill>
+                <a:srgbClr val="000000"/>
+              </a:solidFill>
+              <a:effectLst/>
+              <a:uFillTx/>
+              <a:latin typeface="Arial"/>
+            </a:endParaRPr>
+          </a:p>
+          <a:p>
+            <a:pPr marL="2160000" lvl="4" indent="-216000" algn="l">
+              <a:spcBef>
+                <a:spcPts val="283"/>
+              </a:spcBef>
+              <a:buClr>
+                <a:srgbClr val="000000"/>
+              </a:buClr>
+              <a:buSzPct val="45000"/>
+              <a:buFont typeface="Wingdings" charset="2"/>
+              <a:buChar char=""/>
+            </a:pPr>
+            <a:r>
+              <a:rPr lang="en-US" sz="1800" b="0" u="none" strike="noStrike">
+                <a:solidFill>
+                  <a:srgbClr val="000000"/>
+                </a:solidFill>
+                <a:effectLst/>
+                <a:uFillTx/>
+                <a:latin typeface="Arial"/>
+              </a:rPr>
+              <a:t>Fifth Outline Level</a:t>
+            </a:r>
+            <a:endParaRPr lang="en-US" sz="1800" b="0" u="none" strike="noStrike">
+              <a:solidFill>
+                <a:srgbClr val="000000"/>
+              </a:solidFill>
+              <a:effectLst/>
+              <a:uFillTx/>
+              <a:latin typeface="Arial"/>
+            </a:endParaRPr>
+          </a:p>
+          <a:p>
+            <a:pPr marL="2592000" lvl="5" indent="-216000" algn="l">
+              <a:spcBef>
+                <a:spcPts val="283"/>
+              </a:spcBef>
+              <a:buClr>
+                <a:srgbClr val="000000"/>
+              </a:buClr>
+              <a:buSzPct val="45000"/>
+              <a:buFont typeface="Wingdings" charset="2"/>
+              <a:buChar char=""/>
+            </a:pPr>
+            <a:r>
+              <a:rPr lang="en-US" sz="1800" b="0" u="none" strike="noStrike">
+                <a:solidFill>
+                  <a:srgbClr val="000000"/>
+                </a:solidFill>
+                <a:effectLst/>
+                <a:uFillTx/>
+                <a:latin typeface="Arial"/>
+              </a:rPr>
+              <a:t>Sixth Outline Level</a:t>
+            </a:r>
+            <a:endParaRPr lang="en-US" sz="1800" b="0" u="none" strike="noStrike">
+              <a:solidFill>
+                <a:srgbClr val="000000"/>
+              </a:solidFill>
+              <a:effectLst/>
+              <a:uFillTx/>
+              <a:latin typeface="Arial"/>
+            </a:endParaRPr>
+          </a:p>
+          <a:p>
+            <a:pPr marL="3024000" lvl="6" indent="-216000" algn="l">
+              <a:spcBef>
+                <a:spcPts val="283"/>
+              </a:spcBef>
+              <a:buClr>
+                <a:srgbClr val="000000"/>
+              </a:buClr>
+              <a:buSzPct val="45000"/>
+              <a:buFont typeface="Wingdings" charset="2"/>
+              <a:buChar char=""/>
+            </a:pPr>
+            <a:r>
+              <a:rPr lang="en-US" sz="1800" b="0" u="none" strike="noStrike">
+                <a:solidFill>
+                  <a:srgbClr val="000000"/>
+                </a:solidFill>
+                <a:effectLst/>
+                <a:uFillTx/>
                 <a:latin typeface="Arial"/>
               </a:rPr>
               <a:t>Seventh Outline Level</a:t>
             </a:r>
-            <a:endParaRPr b="0" lang="en-US" sz="1800" spc="-1" strike="noStrike">
-              <a:solidFill>
-                <a:srgbClr val="000000"/>
-              </a:solidFill>
+            <a:endParaRPr lang="en-US" sz="1800" b="0" u="none" strike="noStrike">
+              <a:solidFill>
+                <a:srgbClr val="000000"/>
+              </a:solidFill>
+              <a:effectLst/>
+              <a:uFillTx/>
               <a:latin typeface="Arial"/>
             </a:endParaRPr>
           </a:p>
@@ -3044,7 +3684,7 @@
       </p:sp>
       <p:sp>
         <p:nvSpPr>
-          <p:cNvPr id="15" name="PlaceHolder 3"/>
+          <p:cNvPr id="21" name="PlaceHolder 3"/>
           <p:cNvSpPr>
             <a:spLocks noGrp="1"/>
           </p:cNvSpPr>
@@ -3055,7 +3695,7 @@
         <p:spPr>
           <a:xfrm>
             <a:off x="4038480" y="6356520"/>
-            <a:ext cx="4114080" cy="364320"/>
+            <a:ext cx="4113720" cy="363960"/>
           </a:xfrm>
           <a:prstGeom prst="rect">
             <a:avLst/>
@@ -3066,7 +3706,7 @@
           </a:ln>
         </p:spPr>
         <p:txBody>
-          <a:bodyPr lIns="91440" rIns="91440" tIns="45720" bIns="45720" anchor="ctr">
+          <a:bodyPr lIns="91440" tIns="45720" rIns="91440" bIns="45720" anchor="ctr">
             <a:noAutofit/>
           </a:bodyPr>
           <a:lstStyle>
@@ -3076,12 +3716,14 @@
               </a:lnSpc>
               <a:buNone/>
               <a:tabLst>
-                <a:tab algn="l" pos="0"/>
+                <a:tab pos="0" algn="l"/>
               </a:tabLst>
-              <a:defRPr b="0" lang="en-US" sz="1400" spc="-1" strike="noStrike">
+              <a:defRPr lang="en-US" sz="1400" b="0" u="none" strike="noStrike">
                 <a:solidFill>
                   <a:srgbClr val="000000"/>
                 </a:solidFill>
+                <a:effectLst/>
+                <a:uFillTx/>
                 <a:latin typeface="Times New Roman"/>
               </a:defRPr>
             </a:lvl1pPr>
@@ -3093,22 +3735,26 @@
               </a:lnSpc>
               <a:buNone/>
               <a:tabLst>
-                <a:tab algn="l" pos="0"/>
+                <a:tab pos="0" algn="l"/>
               </a:tabLst>
             </a:pPr>
             <a:r>
-              <a:rPr b="0" lang="en-US" sz="1400" spc="-1" strike="noStrike">
+              <a:rPr lang="en-US" sz="1400" b="0" u="none" strike="noStrike">
                 <a:solidFill>
                   <a:srgbClr val="000000"/>
                 </a:solidFill>
+                <a:effectLst/>
+                <a:uFillTx/>
                 <a:latin typeface="Times New Roman"/>
               </a:rPr>
               <a:t>&lt;footer&gt;</a:t>
             </a:r>
-            <a:endParaRPr b="0" lang="en-US" sz="1400" spc="-1" strike="noStrike">
-              <a:solidFill>
-                <a:srgbClr val="000000"/>
-              </a:solidFill>
+            <a:endParaRPr lang="en-US" sz="1400" b="0" u="none" strike="noStrike">
+              <a:solidFill>
+                <a:srgbClr val="000000"/>
+              </a:solidFill>
+              <a:effectLst/>
+              <a:uFillTx/>
               <a:latin typeface="Times New Roman"/>
             </a:endParaRPr>
           </a:p>
@@ -3116,7 +3762,7 @@
       </p:sp>
       <p:sp>
         <p:nvSpPr>
-          <p:cNvPr id="16" name="PlaceHolder 4"/>
+          <p:cNvPr id="22" name="PlaceHolder 4"/>
           <p:cNvSpPr>
             <a:spLocks noGrp="1"/>
           </p:cNvSpPr>
@@ -3127,7 +3773,7 @@
         <p:spPr>
           <a:xfrm>
             <a:off x="8610480" y="6356520"/>
-            <a:ext cx="2742480" cy="364320"/>
+            <a:ext cx="2742120" cy="363960"/>
           </a:xfrm>
           <a:prstGeom prst="rect">
             <a:avLst/>
@@ -3138,7 +3784,7 @@
           </a:ln>
         </p:spPr>
         <p:txBody>
-          <a:bodyPr lIns="91440" rIns="91440" tIns="45720" bIns="45720" anchor="ctr">
+          <a:bodyPr lIns="91440" tIns="45720" rIns="91440" bIns="45720" anchor="ctr">
             <a:noAutofit/>
           </a:bodyPr>
           <a:lstStyle>
@@ -3148,14 +3794,16 @@
               </a:lnSpc>
               <a:buNone/>
               <a:tabLst>
-                <a:tab algn="l" pos="0"/>
+                <a:tab pos="0" algn="l"/>
               </a:tabLst>
-              <a:defRPr b="0" lang="en-US" sz="1200" spc="-1" strike="noStrike">
+              <a:defRPr lang="en-US" sz="1200" b="0" u="none" strike="noStrike">
                 <a:solidFill>
                   <a:schemeClr val="dk1">
                     <a:tint val="75000"/>
                   </a:schemeClr>
                 </a:solidFill>
+                <a:effectLst/>
+                <a:uFillTx/>
                 <a:latin typeface="Calibri"/>
               </a:defRPr>
             </a:lvl1pPr>
@@ -3167,24 +3815,28 @@
               </a:lnSpc>
               <a:buNone/>
               <a:tabLst>
-                <a:tab algn="l" pos="0"/>
+                <a:tab pos="0" algn="l"/>
               </a:tabLst>
             </a:pPr>
-            <a:fld id="{4473B9BB-8FCE-4B77-8BFD-AC15D2438B51}" type="slidenum">
-              <a:rPr b="0" lang="en-US" sz="1200" spc="-1" strike="noStrike">
+            <a:fld id="{F40CE7F6-FA4A-4CB8-B722-B64EE9EC9F5C}" type="slidenum">
+              <a:rPr lang="en-US" sz="1200" b="0" u="none" strike="noStrike">
                 <a:solidFill>
                   <a:schemeClr val="dk1">
                     <a:tint val="75000"/>
                   </a:schemeClr>
                 </a:solidFill>
+                <a:effectLst/>
+                <a:uFillTx/>
                 <a:latin typeface="Calibri"/>
               </a:rPr>
               <a:t>&lt;number&gt;</a:t>
             </a:fld>
-            <a:endParaRPr b="0" lang="en-US" sz="1200" spc="-1" strike="noStrike">
-              <a:solidFill>
-                <a:srgbClr val="000000"/>
-              </a:solidFill>
+            <a:endParaRPr lang="en-US" sz="1200" b="0" u="none" strike="noStrike">
+              <a:solidFill>
+                <a:srgbClr val="000000"/>
+              </a:solidFill>
+              <a:effectLst/>
+              <a:uFillTx/>
               <a:latin typeface="Times New Roman"/>
             </a:endParaRPr>
           </a:p>
@@ -3192,7 +3844,7 @@
       </p:sp>
       <p:sp>
         <p:nvSpPr>
-          <p:cNvPr id="17" name="PlaceHolder 5"/>
+          <p:cNvPr id="23" name="PlaceHolder 5"/>
           <p:cNvSpPr>
             <a:spLocks noGrp="1"/>
           </p:cNvSpPr>
@@ -3203,7 +3855,7 @@
         <p:spPr>
           <a:xfrm>
             <a:off x="838080" y="6356520"/>
-            <a:ext cx="2742480" cy="364320"/>
+            <a:ext cx="2742120" cy="363960"/>
           </a:xfrm>
           <a:prstGeom prst="rect">
             <a:avLst/>
@@ -3214,37 +3866,43 @@
           </a:ln>
         </p:spPr>
         <p:txBody>
-          <a:bodyPr lIns="91440" rIns="91440" tIns="45720" bIns="45720" anchor="ctr">
+          <a:bodyPr lIns="91440" tIns="45720" rIns="91440" bIns="45720" anchor="ctr">
             <a:noAutofit/>
           </a:bodyPr>
           <a:lstStyle>
-            <a:lvl1pPr indent="0">
+            <a:lvl1pPr indent="0" algn="l">
               <a:buNone/>
-              <a:defRPr b="0" lang="en-US" sz="1400" spc="-1" strike="noStrike">
+              <a:defRPr lang="en-US" sz="1400" b="0" u="none" strike="noStrike">
                 <a:solidFill>
                   <a:srgbClr val="000000"/>
                 </a:solidFill>
+                <a:effectLst/>
+                <a:uFillTx/>
                 <a:latin typeface="Times New Roman"/>
               </a:defRPr>
             </a:lvl1pPr>
           </a:lstStyle>
           <a:p>
-            <a:pPr indent="0">
+            <a:pPr indent="0" algn="l">
               <a:buNone/>
             </a:pPr>
             <a:r>
-              <a:rPr b="0" lang="en-US" sz="1400" spc="-1" strike="noStrike">
+              <a:rPr lang="en-US" sz="1400" b="0" u="none" strike="noStrike">
                 <a:solidFill>
                   <a:srgbClr val="000000"/>
                 </a:solidFill>
+                <a:effectLst/>
+                <a:uFillTx/>
                 <a:latin typeface="Times New Roman"/>
               </a:rPr>
               <a:t>&lt;date/time&gt;</a:t>
             </a:r>
-            <a:endParaRPr b="0" lang="en-US" sz="1400" spc="-1" strike="noStrike">
-              <a:solidFill>
-                <a:srgbClr val="000000"/>
-              </a:solidFill>
+            <a:endParaRPr lang="en-US" sz="1400" b="0" u="none" strike="noStrike">
+              <a:solidFill>
+                <a:srgbClr val="000000"/>
+              </a:solidFill>
+              <a:effectLst/>
+              <a:uFillTx/>
               <a:latin typeface="Times New Roman"/>
             </a:endParaRPr>
           </a:p>
@@ -3252,7 +3910,7 @@
       </p:sp>
     </p:spTree>
   </p:cSld>
-  <p:clrMap bg1="lt1" bg2="lt2" tx1="dk1" tx2="dk2" accent1="accent1" accent2="accent2" accent3="accent3" accent4="accent4" accent5="accent5" accent6="accent6" hlink="hlink" folHlink="folHlink"/>
+  <p:clrMap bg1="lt1" tx1="dk1" bg2="lt2" tx2="dk2" accent1="accent1" accent2="accent2" accent3="accent3" accent4="accent4" accent5="accent5" accent6="accent6" hlink="hlink" folHlink="folHlink"/>
   <p:sldLayoutIdLst>
     <p:sldLayoutId id="2147483655" r:id="rId2"/>
   </p:sldLayoutIdLst>
@@ -3265,7 +3923,7 @@
     <p:bg>
       <p:bgPr>
         <a:solidFill>
-          <a:srgbClr val="ffffff"/>
+          <a:srgbClr val="FFFFFF"/>
         </a:solidFill>
       </p:bgPr>
     </p:bg>
@@ -3285,7 +3943,7 @@
       </p:grpSpPr>
       <p:sp>
         <p:nvSpPr>
-          <p:cNvPr id="20" name="PlaceHolder 1"/>
+          <p:cNvPr id="26" name="PlaceHolder 1"/>
           <p:cNvSpPr>
             <a:spLocks noGrp="1"/>
           </p:cNvSpPr>
@@ -3296,7 +3954,7 @@
         <p:spPr>
           <a:xfrm>
             <a:off x="4038480" y="6356520"/>
-            <a:ext cx="4114080" cy="364320"/>
+            <a:ext cx="4113720" cy="363960"/>
           </a:xfrm>
           <a:prstGeom prst="rect">
             <a:avLst/>
@@ -3307,7 +3965,7 @@
           </a:ln>
         </p:spPr>
         <p:txBody>
-          <a:bodyPr lIns="91440" rIns="91440" tIns="45720" bIns="45720" anchor="ctr">
+          <a:bodyPr lIns="91440" tIns="45720" rIns="91440" bIns="45720" anchor="ctr">
             <a:noAutofit/>
           </a:bodyPr>
           <a:lstStyle>
@@ -3317,12 +3975,14 @@
               </a:lnSpc>
               <a:buNone/>
               <a:tabLst>
-                <a:tab algn="l" pos="0"/>
+                <a:tab pos="0" algn="l"/>
               </a:tabLst>
-              <a:defRPr b="0" lang="en-US" sz="1400" spc="-1" strike="noStrike">
+              <a:defRPr lang="en-US" sz="1400" b="0" u="none" strike="noStrike">
                 <a:solidFill>
                   <a:srgbClr val="000000"/>
                 </a:solidFill>
+                <a:effectLst/>
+                <a:uFillTx/>
                 <a:latin typeface="Times New Roman"/>
               </a:defRPr>
             </a:lvl1pPr>
@@ -3334,22 +3994,26 @@
               </a:lnSpc>
               <a:buNone/>
               <a:tabLst>
-                <a:tab algn="l" pos="0"/>
+                <a:tab pos="0" algn="l"/>
               </a:tabLst>
             </a:pPr>
             <a:r>
-              <a:rPr b="0" lang="en-US" sz="1400" spc="-1" strike="noStrike">
+              <a:rPr lang="en-US" sz="1400" b="0" u="none" strike="noStrike">
                 <a:solidFill>
                   <a:srgbClr val="000000"/>
                 </a:solidFill>
+                <a:effectLst/>
+                <a:uFillTx/>
                 <a:latin typeface="Times New Roman"/>
               </a:rPr>
               <a:t>&lt;footer&gt;</a:t>
             </a:r>
-            <a:endParaRPr b="0" lang="en-US" sz="1400" spc="-1" strike="noStrike">
-              <a:solidFill>
-                <a:srgbClr val="000000"/>
-              </a:solidFill>
+            <a:endParaRPr lang="en-US" sz="1400" b="0" u="none" strike="noStrike">
+              <a:solidFill>
+                <a:srgbClr val="000000"/>
+              </a:solidFill>
+              <a:effectLst/>
+              <a:uFillTx/>
               <a:latin typeface="Times New Roman"/>
             </a:endParaRPr>
           </a:p>
@@ -3357,7 +4021,7 @@
       </p:sp>
       <p:sp>
         <p:nvSpPr>
-          <p:cNvPr id="21" name="PlaceHolder 2"/>
+          <p:cNvPr id="27" name="PlaceHolder 2"/>
           <p:cNvSpPr>
             <a:spLocks noGrp="1"/>
           </p:cNvSpPr>
@@ -3368,7 +4032,7 @@
         <p:spPr>
           <a:xfrm>
             <a:off x="8610480" y="6356520"/>
-            <a:ext cx="2742480" cy="364320"/>
+            <a:ext cx="2742120" cy="363960"/>
           </a:xfrm>
           <a:prstGeom prst="rect">
             <a:avLst/>
@@ -3379,7 +4043,7 @@
           </a:ln>
         </p:spPr>
         <p:txBody>
-          <a:bodyPr lIns="91440" rIns="91440" tIns="45720" bIns="45720" anchor="ctr">
+          <a:bodyPr lIns="91440" tIns="45720" rIns="91440" bIns="45720" anchor="ctr">
             <a:noAutofit/>
           </a:bodyPr>
           <a:lstStyle>
@@ -3389,14 +4053,16 @@
               </a:lnSpc>
               <a:buNone/>
               <a:tabLst>
-                <a:tab algn="l" pos="0"/>
+                <a:tab pos="0" algn="l"/>
               </a:tabLst>
-              <a:defRPr b="0" lang="en-US" sz="1200" spc="-1" strike="noStrike">
+              <a:defRPr lang="en-US" sz="1200" b="0" u="none" strike="noStrike">
                 <a:solidFill>
                   <a:schemeClr val="dk1">
                     <a:tint val="75000"/>
                   </a:schemeClr>
                 </a:solidFill>
+                <a:effectLst/>
+                <a:uFillTx/>
                 <a:latin typeface="Calibri"/>
               </a:defRPr>
             </a:lvl1pPr>
@@ -3408,24 +4074,28 @@
               </a:lnSpc>
               <a:buNone/>
               <a:tabLst>
-                <a:tab algn="l" pos="0"/>
+                <a:tab pos="0" algn="l"/>
               </a:tabLst>
             </a:pPr>
-            <a:fld id="{B88DFD8A-7686-45FB-9FE0-8EA5BE1E340C}" type="slidenum">
-              <a:rPr b="0" lang="en-US" sz="1200" spc="-1" strike="noStrike">
+            <a:fld id="{35D749DD-F9C8-4A0D-8026-CE9CC9AB1C4F}" type="slidenum">
+              <a:rPr lang="en-US" sz="1200" b="0" u="none" strike="noStrike">
                 <a:solidFill>
                   <a:schemeClr val="dk1">
                     <a:tint val="75000"/>
                   </a:schemeClr>
                 </a:solidFill>
+                <a:effectLst/>
+                <a:uFillTx/>
                 <a:latin typeface="Calibri"/>
               </a:rPr>
               <a:t>&lt;number&gt;</a:t>
             </a:fld>
-            <a:endParaRPr b="0" lang="en-US" sz="1200" spc="-1" strike="noStrike">
-              <a:solidFill>
-                <a:srgbClr val="000000"/>
-              </a:solidFill>
+            <a:endParaRPr lang="en-US" sz="1200" b="0" u="none" strike="noStrike">
+              <a:solidFill>
+                <a:srgbClr val="000000"/>
+              </a:solidFill>
+              <a:effectLst/>
+              <a:uFillTx/>
               <a:latin typeface="Times New Roman"/>
             </a:endParaRPr>
           </a:p>
@@ -3433,7 +4103,7 @@
       </p:sp>
       <p:sp>
         <p:nvSpPr>
-          <p:cNvPr id="22" name="PlaceHolder 3"/>
+          <p:cNvPr id="28" name="PlaceHolder 3"/>
           <p:cNvSpPr>
             <a:spLocks noGrp="1"/>
           </p:cNvSpPr>
@@ -3444,7 +4114,7 @@
         <p:spPr>
           <a:xfrm>
             <a:off x="838080" y="6356520"/>
-            <a:ext cx="2742480" cy="364320"/>
+            <a:ext cx="2742120" cy="363960"/>
           </a:xfrm>
           <a:prstGeom prst="rect">
             <a:avLst/>
@@ -3455,37 +4125,43 @@
           </a:ln>
         </p:spPr>
         <p:txBody>
-          <a:bodyPr lIns="91440" rIns="91440" tIns="45720" bIns="45720" anchor="ctr">
+          <a:bodyPr lIns="91440" tIns="45720" rIns="91440" bIns="45720" anchor="ctr">
             <a:noAutofit/>
           </a:bodyPr>
           <a:lstStyle>
-            <a:lvl1pPr indent="0">
+            <a:lvl1pPr indent="0" algn="l">
               <a:buNone/>
-              <a:defRPr b="0" lang="en-US" sz="1400" spc="-1" strike="noStrike">
+              <a:defRPr lang="en-US" sz="1400" b="0" u="none" strike="noStrike">
                 <a:solidFill>
                   <a:srgbClr val="000000"/>
                 </a:solidFill>
+                <a:effectLst/>
+                <a:uFillTx/>
                 <a:latin typeface="Times New Roman"/>
               </a:defRPr>
             </a:lvl1pPr>
           </a:lstStyle>
           <a:p>
-            <a:pPr indent="0">
+            <a:pPr indent="0" algn="l">
               <a:buNone/>
             </a:pPr>
             <a:r>
-              <a:rPr b="0" lang="en-US" sz="1400" spc="-1" strike="noStrike">
+              <a:rPr lang="en-US" sz="1400" b="0" u="none" strike="noStrike">
                 <a:solidFill>
                   <a:srgbClr val="000000"/>
                 </a:solidFill>
+                <a:effectLst/>
+                <a:uFillTx/>
                 <a:latin typeface="Times New Roman"/>
               </a:rPr>
               <a:t>&lt;date/time&gt;</a:t>
             </a:r>
-            <a:endParaRPr b="0" lang="en-US" sz="1400" spc="-1" strike="noStrike">
-              <a:solidFill>
-                <a:srgbClr val="000000"/>
-              </a:solidFill>
+            <a:endParaRPr lang="en-US" sz="1400" b="0" u="none" strike="noStrike">
+              <a:solidFill>
+                <a:srgbClr val="000000"/>
+              </a:solidFill>
+              <a:effectLst/>
+              <a:uFillTx/>
               <a:latin typeface="Times New Roman"/>
             </a:endParaRPr>
           </a:p>
@@ -3493,7 +4169,7 @@
       </p:sp>
     </p:spTree>
   </p:cSld>
-  <p:clrMap bg1="lt1" bg2="lt2" tx1="dk1" tx2="dk2" accent1="accent1" accent2="accent2" accent3="accent3" accent4="accent4" accent5="accent5" accent6="accent6" hlink="hlink" folHlink="folHlink"/>
+  <p:clrMap bg1="lt1" tx1="dk1" bg2="lt2" tx2="dk2" accent1="accent1" accent2="accent2" accent3="accent3" accent4="accent4" accent5="accent5" accent6="accent6" hlink="hlink" folHlink="folHlink"/>
   <p:sldLayoutIdLst>
     <p:sldLayoutId id="2147483657" r:id="rId2"/>
   </p:sldLayoutIdLst>
@@ -3506,7 +4182,7 @@
     <p:bg>
       <p:bgPr>
         <a:solidFill>
-          <a:srgbClr val="ffffff"/>
+          <a:srgbClr val="FFFFFF"/>
         </a:solidFill>
       </p:bgPr>
     </p:bg>
@@ -3526,7 +4202,7 @@
       </p:grpSpPr>
       <p:sp>
         <p:nvSpPr>
-          <p:cNvPr id="23" name="PlaceHolder 1"/>
+          <p:cNvPr id="29" name="PlaceHolder 1"/>
           <p:cNvSpPr>
             <a:spLocks noGrp="1"/>
           </p:cNvSpPr>
@@ -3537,7 +4213,7 @@
         <p:spPr>
           <a:xfrm>
             <a:off x="1523880" y="1122480"/>
-            <a:ext cx="9143280" cy="2386800"/>
+            <a:ext cx="9142920" cy="2386440"/>
           </a:xfrm>
           <a:prstGeom prst="rect">
             <a:avLst/>
@@ -3548,26 +4224,43 @@
           </a:ln>
         </p:spPr>
         <p:txBody>
-          <a:bodyPr lIns="0" rIns="0" tIns="0" bIns="0" anchor="ctr">
+          <a:bodyPr lIns="0" tIns="0" rIns="0" bIns="0" anchor="ctr">
             <a:noAutofit/>
           </a:bodyPr>
-          <a:p>
-            <a:pPr indent="0">
+          <a:lstStyle>
+            <a:lvl1pPr indent="0" algn="l">
               <a:buNone/>
-            </a:pPr>
-            <a:r>
-              <a:rPr b="0" lang="en-US" sz="1800" spc="-1" strike="noStrike">
+              <a:defRPr lang="en-US" sz="1800" b="0" u="none" strike="noStrike">
                 <a:solidFill>
                   <a:srgbClr val="000000"/>
                 </a:solidFill>
+                <a:effectLst/>
+                <a:uFillTx/>
+                <a:latin typeface="Arial"/>
+              </a:defRPr>
+            </a:lvl1pPr>
+          </a:lstStyle>
+          <a:p>
+            <a:pPr indent="0" algn="l">
+              <a:buNone/>
+            </a:pPr>
+            <a:r>
+              <a:rPr lang="en-US" sz="1800" b="0" u="none" strike="noStrike">
+                <a:solidFill>
+                  <a:srgbClr val="000000"/>
+                </a:solidFill>
+                <a:effectLst/>
+                <a:uFillTx/>
                 <a:latin typeface="Arial"/>
               </a:rPr>
               <a:t>Click to edit the title text format</a:t>
             </a:r>
-            <a:endParaRPr b="0" lang="en-US" sz="1800" spc="-1" strike="noStrike">
-              <a:solidFill>
-                <a:srgbClr val="000000"/>
-              </a:solidFill>
+            <a:endParaRPr lang="en-US" sz="1800" b="0" u="none" strike="noStrike">
+              <a:solidFill>
+                <a:srgbClr val="000000"/>
+              </a:solidFill>
+              <a:effectLst/>
+              <a:uFillTx/>
               <a:latin typeface="Arial"/>
             </a:endParaRPr>
           </a:p>
@@ -3575,7 +4268,7 @@
       </p:sp>
       <p:sp>
         <p:nvSpPr>
-          <p:cNvPr id="24" name="PlaceHolder 2"/>
+          <p:cNvPr id="30" name="PlaceHolder 2"/>
           <p:cNvSpPr>
             <a:spLocks noGrp="1"/>
           </p:cNvSpPr>
@@ -3597,11 +4290,11 @@
           </a:ln>
         </p:spPr>
         <p:txBody>
-          <a:bodyPr lIns="0" rIns="0" tIns="0" bIns="0" anchor="t">
+          <a:bodyPr lIns="0" tIns="0" rIns="0" bIns="0" anchor="t">
             <a:normAutofit/>
           </a:bodyPr>
-          <a:p>
-            <a:pPr marL="432000" indent="-324000">
+          <a:lstStyle>
+            <a:lvl1pPr algn="l">
               <a:spcBef>
                 <a:spcPts val="1417"/>
               </a:spcBef>
@@ -3611,25 +4304,16 @@
               <a:buSzPct val="45000"/>
               <a:buFont typeface="Wingdings" charset="2"/>
               <a:buChar char=""/>
-            </a:pPr>
-            <a:r>
-              <a:rPr b="0" lang="en-US" sz="1800" spc="-1" strike="noStrike">
+              <a:defRPr lang="en-US" sz="1800" b="0" u="none" strike="noStrike">
                 <a:solidFill>
                   <a:srgbClr val="000000"/>
                 </a:solidFill>
+                <a:effectLst/>
+                <a:uFillTx/>
                 <a:latin typeface="Arial"/>
-              </a:rPr>
-              <a:t>Click to edit the outline text format</a:t>
-            </a:r>
-            <a:endParaRPr b="0" lang="en-US" sz="1800" spc="-1" strike="noStrike">
-              <a:solidFill>
-                <a:srgbClr val="000000"/>
-              </a:solidFill>
-              <a:latin typeface="Arial"/>
-            </a:endParaRPr>
-          </a:p>
-          <a:p>
-            <a:pPr lvl="1" marL="864000" indent="-324000">
+              </a:defRPr>
+            </a:lvl1pPr>
+            <a:lvl2pPr lvl="1" algn="l">
               <a:spcBef>
                 <a:spcPts val="1134"/>
               </a:spcBef>
@@ -3639,25 +4323,16 @@
               <a:buSzPct val="75000"/>
               <a:buFont typeface="Symbol" charset="2"/>
               <a:buChar char=""/>
-            </a:pPr>
-            <a:r>
-              <a:rPr b="0" lang="en-US" sz="1800" spc="-1" strike="noStrike">
+              <a:defRPr lang="en-US" sz="1800" b="0" u="none" strike="noStrike">
                 <a:solidFill>
                   <a:srgbClr val="000000"/>
                 </a:solidFill>
+                <a:effectLst/>
+                <a:uFillTx/>
                 <a:latin typeface="Arial"/>
-              </a:rPr>
-              <a:t>Second Outline Level</a:t>
-            </a:r>
-            <a:endParaRPr b="0" lang="en-US" sz="1800" spc="-1" strike="noStrike">
-              <a:solidFill>
-                <a:srgbClr val="000000"/>
-              </a:solidFill>
-              <a:latin typeface="Arial"/>
-            </a:endParaRPr>
-          </a:p>
-          <a:p>
-            <a:pPr lvl="2" marL="1296000" indent="-288000">
+              </a:defRPr>
+            </a:lvl2pPr>
+            <a:lvl3pPr lvl="2" algn="l">
               <a:spcBef>
                 <a:spcPts val="850"/>
               </a:spcBef>
@@ -3667,25 +4342,16 @@
               <a:buSzPct val="45000"/>
               <a:buFont typeface="Wingdings" charset="2"/>
               <a:buChar char=""/>
-            </a:pPr>
-            <a:r>
-              <a:rPr b="0" lang="en-US" sz="1800" spc="-1" strike="noStrike">
+              <a:defRPr lang="en-US" sz="1800" b="0" u="none" strike="noStrike">
                 <a:solidFill>
                   <a:srgbClr val="000000"/>
                 </a:solidFill>
+                <a:effectLst/>
+                <a:uFillTx/>
                 <a:latin typeface="Arial"/>
-              </a:rPr>
-              <a:t>Third Outline Level</a:t>
-            </a:r>
-            <a:endParaRPr b="0" lang="en-US" sz="1800" spc="-1" strike="noStrike">
-              <a:solidFill>
-                <a:srgbClr val="000000"/>
-              </a:solidFill>
-              <a:latin typeface="Arial"/>
-            </a:endParaRPr>
-          </a:p>
-          <a:p>
-            <a:pPr lvl="3" marL="1728000" indent="-216000">
+              </a:defRPr>
+            </a:lvl3pPr>
+            <a:lvl4pPr lvl="3" algn="l">
               <a:spcBef>
                 <a:spcPts val="567"/>
               </a:spcBef>
@@ -3695,25 +4361,16 @@
               <a:buSzPct val="75000"/>
               <a:buFont typeface="Symbol" charset="2"/>
               <a:buChar char=""/>
-            </a:pPr>
-            <a:r>
-              <a:rPr b="0" lang="en-US" sz="1800" spc="-1" strike="noStrike">
+              <a:defRPr lang="en-US" sz="1800" b="0" u="none" strike="noStrike">
                 <a:solidFill>
                   <a:srgbClr val="000000"/>
                 </a:solidFill>
+                <a:effectLst/>
+                <a:uFillTx/>
                 <a:latin typeface="Arial"/>
-              </a:rPr>
-              <a:t>Fourth Outline Level</a:t>
-            </a:r>
-            <a:endParaRPr b="0" lang="en-US" sz="1800" spc="-1" strike="noStrike">
-              <a:solidFill>
-                <a:srgbClr val="000000"/>
-              </a:solidFill>
-              <a:latin typeface="Arial"/>
-            </a:endParaRPr>
-          </a:p>
-          <a:p>
-            <a:pPr lvl="4" marL="2160000" indent="-216000">
+              </a:defRPr>
+            </a:lvl4pPr>
+            <a:lvl5pPr lvl="4" algn="l">
               <a:spcBef>
                 <a:spcPts val="283"/>
               </a:spcBef>
@@ -3723,25 +4380,16 @@
               <a:buSzPct val="45000"/>
               <a:buFont typeface="Wingdings" charset="2"/>
               <a:buChar char=""/>
-            </a:pPr>
-            <a:r>
-              <a:rPr b="0" lang="en-US" sz="1800" spc="-1" strike="noStrike">
+              <a:defRPr lang="en-US" sz="1800" b="0" u="none" strike="noStrike">
                 <a:solidFill>
                   <a:srgbClr val="000000"/>
                 </a:solidFill>
+                <a:effectLst/>
+                <a:uFillTx/>
                 <a:latin typeface="Arial"/>
-              </a:rPr>
-              <a:t>Fifth Outline Level</a:t>
-            </a:r>
-            <a:endParaRPr b="0" lang="en-US" sz="1800" spc="-1" strike="noStrike">
-              <a:solidFill>
-                <a:srgbClr val="000000"/>
-              </a:solidFill>
-              <a:latin typeface="Arial"/>
-            </a:endParaRPr>
-          </a:p>
-          <a:p>
-            <a:pPr lvl="5" marL="2592000" indent="-216000">
+              </a:defRPr>
+            </a:lvl5pPr>
+            <a:lvl6pPr lvl="5" algn="l">
               <a:spcBef>
                 <a:spcPts val="283"/>
               </a:spcBef>
@@ -3751,25 +4399,16 @@
               <a:buSzPct val="45000"/>
               <a:buFont typeface="Wingdings" charset="2"/>
               <a:buChar char=""/>
-            </a:pPr>
-            <a:r>
-              <a:rPr b="0" lang="en-US" sz="1800" spc="-1" strike="noStrike">
+              <a:defRPr lang="en-US" sz="1800" b="0" u="none" strike="noStrike">
                 <a:solidFill>
                   <a:srgbClr val="000000"/>
                 </a:solidFill>
+                <a:effectLst/>
+                <a:uFillTx/>
                 <a:latin typeface="Arial"/>
-              </a:rPr>
-              <a:t>Sixth Outline Level</a:t>
-            </a:r>
-            <a:endParaRPr b="0" lang="en-US" sz="1800" spc="-1" strike="noStrike">
-              <a:solidFill>
-                <a:srgbClr val="000000"/>
-              </a:solidFill>
-              <a:latin typeface="Arial"/>
-            </a:endParaRPr>
-          </a:p>
-          <a:p>
-            <a:pPr lvl="6" marL="3024000" indent="-216000">
+              </a:defRPr>
+            </a:lvl6pPr>
+            <a:lvl7pPr lvl="6" algn="l">
               <a:spcBef>
                 <a:spcPts val="283"/>
               </a:spcBef>
@@ -3779,20 +4418,237 @@
               <a:buSzPct val="45000"/>
               <a:buFont typeface="Wingdings" charset="2"/>
               <a:buChar char=""/>
-            </a:pPr>
-            <a:r>
-              <a:rPr b="0" lang="en-US" sz="1800" spc="-1" strike="noStrike">
+              <a:defRPr lang="en-US" sz="1800" b="0" u="none" strike="noStrike">
                 <a:solidFill>
                   <a:srgbClr val="000000"/>
                 </a:solidFill>
+                <a:effectLst/>
+                <a:uFillTx/>
+                <a:latin typeface="Arial"/>
+              </a:defRPr>
+            </a:lvl7pPr>
+          </a:lstStyle>
+          <a:p>
+            <a:pPr marL="432000" indent="-324000" algn="l">
+              <a:spcBef>
+                <a:spcPts val="1417"/>
+              </a:spcBef>
+              <a:buClr>
+                <a:srgbClr val="000000"/>
+              </a:buClr>
+              <a:buSzPct val="45000"/>
+              <a:buFont typeface="Wingdings" charset="2"/>
+              <a:buChar char=""/>
+            </a:pPr>
+            <a:r>
+              <a:rPr lang="en-US" sz="1800" b="0" u="none" strike="noStrike">
+                <a:solidFill>
+                  <a:srgbClr val="000000"/>
+                </a:solidFill>
+                <a:effectLst/>
+                <a:uFillTx/>
+                <a:latin typeface="Arial"/>
+              </a:rPr>
+              <a:t>Click to edit the outline text format</a:t>
+            </a:r>
+            <a:endParaRPr lang="en-US" sz="1800" b="0" u="none" strike="noStrike">
+              <a:solidFill>
+                <a:srgbClr val="000000"/>
+              </a:solidFill>
+              <a:effectLst/>
+              <a:uFillTx/>
+              <a:latin typeface="Arial"/>
+            </a:endParaRPr>
+          </a:p>
+          <a:p>
+            <a:pPr marL="864000" lvl="1" indent="-324000" algn="l">
+              <a:spcBef>
+                <a:spcPts val="1134"/>
+              </a:spcBef>
+              <a:buClr>
+                <a:srgbClr val="000000"/>
+              </a:buClr>
+              <a:buSzPct val="75000"/>
+              <a:buFont typeface="Symbol" charset="2"/>
+              <a:buChar char=""/>
+            </a:pPr>
+            <a:r>
+              <a:rPr lang="en-US" sz="1800" b="0" u="none" strike="noStrike">
+                <a:solidFill>
+                  <a:srgbClr val="000000"/>
+                </a:solidFill>
+                <a:effectLst/>
+                <a:uFillTx/>
+                <a:latin typeface="Arial"/>
+              </a:rPr>
+              <a:t>Second Outline Level</a:t>
+            </a:r>
+            <a:endParaRPr lang="en-US" sz="1800" b="0" u="none" strike="noStrike">
+              <a:solidFill>
+                <a:srgbClr val="000000"/>
+              </a:solidFill>
+              <a:effectLst/>
+              <a:uFillTx/>
+              <a:latin typeface="Arial"/>
+            </a:endParaRPr>
+          </a:p>
+          <a:p>
+            <a:pPr marL="1296000" lvl="2" indent="-288000" algn="l">
+              <a:spcBef>
+                <a:spcPts val="850"/>
+              </a:spcBef>
+              <a:buClr>
+                <a:srgbClr val="000000"/>
+              </a:buClr>
+              <a:buSzPct val="45000"/>
+              <a:buFont typeface="Wingdings" charset="2"/>
+              <a:buChar char=""/>
+            </a:pPr>
+            <a:r>
+              <a:rPr lang="en-US" sz="1800" b="0" u="none" strike="noStrike">
+                <a:solidFill>
+                  <a:srgbClr val="000000"/>
+                </a:solidFill>
+                <a:effectLst/>
+                <a:uFillTx/>
+                <a:latin typeface="Arial"/>
+              </a:rPr>
+              <a:t>Third Outline Level</a:t>
+            </a:r>
+            <a:endParaRPr lang="en-US" sz="1800" b="0" u="none" strike="noStrike">
+              <a:solidFill>
+                <a:srgbClr val="000000"/>
+              </a:solidFill>
+              <a:effectLst/>
+              <a:uFillTx/>
+              <a:latin typeface="Arial"/>
+            </a:endParaRPr>
+          </a:p>
+          <a:p>
+            <a:pPr marL="1728000" lvl="3" indent="-216000" algn="l">
+              <a:spcBef>
+                <a:spcPts val="567"/>
+              </a:spcBef>
+              <a:buClr>
+                <a:srgbClr val="000000"/>
+              </a:buClr>
+              <a:buSzPct val="75000"/>
+              <a:buFont typeface="Symbol" charset="2"/>
+              <a:buChar char=""/>
+            </a:pPr>
+            <a:r>
+              <a:rPr lang="en-US" sz="1800" b="0" u="none" strike="noStrike">
+                <a:solidFill>
+                  <a:srgbClr val="000000"/>
+                </a:solidFill>
+                <a:effectLst/>
+                <a:uFillTx/>
+                <a:latin typeface="Arial"/>
+              </a:rPr>
+              <a:t>Fourth Outline Level</a:t>
+            </a:r>
+            <a:endParaRPr lang="en-US" sz="1800" b="0" u="none" strike="noStrike">
+              <a:solidFill>
+                <a:srgbClr val="000000"/>
+              </a:solidFill>
+              <a:effectLst/>
+              <a:uFillTx/>
+              <a:latin typeface="Arial"/>
+            </a:endParaRPr>
+          </a:p>
+          <a:p>
+            <a:pPr marL="2160000" lvl="4" indent="-216000" algn="l">
+              <a:spcBef>
+                <a:spcPts val="283"/>
+              </a:spcBef>
+              <a:buClr>
+                <a:srgbClr val="000000"/>
+              </a:buClr>
+              <a:buSzPct val="45000"/>
+              <a:buFont typeface="Wingdings" charset="2"/>
+              <a:buChar char=""/>
+            </a:pPr>
+            <a:r>
+              <a:rPr lang="en-US" sz="1800" b="0" u="none" strike="noStrike">
+                <a:solidFill>
+                  <a:srgbClr val="000000"/>
+                </a:solidFill>
+                <a:effectLst/>
+                <a:uFillTx/>
+                <a:latin typeface="Arial"/>
+              </a:rPr>
+              <a:t>Fifth Outline Level</a:t>
+            </a:r>
+            <a:endParaRPr lang="en-US" sz="1800" b="0" u="none" strike="noStrike">
+              <a:solidFill>
+                <a:srgbClr val="000000"/>
+              </a:solidFill>
+              <a:effectLst/>
+              <a:uFillTx/>
+              <a:latin typeface="Arial"/>
+            </a:endParaRPr>
+          </a:p>
+          <a:p>
+            <a:pPr marL="2592000" lvl="5" indent="-216000" algn="l">
+              <a:spcBef>
+                <a:spcPts val="283"/>
+              </a:spcBef>
+              <a:buClr>
+                <a:srgbClr val="000000"/>
+              </a:buClr>
+              <a:buSzPct val="45000"/>
+              <a:buFont typeface="Wingdings" charset="2"/>
+              <a:buChar char=""/>
+            </a:pPr>
+            <a:r>
+              <a:rPr lang="en-US" sz="1800" b="0" u="none" strike="noStrike">
+                <a:solidFill>
+                  <a:srgbClr val="000000"/>
+                </a:solidFill>
+                <a:effectLst/>
+                <a:uFillTx/>
+                <a:latin typeface="Arial"/>
+              </a:rPr>
+              <a:t>Sixth Outline Level</a:t>
+            </a:r>
+            <a:endParaRPr lang="en-US" sz="1800" b="0" u="none" strike="noStrike">
+              <a:solidFill>
+                <a:srgbClr val="000000"/>
+              </a:solidFill>
+              <a:effectLst/>
+              <a:uFillTx/>
+              <a:latin typeface="Arial"/>
+            </a:endParaRPr>
+          </a:p>
+          <a:p>
+            <a:pPr marL="3024000" lvl="6" indent="-216000" algn="l">
+              <a:spcBef>
+                <a:spcPts val="283"/>
+              </a:spcBef>
+              <a:buClr>
+                <a:srgbClr val="000000"/>
+              </a:buClr>
+              <a:buSzPct val="45000"/>
+              <a:buFont typeface="Wingdings" charset="2"/>
+              <a:buChar char=""/>
+            </a:pPr>
+            <a:r>
+              <a:rPr lang="en-US" sz="1800" b="0" u="none" strike="noStrike">
+                <a:solidFill>
+                  <a:srgbClr val="000000"/>
+                </a:solidFill>
+                <a:effectLst/>
+                <a:uFillTx/>
                 <a:latin typeface="Arial"/>
               </a:rPr>
               <a:t>Seventh Outline Level</a:t>
             </a:r>
-            <a:endParaRPr b="0" lang="en-US" sz="1800" spc="-1" strike="noStrike">
-              <a:solidFill>
-                <a:srgbClr val="000000"/>
-              </a:solidFill>
+            <a:endParaRPr lang="en-US" sz="1800" b="0" u="none" strike="noStrike">
+              <a:solidFill>
+                <a:srgbClr val="000000"/>
+              </a:solidFill>
+              <a:effectLst/>
+              <a:uFillTx/>
               <a:latin typeface="Arial"/>
             </a:endParaRPr>
           </a:p>
@@ -3800,7 +4656,7 @@
       </p:sp>
       <p:sp>
         <p:nvSpPr>
-          <p:cNvPr id="25" name="PlaceHolder 3"/>
+          <p:cNvPr id="31" name="PlaceHolder 3"/>
           <p:cNvSpPr>
             <a:spLocks noGrp="1"/>
           </p:cNvSpPr>
@@ -3822,11 +4678,11 @@
           </a:ln>
         </p:spPr>
         <p:txBody>
-          <a:bodyPr lIns="0" rIns="0" tIns="0" bIns="0" anchor="t">
+          <a:bodyPr lIns="0" tIns="0" rIns="0" bIns="0" anchor="t">
             <a:normAutofit/>
           </a:bodyPr>
-          <a:p>
-            <a:pPr marL="432000" indent="-324000">
+          <a:lstStyle>
+            <a:lvl1pPr algn="l">
               <a:spcBef>
                 <a:spcPts val="1417"/>
               </a:spcBef>
@@ -3836,25 +4692,16 @@
               <a:buSzPct val="45000"/>
               <a:buFont typeface="Wingdings" charset="2"/>
               <a:buChar char=""/>
-            </a:pPr>
-            <a:r>
-              <a:rPr b="0" lang="en-US" sz="1800" spc="-1" strike="noStrike">
+              <a:defRPr lang="en-US" sz="1800" b="0" u="none" strike="noStrike">
                 <a:solidFill>
                   <a:srgbClr val="000000"/>
                 </a:solidFill>
+                <a:effectLst/>
+                <a:uFillTx/>
                 <a:latin typeface="Arial"/>
-              </a:rPr>
-              <a:t>Click to edit the outline text format</a:t>
-            </a:r>
-            <a:endParaRPr b="0" lang="en-US" sz="1800" spc="-1" strike="noStrike">
-              <a:solidFill>
-                <a:srgbClr val="000000"/>
-              </a:solidFill>
-              <a:latin typeface="Arial"/>
-            </a:endParaRPr>
-          </a:p>
-          <a:p>
-            <a:pPr lvl="1" marL="864000" indent="-324000">
+              </a:defRPr>
+            </a:lvl1pPr>
+            <a:lvl2pPr lvl="1" algn="l">
               <a:spcBef>
                 <a:spcPts val="1134"/>
               </a:spcBef>
@@ -3864,25 +4711,16 @@
               <a:buSzPct val="75000"/>
               <a:buFont typeface="Symbol" charset="2"/>
               <a:buChar char=""/>
-            </a:pPr>
-            <a:r>
-              <a:rPr b="0" lang="en-US" sz="1800" spc="-1" strike="noStrike">
+              <a:defRPr lang="en-US" sz="1800" b="0" u="none" strike="noStrike">
                 <a:solidFill>
                   <a:srgbClr val="000000"/>
                 </a:solidFill>
+                <a:effectLst/>
+                <a:uFillTx/>
                 <a:latin typeface="Arial"/>
-              </a:rPr>
-              <a:t>Second Outline Level</a:t>
-            </a:r>
-            <a:endParaRPr b="0" lang="en-US" sz="1800" spc="-1" strike="noStrike">
-              <a:solidFill>
-                <a:srgbClr val="000000"/>
-              </a:solidFill>
-              <a:latin typeface="Arial"/>
-            </a:endParaRPr>
-          </a:p>
-          <a:p>
-            <a:pPr lvl="2" marL="1296000" indent="-288000">
+              </a:defRPr>
+            </a:lvl2pPr>
+            <a:lvl3pPr lvl="2" algn="l">
               <a:spcBef>
                 <a:spcPts val="850"/>
               </a:spcBef>
@@ -3892,25 +4730,16 @@
               <a:buSzPct val="45000"/>
               <a:buFont typeface="Wingdings" charset="2"/>
               <a:buChar char=""/>
-            </a:pPr>
-            <a:r>
-              <a:rPr b="0" lang="en-US" sz="1800" spc="-1" strike="noStrike">
+              <a:defRPr lang="en-US" sz="1800" b="0" u="none" strike="noStrike">
                 <a:solidFill>
                   <a:srgbClr val="000000"/>
                 </a:solidFill>
+                <a:effectLst/>
+                <a:uFillTx/>
                 <a:latin typeface="Arial"/>
-              </a:rPr>
-              <a:t>Third Outline Level</a:t>
-            </a:r>
-            <a:endParaRPr b="0" lang="en-US" sz="1800" spc="-1" strike="noStrike">
-              <a:solidFill>
-                <a:srgbClr val="000000"/>
-              </a:solidFill>
-              <a:latin typeface="Arial"/>
-            </a:endParaRPr>
-          </a:p>
-          <a:p>
-            <a:pPr lvl="3" marL="1728000" indent="-216000">
+              </a:defRPr>
+            </a:lvl3pPr>
+            <a:lvl4pPr lvl="3" algn="l">
               <a:spcBef>
                 <a:spcPts val="567"/>
               </a:spcBef>
@@ -3920,25 +4749,16 @@
               <a:buSzPct val="75000"/>
               <a:buFont typeface="Symbol" charset="2"/>
               <a:buChar char=""/>
-            </a:pPr>
-            <a:r>
-              <a:rPr b="0" lang="en-US" sz="1800" spc="-1" strike="noStrike">
+              <a:defRPr lang="en-US" sz="1800" b="0" u="none" strike="noStrike">
                 <a:solidFill>
                   <a:srgbClr val="000000"/>
                 </a:solidFill>
+                <a:effectLst/>
+                <a:uFillTx/>
                 <a:latin typeface="Arial"/>
-              </a:rPr>
-              <a:t>Fourth Outline Level</a:t>
-            </a:r>
-            <a:endParaRPr b="0" lang="en-US" sz="1800" spc="-1" strike="noStrike">
-              <a:solidFill>
-                <a:srgbClr val="000000"/>
-              </a:solidFill>
-              <a:latin typeface="Arial"/>
-            </a:endParaRPr>
-          </a:p>
-          <a:p>
-            <a:pPr lvl="4" marL="2160000" indent="-216000">
+              </a:defRPr>
+            </a:lvl4pPr>
+            <a:lvl5pPr lvl="4" algn="l">
               <a:spcBef>
                 <a:spcPts val="283"/>
               </a:spcBef>
@@ -3948,25 +4768,16 @@
               <a:buSzPct val="45000"/>
               <a:buFont typeface="Wingdings" charset="2"/>
               <a:buChar char=""/>
-            </a:pPr>
-            <a:r>
-              <a:rPr b="0" lang="en-US" sz="1800" spc="-1" strike="noStrike">
+              <a:defRPr lang="en-US" sz="1800" b="0" u="none" strike="noStrike">
                 <a:solidFill>
                   <a:srgbClr val="000000"/>
                 </a:solidFill>
+                <a:effectLst/>
+                <a:uFillTx/>
                 <a:latin typeface="Arial"/>
-              </a:rPr>
-              <a:t>Fifth Outline Level</a:t>
-            </a:r>
-            <a:endParaRPr b="0" lang="en-US" sz="1800" spc="-1" strike="noStrike">
-              <a:solidFill>
-                <a:srgbClr val="000000"/>
-              </a:solidFill>
-              <a:latin typeface="Arial"/>
-            </a:endParaRPr>
-          </a:p>
-          <a:p>
-            <a:pPr lvl="5" marL="2592000" indent="-216000">
+              </a:defRPr>
+            </a:lvl5pPr>
+            <a:lvl6pPr lvl="5" algn="l">
               <a:spcBef>
                 <a:spcPts val="283"/>
               </a:spcBef>
@@ -3976,25 +4787,16 @@
               <a:buSzPct val="45000"/>
               <a:buFont typeface="Wingdings" charset="2"/>
               <a:buChar char=""/>
-            </a:pPr>
-            <a:r>
-              <a:rPr b="0" lang="en-US" sz="1800" spc="-1" strike="noStrike">
+              <a:defRPr lang="en-US" sz="1800" b="0" u="none" strike="noStrike">
                 <a:solidFill>
                   <a:srgbClr val="000000"/>
                 </a:solidFill>
+                <a:effectLst/>
+                <a:uFillTx/>
                 <a:latin typeface="Arial"/>
-              </a:rPr>
-              <a:t>Sixth Outline Level</a:t>
-            </a:r>
-            <a:endParaRPr b="0" lang="en-US" sz="1800" spc="-1" strike="noStrike">
-              <a:solidFill>
-                <a:srgbClr val="000000"/>
-              </a:solidFill>
-              <a:latin typeface="Arial"/>
-            </a:endParaRPr>
-          </a:p>
-          <a:p>
-            <a:pPr lvl="6" marL="3024000" indent="-216000">
+              </a:defRPr>
+            </a:lvl6pPr>
+            <a:lvl7pPr lvl="6" algn="l">
               <a:spcBef>
                 <a:spcPts val="283"/>
               </a:spcBef>
@@ -4004,20 +4806,237 @@
               <a:buSzPct val="45000"/>
               <a:buFont typeface="Wingdings" charset="2"/>
               <a:buChar char=""/>
-            </a:pPr>
-            <a:r>
-              <a:rPr b="0" lang="en-US" sz="1800" spc="-1" strike="noStrike">
+              <a:defRPr lang="en-US" sz="1800" b="0" u="none" strike="noStrike">
                 <a:solidFill>
                   <a:srgbClr val="000000"/>
                 </a:solidFill>
+                <a:effectLst/>
+                <a:uFillTx/>
+                <a:latin typeface="Arial"/>
+              </a:defRPr>
+            </a:lvl7pPr>
+          </a:lstStyle>
+          <a:p>
+            <a:pPr marL="432000" indent="-324000" algn="l">
+              <a:spcBef>
+                <a:spcPts val="1417"/>
+              </a:spcBef>
+              <a:buClr>
+                <a:srgbClr val="000000"/>
+              </a:buClr>
+              <a:buSzPct val="45000"/>
+              <a:buFont typeface="Wingdings" charset="2"/>
+              <a:buChar char=""/>
+            </a:pPr>
+            <a:r>
+              <a:rPr lang="en-US" sz="1800" b="0" u="none" strike="noStrike">
+                <a:solidFill>
+                  <a:srgbClr val="000000"/>
+                </a:solidFill>
+                <a:effectLst/>
+                <a:uFillTx/>
+                <a:latin typeface="Arial"/>
+              </a:rPr>
+              <a:t>Click to edit the outline text format</a:t>
+            </a:r>
+            <a:endParaRPr lang="en-US" sz="1800" b="0" u="none" strike="noStrike">
+              <a:solidFill>
+                <a:srgbClr val="000000"/>
+              </a:solidFill>
+              <a:effectLst/>
+              <a:uFillTx/>
+              <a:latin typeface="Arial"/>
+            </a:endParaRPr>
+          </a:p>
+          <a:p>
+            <a:pPr marL="864000" lvl="1" indent="-324000" algn="l">
+              <a:spcBef>
+                <a:spcPts val="1134"/>
+              </a:spcBef>
+              <a:buClr>
+                <a:srgbClr val="000000"/>
+              </a:buClr>
+              <a:buSzPct val="75000"/>
+              <a:buFont typeface="Symbol" charset="2"/>
+              <a:buChar char=""/>
+            </a:pPr>
+            <a:r>
+              <a:rPr lang="en-US" sz="1800" b="0" u="none" strike="noStrike">
+                <a:solidFill>
+                  <a:srgbClr val="000000"/>
+                </a:solidFill>
+                <a:effectLst/>
+                <a:uFillTx/>
+                <a:latin typeface="Arial"/>
+              </a:rPr>
+              <a:t>Second Outline Level</a:t>
+            </a:r>
+            <a:endParaRPr lang="en-US" sz="1800" b="0" u="none" strike="noStrike">
+              <a:solidFill>
+                <a:srgbClr val="000000"/>
+              </a:solidFill>
+              <a:effectLst/>
+              <a:uFillTx/>
+              <a:latin typeface="Arial"/>
+            </a:endParaRPr>
+          </a:p>
+          <a:p>
+            <a:pPr marL="1296000" lvl="2" indent="-288000" algn="l">
+              <a:spcBef>
+                <a:spcPts val="850"/>
+              </a:spcBef>
+              <a:buClr>
+                <a:srgbClr val="000000"/>
+              </a:buClr>
+              <a:buSzPct val="45000"/>
+              <a:buFont typeface="Wingdings" charset="2"/>
+              <a:buChar char=""/>
+            </a:pPr>
+            <a:r>
+              <a:rPr lang="en-US" sz="1800" b="0" u="none" strike="noStrike">
+                <a:solidFill>
+                  <a:srgbClr val="000000"/>
+                </a:solidFill>
+                <a:effectLst/>
+                <a:uFillTx/>
+                <a:latin typeface="Arial"/>
+              </a:rPr>
+              <a:t>Third Outline Level</a:t>
+            </a:r>
+            <a:endParaRPr lang="en-US" sz="1800" b="0" u="none" strike="noStrike">
+              <a:solidFill>
+                <a:srgbClr val="000000"/>
+              </a:solidFill>
+              <a:effectLst/>
+              <a:uFillTx/>
+              <a:latin typeface="Arial"/>
+            </a:endParaRPr>
+          </a:p>
+          <a:p>
+            <a:pPr marL="1728000" lvl="3" indent="-216000" algn="l">
+              <a:spcBef>
+                <a:spcPts val="567"/>
+              </a:spcBef>
+              <a:buClr>
+                <a:srgbClr val="000000"/>
+              </a:buClr>
+              <a:buSzPct val="75000"/>
+              <a:buFont typeface="Symbol" charset="2"/>
+              <a:buChar char=""/>
+            </a:pPr>
+            <a:r>
+              <a:rPr lang="en-US" sz="1800" b="0" u="none" strike="noStrike">
+                <a:solidFill>
+                  <a:srgbClr val="000000"/>
+                </a:solidFill>
+                <a:effectLst/>
+                <a:uFillTx/>
+                <a:latin typeface="Arial"/>
+              </a:rPr>
+              <a:t>Fourth Outline Level</a:t>
+            </a:r>
+            <a:endParaRPr lang="en-US" sz="1800" b="0" u="none" strike="noStrike">
+              <a:solidFill>
+                <a:srgbClr val="000000"/>
+              </a:solidFill>
+              <a:effectLst/>
+              <a:uFillTx/>
+              <a:latin typeface="Arial"/>
+            </a:endParaRPr>
+          </a:p>
+          <a:p>
+            <a:pPr marL="2160000" lvl="4" indent="-216000" algn="l">
+              <a:spcBef>
+                <a:spcPts val="283"/>
+              </a:spcBef>
+              <a:buClr>
+                <a:srgbClr val="000000"/>
+              </a:buClr>
+              <a:buSzPct val="45000"/>
+              <a:buFont typeface="Wingdings" charset="2"/>
+              <a:buChar char=""/>
+            </a:pPr>
+            <a:r>
+              <a:rPr lang="en-US" sz="1800" b="0" u="none" strike="noStrike">
+                <a:solidFill>
+                  <a:srgbClr val="000000"/>
+                </a:solidFill>
+                <a:effectLst/>
+                <a:uFillTx/>
+                <a:latin typeface="Arial"/>
+              </a:rPr>
+              <a:t>Fifth Outline Level</a:t>
+            </a:r>
+            <a:endParaRPr lang="en-US" sz="1800" b="0" u="none" strike="noStrike">
+              <a:solidFill>
+                <a:srgbClr val="000000"/>
+              </a:solidFill>
+              <a:effectLst/>
+              <a:uFillTx/>
+              <a:latin typeface="Arial"/>
+            </a:endParaRPr>
+          </a:p>
+          <a:p>
+            <a:pPr marL="2592000" lvl="5" indent="-216000" algn="l">
+              <a:spcBef>
+                <a:spcPts val="283"/>
+              </a:spcBef>
+              <a:buClr>
+                <a:srgbClr val="000000"/>
+              </a:buClr>
+              <a:buSzPct val="45000"/>
+              <a:buFont typeface="Wingdings" charset="2"/>
+              <a:buChar char=""/>
+            </a:pPr>
+            <a:r>
+              <a:rPr lang="en-US" sz="1800" b="0" u="none" strike="noStrike">
+                <a:solidFill>
+                  <a:srgbClr val="000000"/>
+                </a:solidFill>
+                <a:effectLst/>
+                <a:uFillTx/>
+                <a:latin typeface="Arial"/>
+              </a:rPr>
+              <a:t>Sixth Outline Level</a:t>
+            </a:r>
+            <a:endParaRPr lang="en-US" sz="1800" b="0" u="none" strike="noStrike">
+              <a:solidFill>
+                <a:srgbClr val="000000"/>
+              </a:solidFill>
+              <a:effectLst/>
+              <a:uFillTx/>
+              <a:latin typeface="Arial"/>
+            </a:endParaRPr>
+          </a:p>
+          <a:p>
+            <a:pPr marL="3024000" lvl="6" indent="-216000" algn="l">
+              <a:spcBef>
+                <a:spcPts val="283"/>
+              </a:spcBef>
+              <a:buClr>
+                <a:srgbClr val="000000"/>
+              </a:buClr>
+              <a:buSzPct val="45000"/>
+              <a:buFont typeface="Wingdings" charset="2"/>
+              <a:buChar char=""/>
+            </a:pPr>
+            <a:r>
+              <a:rPr lang="en-US" sz="1800" b="0" u="none" strike="noStrike">
+                <a:solidFill>
+                  <a:srgbClr val="000000"/>
+                </a:solidFill>
+                <a:effectLst/>
+                <a:uFillTx/>
                 <a:latin typeface="Arial"/>
               </a:rPr>
               <a:t>Seventh Outline Level</a:t>
             </a:r>
-            <a:endParaRPr b="0" lang="en-US" sz="1800" spc="-1" strike="noStrike">
-              <a:solidFill>
-                <a:srgbClr val="000000"/>
-              </a:solidFill>
+            <a:endParaRPr lang="en-US" sz="1800" b="0" u="none" strike="noStrike">
+              <a:solidFill>
+                <a:srgbClr val="000000"/>
+              </a:solidFill>
+              <a:effectLst/>
+              <a:uFillTx/>
               <a:latin typeface="Arial"/>
             </a:endParaRPr>
           </a:p>
@@ -4025,7 +5044,7 @@
       </p:sp>
       <p:sp>
         <p:nvSpPr>
-          <p:cNvPr id="26" name="PlaceHolder 4"/>
+          <p:cNvPr id="32" name="PlaceHolder 4"/>
           <p:cNvSpPr>
             <a:spLocks noGrp="1"/>
           </p:cNvSpPr>
@@ -4036,7 +5055,7 @@
         <p:spPr>
           <a:xfrm>
             <a:off x="4038480" y="6356520"/>
-            <a:ext cx="4114080" cy="364320"/>
+            <a:ext cx="4113720" cy="363960"/>
           </a:xfrm>
           <a:prstGeom prst="rect">
             <a:avLst/>
@@ -4047,7 +5066,7 @@
           </a:ln>
         </p:spPr>
         <p:txBody>
-          <a:bodyPr lIns="91440" rIns="91440" tIns="45720" bIns="45720" anchor="ctr">
+          <a:bodyPr lIns="91440" tIns="45720" rIns="91440" bIns="45720" anchor="ctr">
             <a:noAutofit/>
           </a:bodyPr>
           <a:lstStyle>
@@ -4057,12 +5076,14 @@
               </a:lnSpc>
               <a:buNone/>
               <a:tabLst>
-                <a:tab algn="l" pos="0"/>
+                <a:tab pos="0" algn="l"/>
               </a:tabLst>
-              <a:defRPr b="0" lang="en-US" sz="1400" spc="-1" strike="noStrike">
+              <a:defRPr lang="en-US" sz="1400" b="0" u="none" strike="noStrike">
                 <a:solidFill>
                   <a:srgbClr val="000000"/>
                 </a:solidFill>
+                <a:effectLst/>
+                <a:uFillTx/>
                 <a:latin typeface="Times New Roman"/>
               </a:defRPr>
             </a:lvl1pPr>
@@ -4074,22 +5095,26 @@
               </a:lnSpc>
               <a:buNone/>
               <a:tabLst>
-                <a:tab algn="l" pos="0"/>
+                <a:tab pos="0" algn="l"/>
               </a:tabLst>
             </a:pPr>
             <a:r>
-              <a:rPr b="0" lang="en-US" sz="1400" spc="-1" strike="noStrike">
+              <a:rPr lang="en-US" sz="1400" b="0" u="none" strike="noStrike">
                 <a:solidFill>
                   <a:srgbClr val="000000"/>
                 </a:solidFill>
+                <a:effectLst/>
+                <a:uFillTx/>
                 <a:latin typeface="Times New Roman"/>
               </a:rPr>
               <a:t>&lt;footer&gt;</a:t>
             </a:r>
-            <a:endParaRPr b="0" lang="en-US" sz="1400" spc="-1" strike="noStrike">
-              <a:solidFill>
-                <a:srgbClr val="000000"/>
-              </a:solidFill>
+            <a:endParaRPr lang="en-US" sz="1400" b="0" u="none" strike="noStrike">
+              <a:solidFill>
+                <a:srgbClr val="000000"/>
+              </a:solidFill>
+              <a:effectLst/>
+              <a:uFillTx/>
               <a:latin typeface="Times New Roman"/>
             </a:endParaRPr>
           </a:p>
@@ -4097,7 +5122,7 @@
       </p:sp>
       <p:sp>
         <p:nvSpPr>
-          <p:cNvPr id="27" name="PlaceHolder 5"/>
+          <p:cNvPr id="33" name="PlaceHolder 5"/>
           <p:cNvSpPr>
             <a:spLocks noGrp="1"/>
           </p:cNvSpPr>
@@ -4108,7 +5133,7 @@
         <p:spPr>
           <a:xfrm>
             <a:off x="8610480" y="6356520"/>
-            <a:ext cx="2742480" cy="364320"/>
+            <a:ext cx="2742120" cy="363960"/>
           </a:xfrm>
           <a:prstGeom prst="rect">
             <a:avLst/>
@@ -4119,7 +5144,7 @@
           </a:ln>
         </p:spPr>
         <p:txBody>
-          <a:bodyPr lIns="91440" rIns="91440" tIns="45720" bIns="45720" anchor="ctr">
+          <a:bodyPr lIns="91440" tIns="45720" rIns="91440" bIns="45720" anchor="ctr">
             <a:noAutofit/>
           </a:bodyPr>
           <a:lstStyle>
@@ -4129,14 +5154,16 @@
               </a:lnSpc>
               <a:buNone/>
               <a:tabLst>
-                <a:tab algn="l" pos="0"/>
+                <a:tab pos="0" algn="l"/>
               </a:tabLst>
-              <a:defRPr b="0" lang="en-US" sz="1200" spc="-1" strike="noStrike">
+              <a:defRPr lang="en-US" sz="1200" b="0" u="none" strike="noStrike">
                 <a:solidFill>
                   <a:schemeClr val="dk1">
                     <a:tint val="75000"/>
                   </a:schemeClr>
                 </a:solidFill>
+                <a:effectLst/>
+                <a:uFillTx/>
                 <a:latin typeface="Calibri"/>
               </a:defRPr>
             </a:lvl1pPr>
@@ -4148,24 +5175,28 @@
               </a:lnSpc>
               <a:buNone/>
               <a:tabLst>
-                <a:tab algn="l" pos="0"/>
+                <a:tab pos="0" algn="l"/>
               </a:tabLst>
             </a:pPr>
-            <a:fld id="{AD6EAD62-C170-43C9-8B31-91116693C356}" type="slidenum">
-              <a:rPr b="0" lang="en-US" sz="1200" spc="-1" strike="noStrike">
+            <a:fld id="{F31EE468-B1C2-4BC3-A6A1-3CCC5ABA2746}" type="slidenum">
+              <a:rPr lang="en-US" sz="1200" b="0" u="none" strike="noStrike">
                 <a:solidFill>
                   <a:schemeClr val="dk1">
                     <a:tint val="75000"/>
                   </a:schemeClr>
                 </a:solidFill>
+                <a:effectLst/>
+                <a:uFillTx/>
                 <a:latin typeface="Calibri"/>
               </a:rPr>
               <a:t>&lt;number&gt;</a:t>
             </a:fld>
-            <a:endParaRPr b="0" lang="en-US" sz="1200" spc="-1" strike="noStrike">
-              <a:solidFill>
-                <a:srgbClr val="000000"/>
-              </a:solidFill>
+            <a:endParaRPr lang="en-US" sz="1200" b="0" u="none" strike="noStrike">
+              <a:solidFill>
+                <a:srgbClr val="000000"/>
+              </a:solidFill>
+              <a:effectLst/>
+              <a:uFillTx/>
               <a:latin typeface="Times New Roman"/>
             </a:endParaRPr>
           </a:p>
@@ -4173,7 +5204,7 @@
       </p:sp>
       <p:sp>
         <p:nvSpPr>
-          <p:cNvPr id="28" name="PlaceHolder 6"/>
+          <p:cNvPr id="34" name="PlaceHolder 6"/>
           <p:cNvSpPr>
             <a:spLocks noGrp="1"/>
           </p:cNvSpPr>
@@ -4184,7 +5215,7 @@
         <p:spPr>
           <a:xfrm>
             <a:off x="838080" y="6356520"/>
-            <a:ext cx="2742480" cy="364320"/>
+            <a:ext cx="2742120" cy="363960"/>
           </a:xfrm>
           <a:prstGeom prst="rect">
             <a:avLst/>
@@ -4195,37 +5226,43 @@
           </a:ln>
         </p:spPr>
         <p:txBody>
-          <a:bodyPr lIns="91440" rIns="91440" tIns="45720" bIns="45720" anchor="ctr">
+          <a:bodyPr lIns="91440" tIns="45720" rIns="91440" bIns="45720" anchor="ctr">
             <a:noAutofit/>
           </a:bodyPr>
           <a:lstStyle>
-            <a:lvl1pPr indent="0">
+            <a:lvl1pPr indent="0" algn="l">
               <a:buNone/>
-              <a:defRPr b="0" lang="en-US" sz="1400" spc="-1" strike="noStrike">
+              <a:defRPr lang="en-US" sz="1400" b="0" u="none" strike="noStrike">
                 <a:solidFill>
                   <a:srgbClr val="000000"/>
                 </a:solidFill>
+                <a:effectLst/>
+                <a:uFillTx/>
                 <a:latin typeface="Times New Roman"/>
               </a:defRPr>
             </a:lvl1pPr>
           </a:lstStyle>
           <a:p>
-            <a:pPr indent="0">
+            <a:pPr indent="0" algn="l">
               <a:buNone/>
             </a:pPr>
             <a:r>
-              <a:rPr b="0" lang="en-US" sz="1400" spc="-1" strike="noStrike">
+              <a:rPr lang="en-US" sz="1400" b="0" u="none" strike="noStrike">
                 <a:solidFill>
                   <a:srgbClr val="000000"/>
                 </a:solidFill>
+                <a:effectLst/>
+                <a:uFillTx/>
                 <a:latin typeface="Times New Roman"/>
               </a:rPr>
               <a:t>&lt;date/time&gt;</a:t>
             </a:r>
-            <a:endParaRPr b="0" lang="en-US" sz="1400" spc="-1" strike="noStrike">
-              <a:solidFill>
-                <a:srgbClr val="000000"/>
-              </a:solidFill>
+            <a:endParaRPr lang="en-US" sz="1400" b="0" u="none" strike="noStrike">
+              <a:solidFill>
+                <a:srgbClr val="000000"/>
+              </a:solidFill>
+              <a:effectLst/>
+              <a:uFillTx/>
               <a:latin typeface="Times New Roman"/>
             </a:endParaRPr>
           </a:p>
@@ -4233,7 +5270,7 @@
       </p:sp>
     </p:spTree>
   </p:cSld>
-  <p:clrMap bg1="lt1" bg2="lt2" tx1="dk1" tx2="dk2" accent1="accent1" accent2="accent2" accent3="accent3" accent4="accent4" accent5="accent5" accent6="accent6" hlink="hlink" folHlink="folHlink"/>
+  <p:clrMap bg1="lt1" tx1="dk1" bg2="lt2" tx2="dk2" accent1="accent1" accent2="accent2" accent3="accent3" accent4="accent4" accent5="accent5" accent6="accent6" hlink="hlink" folHlink="folHlink"/>
   <p:sldLayoutIdLst>
     <p:sldLayoutId id="2147483659" r:id="rId2"/>
   </p:sldLayoutIdLst>
@@ -4246,7 +5283,7 @@
     <p:bg>
       <p:bgPr>
         <a:solidFill>
-          <a:srgbClr val="ffffff"/>
+          <a:srgbClr val="FFFFFF"/>
         </a:solidFill>
       </p:bgPr>
     </p:bg>
@@ -4266,7 +5303,7 @@
       </p:grpSpPr>
       <p:sp>
         <p:nvSpPr>
-          <p:cNvPr id="32" name="PlaceHolder 1"/>
+          <p:cNvPr id="38" name="PlaceHolder 1"/>
           <p:cNvSpPr>
             <a:spLocks noGrp="1"/>
           </p:cNvSpPr>
@@ -4277,7 +5314,7 @@
         <p:spPr>
           <a:xfrm>
             <a:off x="4038480" y="6356520"/>
-            <a:ext cx="4114080" cy="364320"/>
+            <a:ext cx="4113720" cy="363960"/>
           </a:xfrm>
           <a:prstGeom prst="rect">
             <a:avLst/>
@@ -4288,7 +5325,7 @@
           </a:ln>
         </p:spPr>
         <p:txBody>
-          <a:bodyPr lIns="91440" rIns="91440" tIns="45720" bIns="45720" anchor="ctr">
+          <a:bodyPr lIns="91440" tIns="45720" rIns="91440" bIns="45720" anchor="ctr">
             <a:noAutofit/>
           </a:bodyPr>
           <a:lstStyle>
@@ -4298,12 +5335,14 @@
               </a:lnSpc>
               <a:buNone/>
               <a:tabLst>
-                <a:tab algn="l" pos="0"/>
+                <a:tab pos="0" algn="l"/>
               </a:tabLst>
-              <a:defRPr b="0" lang="en-US" sz="1400" spc="-1" strike="noStrike">
+              <a:defRPr lang="en-US" sz="1400" b="0" u="none" strike="noStrike">
                 <a:solidFill>
                   <a:srgbClr val="000000"/>
                 </a:solidFill>
+                <a:effectLst/>
+                <a:uFillTx/>
                 <a:latin typeface="Times New Roman"/>
               </a:defRPr>
             </a:lvl1pPr>
@@ -4315,22 +5354,26 @@
               </a:lnSpc>
               <a:buNone/>
               <a:tabLst>
-                <a:tab algn="l" pos="0"/>
+                <a:tab pos="0" algn="l"/>
               </a:tabLst>
             </a:pPr>
             <a:r>
-              <a:rPr b="0" lang="en-US" sz="1400" spc="-1" strike="noStrike">
+              <a:rPr lang="en-US" sz="1400" b="0" u="none" strike="noStrike">
                 <a:solidFill>
                   <a:srgbClr val="000000"/>
                 </a:solidFill>
+                <a:effectLst/>
+                <a:uFillTx/>
                 <a:latin typeface="Times New Roman"/>
               </a:rPr>
               <a:t>&lt;footer&gt;</a:t>
             </a:r>
-            <a:endParaRPr b="0" lang="en-US" sz="1400" spc="-1" strike="noStrike">
-              <a:solidFill>
-                <a:srgbClr val="000000"/>
-              </a:solidFill>
+            <a:endParaRPr lang="en-US" sz="1400" b="0" u="none" strike="noStrike">
+              <a:solidFill>
+                <a:srgbClr val="000000"/>
+              </a:solidFill>
+              <a:effectLst/>
+              <a:uFillTx/>
               <a:latin typeface="Times New Roman"/>
             </a:endParaRPr>
           </a:p>
@@ -4338,7 +5381,7 @@
       </p:sp>
       <p:sp>
         <p:nvSpPr>
-          <p:cNvPr id="33" name="PlaceHolder 2"/>
+          <p:cNvPr id="39" name="PlaceHolder 2"/>
           <p:cNvSpPr>
             <a:spLocks noGrp="1"/>
           </p:cNvSpPr>
@@ -4349,7 +5392,7 @@
         <p:spPr>
           <a:xfrm>
             <a:off x="8610480" y="6356520"/>
-            <a:ext cx="2742480" cy="364320"/>
+            <a:ext cx="2742120" cy="363960"/>
           </a:xfrm>
           <a:prstGeom prst="rect">
             <a:avLst/>
@@ -4360,7 +5403,7 @@
           </a:ln>
         </p:spPr>
         <p:txBody>
-          <a:bodyPr lIns="91440" rIns="91440" tIns="45720" bIns="45720" anchor="ctr">
+          <a:bodyPr lIns="91440" tIns="45720" rIns="91440" bIns="45720" anchor="ctr">
             <a:noAutofit/>
           </a:bodyPr>
           <a:lstStyle>
@@ -4370,14 +5413,16 @@
               </a:lnSpc>
               <a:buNone/>
               <a:tabLst>
-                <a:tab algn="l" pos="0"/>
+                <a:tab pos="0" algn="l"/>
               </a:tabLst>
-              <a:defRPr b="0" lang="en-US" sz="1200" spc="-1" strike="noStrike">
+              <a:defRPr lang="en-US" sz="1200" b="0" u="none" strike="noStrike">
                 <a:solidFill>
                   <a:schemeClr val="dk1">
                     <a:tint val="75000"/>
                   </a:schemeClr>
                 </a:solidFill>
+                <a:effectLst/>
+                <a:uFillTx/>
                 <a:latin typeface="Calibri"/>
               </a:defRPr>
             </a:lvl1pPr>
@@ -4389,24 +5434,28 @@
               </a:lnSpc>
               <a:buNone/>
               <a:tabLst>
-                <a:tab algn="l" pos="0"/>
+                <a:tab pos="0" algn="l"/>
               </a:tabLst>
             </a:pPr>
-            <a:fld id="{F4D4F02B-9F9C-4B35-8C8C-450D7191B839}" type="slidenum">
-              <a:rPr b="0" lang="en-US" sz="1200" spc="-1" strike="noStrike">
+            <a:fld id="{02FBB435-1C3A-4B2B-9409-7CE6104AF524}" type="slidenum">
+              <a:rPr lang="en-US" sz="1200" b="0" u="none" strike="noStrike">
                 <a:solidFill>
                   <a:schemeClr val="dk1">
                     <a:tint val="75000"/>
                   </a:schemeClr>
                 </a:solidFill>
+                <a:effectLst/>
+                <a:uFillTx/>
                 <a:latin typeface="Calibri"/>
               </a:rPr>
               <a:t>&lt;number&gt;</a:t>
             </a:fld>
-            <a:endParaRPr b="0" lang="en-US" sz="1200" spc="-1" strike="noStrike">
-              <a:solidFill>
-                <a:srgbClr val="000000"/>
-              </a:solidFill>
+            <a:endParaRPr lang="en-US" sz="1200" b="0" u="none" strike="noStrike">
+              <a:solidFill>
+                <a:srgbClr val="000000"/>
+              </a:solidFill>
+              <a:effectLst/>
+              <a:uFillTx/>
               <a:latin typeface="Times New Roman"/>
             </a:endParaRPr>
           </a:p>
@@ -4414,7 +5463,7 @@
       </p:sp>
       <p:sp>
         <p:nvSpPr>
-          <p:cNvPr id="34" name="PlaceHolder 3"/>
+          <p:cNvPr id="40" name="PlaceHolder 3"/>
           <p:cNvSpPr>
             <a:spLocks noGrp="1"/>
           </p:cNvSpPr>
@@ -4425,7 +5474,7 @@
         <p:spPr>
           <a:xfrm>
             <a:off x="838080" y="6356520"/>
-            <a:ext cx="2742480" cy="364320"/>
+            <a:ext cx="2742120" cy="363960"/>
           </a:xfrm>
           <a:prstGeom prst="rect">
             <a:avLst/>
@@ -4436,37 +5485,43 @@
           </a:ln>
         </p:spPr>
         <p:txBody>
-          <a:bodyPr lIns="91440" rIns="91440" tIns="45720" bIns="45720" anchor="ctr">
+          <a:bodyPr lIns="91440" tIns="45720" rIns="91440" bIns="45720" anchor="ctr">
             <a:noAutofit/>
           </a:bodyPr>
           <a:lstStyle>
-            <a:lvl1pPr indent="0">
+            <a:lvl1pPr indent="0" algn="l">
               <a:buNone/>
-              <a:defRPr b="0" lang="en-US" sz="1400" spc="-1" strike="noStrike">
+              <a:defRPr lang="en-US" sz="1400" b="0" u="none" strike="noStrike">
                 <a:solidFill>
                   <a:srgbClr val="000000"/>
                 </a:solidFill>
+                <a:effectLst/>
+                <a:uFillTx/>
                 <a:latin typeface="Times New Roman"/>
               </a:defRPr>
             </a:lvl1pPr>
           </a:lstStyle>
           <a:p>
-            <a:pPr indent="0">
+            <a:pPr indent="0" algn="l">
               <a:buNone/>
             </a:pPr>
             <a:r>
-              <a:rPr b="0" lang="en-US" sz="1400" spc="-1" strike="noStrike">
+              <a:rPr lang="en-US" sz="1400" b="0" u="none" strike="noStrike">
                 <a:solidFill>
                   <a:srgbClr val="000000"/>
                 </a:solidFill>
+                <a:effectLst/>
+                <a:uFillTx/>
                 <a:latin typeface="Times New Roman"/>
               </a:rPr>
               <a:t>&lt;date/time&gt;</a:t>
             </a:r>
-            <a:endParaRPr b="0" lang="en-US" sz="1400" spc="-1" strike="noStrike">
-              <a:solidFill>
-                <a:srgbClr val="000000"/>
-              </a:solidFill>
+            <a:endParaRPr lang="en-US" sz="1400" b="0" u="none" strike="noStrike">
+              <a:solidFill>
+                <a:srgbClr val="000000"/>
+              </a:solidFill>
+              <a:effectLst/>
+              <a:uFillTx/>
               <a:latin typeface="Times New Roman"/>
             </a:endParaRPr>
           </a:p>
@@ -4474,7 +5529,7 @@
       </p:sp>
     </p:spTree>
   </p:cSld>
-  <p:clrMap bg1="lt1" bg2="lt2" tx1="dk1" tx2="dk2" accent1="accent1" accent2="accent2" accent3="accent3" accent4="accent4" accent5="accent5" accent6="accent6" hlink="hlink" folHlink="folHlink"/>
+  <p:clrMap bg1="lt1" tx1="dk1" bg2="lt2" tx2="dk2" accent1="accent1" accent2="accent2" accent3="accent3" accent4="accent4" accent5="accent5" accent6="accent6" hlink="hlink" folHlink="folHlink"/>
   <p:sldLayoutIdLst>
     <p:sldLayoutId id="2147483661" r:id="rId2"/>
   </p:sldLayoutIdLst>
@@ -4487,7 +5542,7 @@
     <p:bg>
       <p:bgPr>
         <a:solidFill>
-          <a:srgbClr val="ffffff"/>
+          <a:srgbClr val="FFFFFF"/>
         </a:solidFill>
       </p:bgPr>
     </p:bg>
@@ -4507,7 +5562,7 @@
       </p:grpSpPr>
       <p:sp>
         <p:nvSpPr>
-          <p:cNvPr id="35" name="PlaceHolder 1"/>
+          <p:cNvPr id="41" name="PlaceHolder 1"/>
           <p:cNvSpPr>
             <a:spLocks noGrp="1"/>
           </p:cNvSpPr>
@@ -4518,7 +5573,7 @@
         <p:spPr>
           <a:xfrm>
             <a:off x="1523880" y="1122480"/>
-            <a:ext cx="9143280" cy="2386800"/>
+            <a:ext cx="9142920" cy="2386440"/>
           </a:xfrm>
           <a:prstGeom prst="rect">
             <a:avLst/>
@@ -4529,26 +5584,43 @@
           </a:ln>
         </p:spPr>
         <p:txBody>
-          <a:bodyPr lIns="0" rIns="0" tIns="0" bIns="0" anchor="ctr">
+          <a:bodyPr lIns="0" tIns="0" rIns="0" bIns="0" anchor="ctr">
             <a:noAutofit/>
           </a:bodyPr>
-          <a:p>
-            <a:pPr indent="0">
+          <a:lstStyle>
+            <a:lvl1pPr indent="0" algn="l">
               <a:buNone/>
-            </a:pPr>
-            <a:r>
-              <a:rPr b="0" lang="en-US" sz="1800" spc="-1" strike="noStrike">
+              <a:defRPr lang="en-US" sz="1800" b="0" u="none" strike="noStrike">
                 <a:solidFill>
                   <a:srgbClr val="000000"/>
                 </a:solidFill>
+                <a:effectLst/>
+                <a:uFillTx/>
+                <a:latin typeface="Arial"/>
+              </a:defRPr>
+            </a:lvl1pPr>
+          </a:lstStyle>
+          <a:p>
+            <a:pPr indent="0" algn="l">
+              <a:buNone/>
+            </a:pPr>
+            <a:r>
+              <a:rPr lang="en-US" sz="1800" b="0" u="none" strike="noStrike">
+                <a:solidFill>
+                  <a:srgbClr val="000000"/>
+                </a:solidFill>
+                <a:effectLst/>
+                <a:uFillTx/>
                 <a:latin typeface="Arial"/>
               </a:rPr>
               <a:t>Click to edit the title text format</a:t>
             </a:r>
-            <a:endParaRPr b="0" lang="en-US" sz="1800" spc="-1" strike="noStrike">
-              <a:solidFill>
-                <a:srgbClr val="000000"/>
-              </a:solidFill>
+            <a:endParaRPr lang="en-US" sz="1800" b="0" u="none" strike="noStrike">
+              <a:solidFill>
+                <a:srgbClr val="000000"/>
+              </a:solidFill>
+              <a:effectLst/>
+              <a:uFillTx/>
               <a:latin typeface="Arial"/>
             </a:endParaRPr>
           </a:p>
@@ -4556,7 +5628,7 @@
       </p:sp>
       <p:sp>
         <p:nvSpPr>
-          <p:cNvPr id="36" name="PlaceHolder 2"/>
+          <p:cNvPr id="42" name="PlaceHolder 2"/>
           <p:cNvSpPr>
             <a:spLocks noGrp="1"/>
           </p:cNvSpPr>
@@ -4567,7 +5639,7 @@
         <p:spPr>
           <a:xfrm>
             <a:off x="4038480" y="6356520"/>
-            <a:ext cx="4114080" cy="364320"/>
+            <a:ext cx="4113720" cy="363960"/>
           </a:xfrm>
           <a:prstGeom prst="rect">
             <a:avLst/>
@@ -4578,7 +5650,7 @@
           </a:ln>
         </p:spPr>
         <p:txBody>
-          <a:bodyPr lIns="91440" rIns="91440" tIns="45720" bIns="45720" anchor="ctr">
+          <a:bodyPr lIns="91440" tIns="45720" rIns="91440" bIns="45720" anchor="ctr">
             <a:noAutofit/>
           </a:bodyPr>
           <a:lstStyle>
@@ -4588,12 +5660,14 @@
               </a:lnSpc>
               <a:buNone/>
               <a:tabLst>
-                <a:tab algn="l" pos="0"/>
+                <a:tab pos="0" algn="l"/>
               </a:tabLst>
-              <a:defRPr b="0" lang="en-US" sz="1400" spc="-1" strike="noStrike">
+              <a:defRPr lang="en-US" sz="1400" b="0" u="none" strike="noStrike">
                 <a:solidFill>
                   <a:srgbClr val="000000"/>
                 </a:solidFill>
+                <a:effectLst/>
+                <a:uFillTx/>
                 <a:latin typeface="Times New Roman"/>
               </a:defRPr>
             </a:lvl1pPr>
@@ -4605,22 +5679,26 @@
               </a:lnSpc>
               <a:buNone/>
               <a:tabLst>
-                <a:tab algn="l" pos="0"/>
+                <a:tab pos="0" algn="l"/>
               </a:tabLst>
             </a:pPr>
             <a:r>
-              <a:rPr b="0" lang="en-US" sz="1400" spc="-1" strike="noStrike">
+              <a:rPr lang="en-US" sz="1400" b="0" u="none" strike="noStrike">
                 <a:solidFill>
                   <a:srgbClr val="000000"/>
                 </a:solidFill>
+                <a:effectLst/>
+                <a:uFillTx/>
                 <a:latin typeface="Times New Roman"/>
               </a:rPr>
-              <a:t>&lt;footer&gt;</a:t>
-            </a:r>
-            <a:endParaRPr b="0" lang="en-US" sz="1400" spc="-1" strike="noStrike">
-              <a:solidFill>
-                <a:srgbClr val="000000"/>
-              </a:solidFill>
+              <a:t> </a:t>
+            </a:r>
+            <a:endParaRPr lang="en-US" sz="1400" b="0" u="none" strike="noStrike">
+              <a:solidFill>
+                <a:srgbClr val="000000"/>
+              </a:solidFill>
+              <a:effectLst/>
+              <a:uFillTx/>
               <a:latin typeface="Times New Roman"/>
             </a:endParaRPr>
           </a:p>
@@ -4628,7 +5706,7 @@
       </p:sp>
       <p:sp>
         <p:nvSpPr>
-          <p:cNvPr id="37" name="PlaceHolder 3"/>
+          <p:cNvPr id="43" name="PlaceHolder 3"/>
           <p:cNvSpPr>
             <a:spLocks noGrp="1"/>
           </p:cNvSpPr>
@@ -4639,7 +5717,7 @@
         <p:spPr>
           <a:xfrm>
             <a:off x="8610480" y="6356520"/>
-            <a:ext cx="2742480" cy="364320"/>
+            <a:ext cx="2742120" cy="363960"/>
           </a:xfrm>
           <a:prstGeom prst="rect">
             <a:avLst/>
@@ -4650,7 +5728,7 @@
           </a:ln>
         </p:spPr>
         <p:txBody>
-          <a:bodyPr lIns="91440" rIns="91440" tIns="45720" bIns="45720" anchor="ctr">
+          <a:bodyPr lIns="91440" tIns="45720" rIns="91440" bIns="45720" anchor="ctr">
             <a:noAutofit/>
           </a:bodyPr>
           <a:lstStyle>
@@ -4660,14 +5738,16 @@
               </a:lnSpc>
               <a:buNone/>
               <a:tabLst>
-                <a:tab algn="l" pos="0"/>
+                <a:tab pos="0" algn="l"/>
               </a:tabLst>
-              <a:defRPr b="0" lang="en-US" sz="1200" spc="-1" strike="noStrike">
+              <a:defRPr lang="en-US" sz="1200" b="0" u="none" strike="noStrike">
                 <a:solidFill>
                   <a:schemeClr val="dk1">
                     <a:tint val="75000"/>
                   </a:schemeClr>
                 </a:solidFill>
+                <a:effectLst/>
+                <a:uFillTx/>
                 <a:latin typeface="Calibri"/>
               </a:defRPr>
             </a:lvl1pPr>
@@ -4679,24 +5759,28 @@
               </a:lnSpc>
               <a:buNone/>
               <a:tabLst>
-                <a:tab algn="l" pos="0"/>
+                <a:tab pos="0" algn="l"/>
               </a:tabLst>
             </a:pPr>
-            <a:fld id="{9BD6CB3A-A7F3-4A92-89E5-7C7AAE10A506}" type="slidenum">
-              <a:rPr b="0" lang="en-US" sz="1200" spc="-1" strike="noStrike">
+            <a:fld id="{A9F7193F-6DD9-4FBC-80C7-049541A4E545}" type="slidenum">
+              <a:rPr lang="en-US" sz="1200" b="0" u="none" strike="noStrike">
                 <a:solidFill>
                   <a:schemeClr val="dk1">
                     <a:tint val="75000"/>
                   </a:schemeClr>
                 </a:solidFill>
+                <a:effectLst/>
+                <a:uFillTx/>
                 <a:latin typeface="Calibri"/>
               </a:rPr>
-              <a:t>&lt;number&gt;</a:t>
+              <a:t>1</a:t>
             </a:fld>
-            <a:endParaRPr b="0" lang="en-US" sz="1200" spc="-1" strike="noStrike">
-              <a:solidFill>
-                <a:srgbClr val="000000"/>
-              </a:solidFill>
+            <a:endParaRPr lang="en-US" sz="1200" b="0" u="none" strike="noStrike">
+              <a:solidFill>
+                <a:srgbClr val="000000"/>
+              </a:solidFill>
+              <a:effectLst/>
+              <a:uFillTx/>
               <a:latin typeface="Times New Roman"/>
             </a:endParaRPr>
           </a:p>
@@ -4704,7 +5788,7 @@
       </p:sp>
       <p:sp>
         <p:nvSpPr>
-          <p:cNvPr id="38" name="PlaceHolder 4"/>
+          <p:cNvPr id="44" name="PlaceHolder 4"/>
           <p:cNvSpPr>
             <a:spLocks noGrp="1"/>
           </p:cNvSpPr>
@@ -4715,7 +5799,7 @@
         <p:spPr>
           <a:xfrm>
             <a:off x="838080" y="6356520"/>
-            <a:ext cx="2742480" cy="364320"/>
+            <a:ext cx="2742120" cy="363960"/>
           </a:xfrm>
           <a:prstGeom prst="rect">
             <a:avLst/>
@@ -4726,37 +5810,43 @@
           </a:ln>
         </p:spPr>
         <p:txBody>
-          <a:bodyPr lIns="91440" rIns="91440" tIns="45720" bIns="45720" anchor="ctr">
+          <a:bodyPr lIns="91440" tIns="45720" rIns="91440" bIns="45720" anchor="ctr">
             <a:noAutofit/>
           </a:bodyPr>
           <a:lstStyle>
-            <a:lvl1pPr indent="0">
+            <a:lvl1pPr indent="0" algn="l">
               <a:buNone/>
-              <a:defRPr b="0" lang="en-US" sz="1400" spc="-1" strike="noStrike">
+              <a:defRPr lang="en-US" sz="1400" b="0" u="none" strike="noStrike">
                 <a:solidFill>
                   <a:srgbClr val="000000"/>
                 </a:solidFill>
+                <a:effectLst/>
+                <a:uFillTx/>
                 <a:latin typeface="Times New Roman"/>
               </a:defRPr>
             </a:lvl1pPr>
           </a:lstStyle>
           <a:p>
-            <a:pPr indent="0">
+            <a:pPr indent="0" algn="l">
               <a:buNone/>
             </a:pPr>
             <a:r>
-              <a:rPr b="0" lang="en-US" sz="1400" spc="-1" strike="noStrike">
+              <a:rPr lang="en-US" sz="1400" b="0" u="none" strike="noStrike">
                 <a:solidFill>
                   <a:srgbClr val="000000"/>
                 </a:solidFill>
+                <a:effectLst/>
+                <a:uFillTx/>
                 <a:latin typeface="Times New Roman"/>
               </a:rPr>
-              <a:t>&lt;date/time&gt;</a:t>
-            </a:r>
-            <a:endParaRPr b="0" lang="en-US" sz="1400" spc="-1" strike="noStrike">
-              <a:solidFill>
-                <a:srgbClr val="000000"/>
-              </a:solidFill>
+              <a:t> </a:t>
+            </a:r>
+            <a:endParaRPr lang="en-US" sz="1400" b="0" u="none" strike="noStrike">
+              <a:solidFill>
+                <a:srgbClr val="000000"/>
+              </a:solidFill>
+              <a:effectLst/>
+              <a:uFillTx/>
               <a:latin typeface="Times New Roman"/>
             </a:endParaRPr>
           </a:p>
@@ -4764,7 +5854,7 @@
       </p:sp>
     </p:spTree>
   </p:cSld>
-  <p:clrMap bg1="lt1" bg2="lt2" tx1="dk1" tx2="dk2" accent1="accent1" accent2="accent2" accent3="accent3" accent4="accent4" accent5="accent5" accent6="accent6" hlink="hlink" folHlink="folHlink"/>
+  <p:clrMap bg1="lt1" tx1="dk1" bg2="lt2" tx2="dk2" accent1="accent1" accent2="accent2" accent3="accent3" accent4="accent4" accent5="accent5" accent6="accent6" hlink="hlink" folHlink="folHlink"/>
   <p:sldLayoutIdLst>
     <p:sldLayoutId id="2147483663" r:id="rId2"/>
   </p:sldLayoutIdLst>
@@ -4777,7 +5867,7 @@
     <p:bg>
       <p:bgPr>
         <a:solidFill>
-          <a:srgbClr val="ffffff"/>
+          <a:srgbClr val="FFFFFF"/>
         </a:solidFill>
       </p:bgPr>
     </p:bg>
@@ -4797,7 +5887,7 @@
       </p:grpSpPr>
       <p:sp>
         <p:nvSpPr>
-          <p:cNvPr id="40" name="PlaceHolder 1"/>
+          <p:cNvPr id="46" name="PlaceHolder 1"/>
           <p:cNvSpPr>
             <a:spLocks noGrp="1"/>
           </p:cNvSpPr>
@@ -4808,7 +5898,7 @@
         <p:spPr>
           <a:xfrm>
             <a:off x="4038480" y="6356520"/>
-            <a:ext cx="4114080" cy="364320"/>
+            <a:ext cx="4113720" cy="363960"/>
           </a:xfrm>
           <a:prstGeom prst="rect">
             <a:avLst/>
@@ -4819,7 +5909,7 @@
           </a:ln>
         </p:spPr>
         <p:txBody>
-          <a:bodyPr lIns="91440" rIns="91440" tIns="45720" bIns="45720" anchor="ctr">
+          <a:bodyPr lIns="91440" tIns="45720" rIns="91440" bIns="45720" anchor="ctr">
             <a:noAutofit/>
           </a:bodyPr>
           <a:lstStyle>
@@ -4829,12 +5919,14 @@
               </a:lnSpc>
               <a:buNone/>
               <a:tabLst>
-                <a:tab algn="l" pos="0"/>
+                <a:tab pos="0" algn="l"/>
               </a:tabLst>
-              <a:defRPr b="0" lang="en-US" sz="1400" spc="-1" strike="noStrike">
+              <a:defRPr lang="en-US" sz="1400" b="0" u="none" strike="noStrike">
                 <a:solidFill>
                   <a:srgbClr val="000000"/>
                 </a:solidFill>
+                <a:effectLst/>
+                <a:uFillTx/>
                 <a:latin typeface="Times New Roman"/>
               </a:defRPr>
             </a:lvl1pPr>
@@ -4846,22 +5938,26 @@
               </a:lnSpc>
               <a:buNone/>
               <a:tabLst>
-                <a:tab algn="l" pos="0"/>
+                <a:tab pos="0" algn="l"/>
               </a:tabLst>
             </a:pPr>
             <a:r>
-              <a:rPr b="0" lang="en-US" sz="1400" spc="-1" strike="noStrike">
+              <a:rPr lang="en-US" sz="1400" b="0" u="none" strike="noStrike">
                 <a:solidFill>
                   <a:srgbClr val="000000"/>
                 </a:solidFill>
+                <a:effectLst/>
+                <a:uFillTx/>
                 <a:latin typeface="Times New Roman"/>
               </a:rPr>
-              <a:t>&lt;footer&gt;</a:t>
-            </a:r>
-            <a:endParaRPr b="0" lang="en-US" sz="1400" spc="-1" strike="noStrike">
-              <a:solidFill>
-                <a:srgbClr val="000000"/>
-              </a:solidFill>
+              <a:t> </a:t>
+            </a:r>
+            <a:endParaRPr lang="en-US" sz="1400" b="0" u="none" strike="noStrike">
+              <a:solidFill>
+                <a:srgbClr val="000000"/>
+              </a:solidFill>
+              <a:effectLst/>
+              <a:uFillTx/>
               <a:latin typeface="Times New Roman"/>
             </a:endParaRPr>
           </a:p>
@@ -4869,7 +5965,7 @@
       </p:sp>
       <p:sp>
         <p:nvSpPr>
-          <p:cNvPr id="41" name="PlaceHolder 2"/>
+          <p:cNvPr id="47" name="PlaceHolder 2"/>
           <p:cNvSpPr>
             <a:spLocks noGrp="1"/>
           </p:cNvSpPr>
@@ -4880,7 +5976,7 @@
         <p:spPr>
           <a:xfrm>
             <a:off x="8610480" y="6356520"/>
-            <a:ext cx="2742480" cy="364320"/>
+            <a:ext cx="2742120" cy="363960"/>
           </a:xfrm>
           <a:prstGeom prst="rect">
             <a:avLst/>
@@ -4891,7 +5987,7 @@
           </a:ln>
         </p:spPr>
         <p:txBody>
-          <a:bodyPr lIns="91440" rIns="91440" tIns="45720" bIns="45720" anchor="ctr">
+          <a:bodyPr lIns="91440" tIns="45720" rIns="91440" bIns="45720" anchor="ctr">
             <a:noAutofit/>
           </a:bodyPr>
           <a:lstStyle>
@@ -4901,14 +5997,16 @@
               </a:lnSpc>
               <a:buNone/>
               <a:tabLst>
-                <a:tab algn="l" pos="0"/>
+                <a:tab pos="0" algn="l"/>
               </a:tabLst>
-              <a:defRPr b="0" lang="en-US" sz="1200" spc="-1" strike="noStrike">
+              <a:defRPr lang="en-US" sz="1200" b="0" u="none" strike="noStrike">
                 <a:solidFill>
                   <a:schemeClr val="dk1">
                     <a:tint val="75000"/>
                   </a:schemeClr>
                 </a:solidFill>
+                <a:effectLst/>
+                <a:uFillTx/>
                 <a:latin typeface="Calibri"/>
               </a:defRPr>
             </a:lvl1pPr>
@@ -4920,24 +6018,28 @@
               </a:lnSpc>
               <a:buNone/>
               <a:tabLst>
-                <a:tab algn="l" pos="0"/>
+                <a:tab pos="0" algn="l"/>
               </a:tabLst>
             </a:pPr>
-            <a:fld id="{9F6E159A-7C30-4874-A352-78A8AF40E95D}" type="slidenum">
-              <a:rPr b="0" lang="en-US" sz="1200" spc="-1" strike="noStrike">
+            <a:fld id="{F4C77F4C-F2E1-47AB-BA56-354C9274FE0D}" type="slidenum">
+              <a:rPr lang="en-US" sz="1200" b="0" u="none" strike="noStrike">
                 <a:solidFill>
                   <a:schemeClr val="dk1">
                     <a:tint val="75000"/>
                   </a:schemeClr>
                 </a:solidFill>
+                <a:effectLst/>
+                <a:uFillTx/>
                 <a:latin typeface="Calibri"/>
               </a:rPr>
-              <a:t>&lt;number&gt;</a:t>
+              <a:t>1</a:t>
             </a:fld>
-            <a:endParaRPr b="0" lang="en-US" sz="1200" spc="-1" strike="noStrike">
-              <a:solidFill>
-                <a:srgbClr val="000000"/>
-              </a:solidFill>
+            <a:endParaRPr lang="en-US" sz="1200" b="0" u="none" strike="noStrike">
+              <a:solidFill>
+                <a:srgbClr val="000000"/>
+              </a:solidFill>
+              <a:effectLst/>
+              <a:uFillTx/>
               <a:latin typeface="Times New Roman"/>
             </a:endParaRPr>
           </a:p>
@@ -4945,7 +6047,7 @@
       </p:sp>
       <p:sp>
         <p:nvSpPr>
-          <p:cNvPr id="42" name="PlaceHolder 3"/>
+          <p:cNvPr id="48" name="PlaceHolder 3"/>
           <p:cNvSpPr>
             <a:spLocks noGrp="1"/>
           </p:cNvSpPr>
@@ -4956,7 +6058,7 @@
         <p:spPr>
           <a:xfrm>
             <a:off x="838080" y="6356520"/>
-            <a:ext cx="2742480" cy="364320"/>
+            <a:ext cx="2742120" cy="363960"/>
           </a:xfrm>
           <a:prstGeom prst="rect">
             <a:avLst/>
@@ -4967,37 +6069,43 @@
           </a:ln>
         </p:spPr>
         <p:txBody>
-          <a:bodyPr lIns="91440" rIns="91440" tIns="45720" bIns="45720" anchor="ctr">
+          <a:bodyPr lIns="91440" tIns="45720" rIns="91440" bIns="45720" anchor="ctr">
             <a:noAutofit/>
           </a:bodyPr>
           <a:lstStyle>
-            <a:lvl1pPr indent="0">
+            <a:lvl1pPr indent="0" algn="l">
               <a:buNone/>
-              <a:defRPr b="0" lang="en-US" sz="1400" spc="-1" strike="noStrike">
+              <a:defRPr lang="en-US" sz="1400" b="0" u="none" strike="noStrike">
                 <a:solidFill>
                   <a:srgbClr val="000000"/>
                 </a:solidFill>
+                <a:effectLst/>
+                <a:uFillTx/>
                 <a:latin typeface="Times New Roman"/>
               </a:defRPr>
             </a:lvl1pPr>
           </a:lstStyle>
           <a:p>
-            <a:pPr indent="0">
+            <a:pPr indent="0" algn="l">
               <a:buNone/>
             </a:pPr>
             <a:r>
-              <a:rPr b="0" lang="en-US" sz="1400" spc="-1" strike="noStrike">
+              <a:rPr lang="en-US" sz="1400" b="0" u="none" strike="noStrike">
                 <a:solidFill>
                   <a:srgbClr val="000000"/>
                 </a:solidFill>
+                <a:effectLst/>
+                <a:uFillTx/>
                 <a:latin typeface="Times New Roman"/>
               </a:rPr>
-              <a:t>&lt;date/time&gt;</a:t>
-            </a:r>
-            <a:endParaRPr b="0" lang="en-US" sz="1400" spc="-1" strike="noStrike">
-              <a:solidFill>
-                <a:srgbClr val="000000"/>
-              </a:solidFill>
+              <a:t> </a:t>
+            </a:r>
+            <a:endParaRPr lang="en-US" sz="1400" b="0" u="none" strike="noStrike">
+              <a:solidFill>
+                <a:srgbClr val="000000"/>
+              </a:solidFill>
+              <a:effectLst/>
+              <a:uFillTx/>
               <a:latin typeface="Times New Roman"/>
             </a:endParaRPr>
           </a:p>
@@ -5005,7 +6113,7 @@
       </p:sp>
     </p:spTree>
   </p:cSld>
-  <p:clrMap bg1="lt1" bg2="lt2" tx1="dk1" tx2="dk2" accent1="accent1" accent2="accent2" accent3="accent3" accent4="accent4" accent5="accent5" accent6="accent6" hlink="hlink" folHlink="folHlink"/>
+  <p:clrMap bg1="lt1" tx1="dk1" bg2="lt2" tx2="dk2" accent1="accent1" accent2="accent2" accent3="accent3" accent4="accent4" accent5="accent5" accent6="accent6" hlink="hlink" folHlink="folHlink"/>
   <p:sldLayoutIdLst>
     <p:sldLayoutId id="2147483665" r:id="rId2"/>
   </p:sldLayoutIdLst>
@@ -5031,7 +6139,7 @@
       </p:grpSpPr>
       <p:pic>
         <p:nvPicPr>
-          <p:cNvPr id="49" name="Picture 3" descr=""/>
+          <p:cNvPr id="55" name="Picture 3"/>
           <p:cNvPicPr/>
           <p:nvPr/>
         </p:nvPicPr>
@@ -5042,11 +6150,12 @@
         <p:spPr>
           <a:xfrm>
             <a:off x="2552760" y="1047600"/>
-            <a:ext cx="7085880" cy="4761720"/>
+            <a:ext cx="7085520" cy="4761360"/>
           </a:xfrm>
           <a:prstGeom prst="rect">
             <a:avLst/>
           </a:prstGeom>
+          <a:noFill/>
           <a:ln w="0">
             <a:noFill/>
           </a:ln>
@@ -5054,14 +6163,14 @@
       </p:pic>
       <p:sp>
         <p:nvSpPr>
-          <p:cNvPr id="50" name="TextBox 4"/>
+          <p:cNvPr id="56" name="TextBox 4"/>
           <p:cNvSpPr/>
           <p:nvPr/>
         </p:nvSpPr>
         <p:spPr>
           <a:xfrm>
-            <a:off x="9693720" y="4667040"/>
-            <a:ext cx="1671480" cy="638280"/>
+            <a:off x="9996120" y="4667040"/>
+            <a:ext cx="1069200" cy="638280"/>
           </a:xfrm>
           <a:prstGeom prst="rect">
             <a:avLst/>
@@ -5078,7 +6187,7 @@
           <a:fontRef idx="minor"/>
         </p:style>
         <p:txBody>
-          <a:bodyPr wrap="none" lIns="90000" rIns="90000" tIns="45000" bIns="45000" anchor="t">
+          <a:bodyPr wrap="none" lIns="90000" tIns="45000" rIns="90000" bIns="45000" anchor="t">
             <a:spAutoFit/>
           </a:bodyPr>
           <a:p>
@@ -5088,18 +6197,22 @@
               </a:lnSpc>
             </a:pPr>
             <a:r>
-              <a:rPr b="0" lang="en-US" sz="1800" spc="-1" strike="noStrike">
+              <a:rPr lang="en-US" sz="1800" b="0" u="none" strike="noStrike">
                 <a:solidFill>
                   <a:schemeClr val="dk1"/>
                 </a:solidFill>
+                <a:effectLst/>
+                <a:uFillTx/>
                 <a:latin typeface="Calibri"/>
               </a:rPr>
-              <a:t>Disable Robot</a:t>
-            </a:r>
-            <a:endParaRPr b="0" lang="en-US" sz="1800" spc="-1" strike="noStrike">
-              <a:solidFill>
-                <a:srgbClr val="000000"/>
-              </a:solidFill>
+              <a:t>Autoalign</a:t>
+            </a:r>
+            <a:endParaRPr lang="en-US" sz="1800" b="0" u="none" strike="noStrike">
+              <a:solidFill>
+                <a:srgbClr val="000000"/>
+              </a:solidFill>
+              <a:effectLst/>
+              <a:uFillTx/>
               <a:latin typeface="Arial"/>
             </a:endParaRPr>
           </a:p>
@@ -5109,19 +6222,12 @@
                 <a:spcPct val="100000"/>
               </a:lnSpc>
             </a:pPr>
-            <a:r>
-              <a:rPr b="0" lang="en-US" sz="1800" spc="-1" strike="noStrike">
-                <a:solidFill>
-                  <a:schemeClr val="dk1"/>
-                </a:solidFill>
-                <a:latin typeface="Calibri"/>
-              </a:rPr>
-              <a:t>Turning</a:t>
-            </a:r>
-            <a:endParaRPr b="0" lang="en-US" sz="1800" spc="-1" strike="noStrike">
-              <a:solidFill>
-                <a:srgbClr val="000000"/>
-              </a:solidFill>
+            <a:endParaRPr lang="en-US" sz="1800" b="0" u="none" strike="noStrike">
+              <a:solidFill>
+                <a:srgbClr val="000000"/>
+              </a:solidFill>
+              <a:effectLst/>
+              <a:uFillTx/>
               <a:latin typeface="Arial"/>
             </a:endParaRPr>
           </a:p>
@@ -5129,14 +6235,14 @@
       </p:sp>
       <p:sp>
         <p:nvSpPr>
-          <p:cNvPr id="51" name="TextBox 5"/>
+          <p:cNvPr id="57" name="TextBox 5"/>
           <p:cNvSpPr/>
           <p:nvPr/>
         </p:nvSpPr>
         <p:spPr>
           <a:xfrm>
             <a:off x="9228240" y="5330880"/>
-            <a:ext cx="797040" cy="363960"/>
+            <a:ext cx="1100880" cy="363960"/>
           </a:xfrm>
           <a:prstGeom prst="rect">
             <a:avLst/>
@@ -5153,7 +6259,7 @@
           <a:fontRef idx="minor"/>
         </p:style>
         <p:txBody>
-          <a:bodyPr wrap="none" lIns="90000" rIns="90000" tIns="45000" bIns="45000" anchor="t">
+          <a:bodyPr wrap="none" lIns="90000" tIns="45000" rIns="90000" bIns="45000" anchor="t">
             <a:spAutoFit/>
           </a:bodyPr>
           <a:p>
@@ -5163,18 +6269,22 @@
               </a:lnSpc>
             </a:pPr>
             <a:r>
-              <a:rPr b="0" lang="en-US" sz="1800" spc="-1" strike="noStrike">
+              <a:rPr lang="en-US" sz="1800" b="0" u="none" strike="noStrike">
                 <a:solidFill>
                   <a:schemeClr val="dk1"/>
                 </a:solidFill>
+                <a:effectLst/>
+                <a:uFillTx/>
                 <a:latin typeface="Calibri"/>
               </a:rPr>
-              <a:t>Brake</a:t>
-            </a:r>
-            <a:endParaRPr b="0" lang="en-US" sz="1800" spc="-1" strike="noStrike">
-              <a:solidFill>
-                <a:srgbClr val="000000"/>
-              </a:solidFill>
+              <a:t>X position</a:t>
+            </a:r>
+            <a:endParaRPr lang="en-US" sz="1800" b="0" u="none" strike="noStrike">
+              <a:solidFill>
+                <a:srgbClr val="000000"/>
+              </a:solidFill>
+              <a:effectLst/>
+              <a:uFillTx/>
               <a:latin typeface="Arial"/>
             </a:endParaRPr>
           </a:p>
@@ -5182,14 +6292,14 @@
       </p:sp>
       <p:sp>
         <p:nvSpPr>
-          <p:cNvPr id="52" name="TextBox 6"/>
+          <p:cNvPr id="58" name="TextBox 6"/>
           <p:cNvSpPr/>
           <p:nvPr/>
         </p:nvSpPr>
         <p:spPr>
           <a:xfrm>
             <a:off x="9352440" y="2372400"/>
-            <a:ext cx="1711440" cy="363960"/>
+            <a:ext cx="540360" cy="363960"/>
           </a:xfrm>
           <a:prstGeom prst="rect">
             <a:avLst/>
@@ -5206,7 +6316,7 @@
           <a:fontRef idx="minor"/>
         </p:style>
         <p:txBody>
-          <a:bodyPr wrap="none" lIns="90000" rIns="90000" tIns="45000" bIns="45000" anchor="t">
+          <a:bodyPr wrap="none" lIns="90000" tIns="45000" rIns="90000" bIns="45000" anchor="t">
             <a:spAutoFit/>
           </a:bodyPr>
           <a:p>
@@ -5216,18 +6326,22 @@
               </a:lnSpc>
             </a:pPr>
             <a:r>
-              <a:rPr b="0" lang="en-US" sz="1800" spc="-1" strike="noStrike">
+              <a:rPr lang="en-US" sz="1800" b="0" u="none" strike="noStrike">
                 <a:solidFill>
                   <a:schemeClr val="dk1"/>
                 </a:solidFill>
+                <a:effectLst/>
+                <a:uFillTx/>
                 <a:latin typeface="Calibri"/>
               </a:rPr>
-              <a:t>Deploy Breaks</a:t>
-            </a:r>
-            <a:endParaRPr b="0" lang="en-US" sz="1800" spc="-1" strike="noStrike">
-              <a:solidFill>
-                <a:srgbClr val="000000"/>
-              </a:solidFill>
+              <a:t>N/A</a:t>
+            </a:r>
+            <a:endParaRPr lang="en-US" sz="1800" b="0" u="none" strike="noStrike">
+              <a:solidFill>
+                <a:srgbClr val="000000"/>
+              </a:solidFill>
+              <a:effectLst/>
+              <a:uFillTx/>
               <a:latin typeface="Arial"/>
             </a:endParaRPr>
           </a:p>
@@ -5235,14 +6349,14 @@
       </p:sp>
       <p:sp>
         <p:nvSpPr>
-          <p:cNvPr id="53" name="TextBox 7"/>
+          <p:cNvPr id="59" name="TextBox 7"/>
           <p:cNvSpPr/>
           <p:nvPr/>
         </p:nvSpPr>
         <p:spPr>
           <a:xfrm>
             <a:off x="9175680" y="1431720"/>
-            <a:ext cx="1447560" cy="363960"/>
+            <a:ext cx="540360" cy="363960"/>
           </a:xfrm>
           <a:prstGeom prst="rect">
             <a:avLst/>
@@ -5259,7 +6373,7 @@
           <a:fontRef idx="minor"/>
         </p:style>
         <p:txBody>
-          <a:bodyPr wrap="none" lIns="90000" rIns="90000" tIns="45000" bIns="45000" anchor="t">
+          <a:bodyPr wrap="none" lIns="90000" tIns="45000" rIns="90000" bIns="45000" anchor="t">
             <a:spAutoFit/>
           </a:bodyPr>
           <a:p>
@@ -5269,18 +6383,22 @@
               </a:lnSpc>
             </a:pPr>
             <a:r>
-              <a:rPr b="0" lang="en-US" sz="1800" spc="-1" strike="noStrike">
+              <a:rPr lang="en-US" sz="1800" b="0" u="none" strike="noStrike">
                 <a:solidFill>
                   <a:schemeClr val="dk1"/>
                 </a:solidFill>
+                <a:effectLst/>
+                <a:uFillTx/>
                 <a:latin typeface="Calibri"/>
               </a:rPr>
-              <a:t>Raise Robot</a:t>
-            </a:r>
-            <a:endParaRPr b="0" lang="en-US" sz="1800" spc="-1" strike="noStrike">
-              <a:solidFill>
-                <a:srgbClr val="000000"/>
-              </a:solidFill>
+              <a:t>N/A</a:t>
+            </a:r>
+            <a:endParaRPr lang="en-US" sz="1800" b="0" u="none" strike="noStrike">
+              <a:solidFill>
+                <a:srgbClr val="000000"/>
+              </a:solidFill>
+              <a:effectLst/>
+              <a:uFillTx/>
               <a:latin typeface="Arial"/>
             </a:endParaRPr>
           </a:p>
@@ -5288,14 +6406,14 @@
       </p:sp>
       <p:sp>
         <p:nvSpPr>
-          <p:cNvPr id="54" name="TextBox 8"/>
+          <p:cNvPr id="60" name="TextBox 8"/>
           <p:cNvSpPr/>
           <p:nvPr/>
         </p:nvSpPr>
         <p:spPr>
           <a:xfrm>
             <a:off x="8836200" y="583200"/>
-            <a:ext cx="2480760" cy="363960"/>
+            <a:ext cx="1450440" cy="363960"/>
           </a:xfrm>
           <a:prstGeom prst="rect">
             <a:avLst/>
@@ -5312,7 +6430,7 @@
           <a:fontRef idx="minor"/>
         </p:style>
         <p:txBody>
-          <a:bodyPr wrap="none" lIns="90000" rIns="90000" tIns="45000" bIns="45000" anchor="t">
+          <a:bodyPr wrap="none" lIns="90000" tIns="45000" rIns="90000" bIns="45000" anchor="t">
             <a:spAutoFit/>
           </a:bodyPr>
           <a:p>
@@ -5322,18 +6440,22 @@
               </a:lnSpc>
             </a:pPr>
             <a:r>
-              <a:rPr b="0" lang="en-US" sz="1800" spc="-1" strike="noStrike">
+              <a:rPr lang="en-US" sz="1800" b="0" u="none" strike="noStrike">
                 <a:solidFill>
                   <a:schemeClr val="dk1"/>
                 </a:solidFill>
+                <a:effectLst/>
+                <a:uFillTx/>
                 <a:latin typeface="Calibri"/>
               </a:rPr>
-              <a:t>Move Gear Sled Right</a:t>
-            </a:r>
-            <a:endParaRPr b="0" lang="en-US" sz="1800" spc="-1" strike="noStrike">
-              <a:solidFill>
-                <a:srgbClr val="000000"/>
-              </a:solidFill>
+              <a:t>Deploy Intake</a:t>
+            </a:r>
+            <a:endParaRPr lang="en-US" sz="1800" b="0" u="none" strike="noStrike">
+              <a:solidFill>
+                <a:srgbClr val="000000"/>
+              </a:solidFill>
+              <a:effectLst/>
+              <a:uFillTx/>
               <a:latin typeface="Arial"/>
             </a:endParaRPr>
           </a:p>
@@ -5341,14 +6463,14 @@
       </p:sp>
       <p:sp>
         <p:nvSpPr>
-          <p:cNvPr id="55" name="TextBox 9"/>
+          <p:cNvPr id="61" name="TextBox 9"/>
           <p:cNvSpPr/>
           <p:nvPr/>
         </p:nvSpPr>
         <p:spPr>
           <a:xfrm>
             <a:off x="1712160" y="583200"/>
-            <a:ext cx="2325600" cy="363960"/>
+            <a:ext cx="1467720" cy="363960"/>
           </a:xfrm>
           <a:prstGeom prst="rect">
             <a:avLst/>
@@ -5365,7 +6487,7 @@
           <a:fontRef idx="minor"/>
         </p:style>
         <p:txBody>
-          <a:bodyPr wrap="none" lIns="90000" rIns="90000" tIns="45000" bIns="45000" anchor="t">
+          <a:bodyPr wrap="none" lIns="90000" tIns="45000" rIns="90000" bIns="45000" anchor="t">
             <a:spAutoFit/>
           </a:bodyPr>
           <a:p>
@@ -5375,18 +6497,22 @@
               </a:lnSpc>
             </a:pPr>
             <a:r>
-              <a:rPr b="0" lang="en-US" sz="1800" spc="-1" strike="noStrike">
+              <a:rPr lang="en-US" sz="1800" b="0" u="none" strike="noStrike">
                 <a:solidFill>
                   <a:schemeClr val="dk1"/>
                 </a:solidFill>
+                <a:effectLst/>
+                <a:uFillTx/>
                 <a:latin typeface="Calibri"/>
               </a:rPr>
-              <a:t>Move Gear Sled Left</a:t>
-            </a:r>
-            <a:endParaRPr b="0" lang="en-US" sz="1800" spc="-1" strike="noStrike">
-              <a:solidFill>
-                <a:srgbClr val="000000"/>
-              </a:solidFill>
+              <a:t>Retract Intake</a:t>
+            </a:r>
+            <a:endParaRPr lang="en-US" sz="1800" b="0" u="none" strike="noStrike">
+              <a:solidFill>
+                <a:srgbClr val="000000"/>
+              </a:solidFill>
+              <a:effectLst/>
+              <a:uFillTx/>
               <a:latin typeface="Arial"/>
             </a:endParaRPr>
           </a:p>
@@ -5394,14 +6520,14 @@
       </p:sp>
       <p:sp>
         <p:nvSpPr>
-          <p:cNvPr id="56" name="TextBox 10"/>
+          <p:cNvPr id="62" name="TextBox 10"/>
           <p:cNvSpPr/>
           <p:nvPr/>
         </p:nvSpPr>
         <p:spPr>
           <a:xfrm>
             <a:off x="1236600" y="1166760"/>
-            <a:ext cx="1537560" cy="363960"/>
+            <a:ext cx="540360" cy="363960"/>
           </a:xfrm>
           <a:prstGeom prst="rect">
             <a:avLst/>
@@ -5418,7 +6544,7 @@
           <a:fontRef idx="minor"/>
         </p:style>
         <p:txBody>
-          <a:bodyPr wrap="none" lIns="90000" rIns="90000" tIns="45000" bIns="45000" anchor="t">
+          <a:bodyPr wrap="none" lIns="90000" tIns="45000" rIns="90000" bIns="45000" anchor="t">
             <a:spAutoFit/>
           </a:bodyPr>
           <a:p>
@@ -5428,18 +6554,22 @@
               </a:lnSpc>
             </a:pPr>
             <a:r>
-              <a:rPr b="0" lang="en-US" sz="1800" spc="-1" strike="noStrike">
+              <a:rPr lang="en-US" sz="1800" b="0" u="none" strike="noStrike">
                 <a:solidFill>
                   <a:schemeClr val="dk1"/>
                 </a:solidFill>
+                <a:effectLst/>
+                <a:uFillTx/>
                 <a:latin typeface="Calibri"/>
               </a:rPr>
-              <a:t>Lower Robot</a:t>
-            </a:r>
-            <a:endParaRPr b="0" lang="en-US" sz="1800" spc="-1" strike="noStrike">
-              <a:solidFill>
-                <a:srgbClr val="000000"/>
-              </a:solidFill>
+              <a:t>N/A</a:t>
+            </a:r>
+            <a:endParaRPr lang="en-US" sz="1800" b="0" u="none" strike="noStrike">
+              <a:solidFill>
+                <a:srgbClr val="000000"/>
+              </a:solidFill>
+              <a:effectLst/>
+              <a:uFillTx/>
               <a:latin typeface="Arial"/>
             </a:endParaRPr>
           </a:p>
@@ -5447,14 +6577,14 @@
       </p:sp>
       <p:sp>
         <p:nvSpPr>
-          <p:cNvPr id="57" name="TextBox 12"/>
+          <p:cNvPr id="63" name="TextBox 12"/>
           <p:cNvSpPr/>
           <p:nvPr/>
         </p:nvSpPr>
         <p:spPr>
           <a:xfrm>
             <a:off x="1011960" y="3218400"/>
-            <a:ext cx="1311840" cy="363960"/>
+            <a:ext cx="1153440" cy="363960"/>
           </a:xfrm>
           <a:prstGeom prst="rect">
             <a:avLst/>
@@ -5471,7 +6601,7 @@
           <a:fontRef idx="minor"/>
         </p:style>
         <p:txBody>
-          <a:bodyPr wrap="none" lIns="90000" rIns="90000" tIns="45000" bIns="45000" anchor="t">
+          <a:bodyPr wrap="none" lIns="90000" tIns="45000" rIns="90000" bIns="45000" anchor="t">
             <a:spAutoFit/>
           </a:bodyPr>
           <a:p>
@@ -5481,18 +6611,22 @@
               </a:lnSpc>
             </a:pPr>
             <a:r>
-              <a:rPr b="0" lang="en-US" sz="1800" spc="-1" strike="noStrike">
+              <a:rPr lang="en-US" sz="1800" b="0" u="none" strike="noStrike">
                 <a:solidFill>
                   <a:schemeClr val="dk1"/>
                 </a:solidFill>
+                <a:effectLst/>
+                <a:uFillTx/>
                 <a:latin typeface="Calibri"/>
               </a:rPr>
               <a:t>Drive Back</a:t>
             </a:r>
-            <a:endParaRPr b="0" lang="en-US" sz="1800" spc="-1" strike="noStrike">
-              <a:solidFill>
-                <a:srgbClr val="000000"/>
-              </a:solidFill>
+            <a:endParaRPr lang="en-US" sz="1800" b="0" u="none" strike="noStrike">
+              <a:solidFill>
+                <a:srgbClr val="000000"/>
+              </a:solidFill>
+              <a:effectLst/>
+              <a:uFillTx/>
               <a:latin typeface="Arial"/>
             </a:endParaRPr>
           </a:p>
@@ -5500,14 +6634,14 @@
       </p:sp>
       <p:sp>
         <p:nvSpPr>
-          <p:cNvPr id="58" name="TextBox 13"/>
+          <p:cNvPr id="64" name="TextBox 13"/>
           <p:cNvSpPr/>
           <p:nvPr/>
         </p:nvSpPr>
         <p:spPr>
           <a:xfrm>
             <a:off x="5194080" y="5715360"/>
-            <a:ext cx="1141200" cy="363960"/>
+            <a:ext cx="1140840" cy="363600"/>
           </a:xfrm>
           <a:prstGeom prst="rect">
             <a:avLst/>
@@ -5524,7 +6658,7 @@
           <a:fontRef idx="minor"/>
         </p:style>
         <p:txBody>
-          <a:bodyPr wrap="none" lIns="90000" rIns="90000" tIns="45000" bIns="45000" anchor="t">
+          <a:bodyPr wrap="none" lIns="90000" tIns="45000" rIns="90000" bIns="45000" anchor="t">
             <a:spAutoFit/>
           </a:bodyPr>
           <a:p>
@@ -5534,18 +6668,22 @@
               </a:lnSpc>
             </a:pPr>
             <a:r>
-              <a:rPr b="0" lang="en-US" sz="1800" spc="-1" strike="noStrike">
+              <a:rPr lang="en-US" sz="1800" b="0" u="none" strike="noStrike">
                 <a:solidFill>
                   <a:schemeClr val="dk1"/>
                 </a:solidFill>
+                <a:effectLst/>
+                <a:uFillTx/>
                 <a:latin typeface="Calibri"/>
               </a:rPr>
               <a:t>Turn Left</a:t>
             </a:r>
-            <a:endParaRPr b="0" lang="en-US" sz="1800" spc="-1" strike="noStrike">
-              <a:solidFill>
-                <a:srgbClr val="000000"/>
-              </a:solidFill>
+            <a:endParaRPr lang="en-US" sz="1800" b="0" u="none" strike="noStrike">
+              <a:solidFill>
+                <a:srgbClr val="000000"/>
+              </a:solidFill>
+              <a:effectLst/>
+              <a:uFillTx/>
               <a:latin typeface="Arial"/>
             </a:endParaRPr>
           </a:p>
@@ -5553,14 +6691,14 @@
       </p:sp>
       <p:sp>
         <p:nvSpPr>
-          <p:cNvPr id="59" name="Quad Arrow 14"/>
+          <p:cNvPr id="65" name="Quad Arrow 14"/>
           <p:cNvSpPr/>
           <p:nvPr/>
         </p:nvSpPr>
         <p:spPr>
           <a:xfrm>
             <a:off x="1215360" y="2315880"/>
-            <a:ext cx="905400" cy="901800"/>
+            <a:ext cx="905040" cy="901440"/>
           </a:xfrm>
           <a:prstGeom prst="quadArrow">
             <a:avLst>
@@ -5570,11 +6708,11 @@
             </a:avLst>
           </a:prstGeom>
           <a:solidFill>
-            <a:srgbClr val="5b9bd5"/>
+            <a:srgbClr val="5B9BD5"/>
           </a:solidFill>
           <a:ln>
             <a:solidFill>
-              <a:srgbClr val="43729d"/>
+              <a:srgbClr val="43729D"/>
             </a:solidFill>
           </a:ln>
         </p:spPr>
@@ -5593,19 +6731,16 @@
           <a:fontRef idx="minor"/>
         </p:style>
         <p:txBody>
-          <a:bodyPr lIns="90000" rIns="90000" tIns="45000" bIns="45000" anchor="ctr">
+          <a:bodyPr lIns="90000" tIns="45000" rIns="90000" bIns="45000" anchor="ctr">
             <a:noAutofit/>
           </a:bodyPr>
           <a:p>
-            <a:pPr algn="ctr" defTabSz="914400">
-              <a:lnSpc>
-                <a:spcPct val="100000"/>
-              </a:lnSpc>
-            </a:pPr>
-            <a:endParaRPr b="0" lang="en-US" sz="1800" spc="-1" strike="noStrike">
+            <a:endParaRPr lang="en-US" sz="1800" b="0" u="none" strike="noStrike">
               <a:solidFill>
                 <a:schemeClr val="lt1"/>
               </a:solidFill>
+              <a:effectLst/>
+              <a:uFillTx/>
               <a:latin typeface="Calibri"/>
             </a:endParaRPr>
           </a:p>
@@ -5613,14 +6748,14 @@
       </p:sp>
       <p:sp>
         <p:nvSpPr>
-          <p:cNvPr id="60" name="Quad Arrow 15"/>
+          <p:cNvPr id="66" name="Quad Arrow 15"/>
           <p:cNvSpPr/>
           <p:nvPr/>
         </p:nvSpPr>
         <p:spPr>
           <a:xfrm>
             <a:off x="6329880" y="5256720"/>
-            <a:ext cx="1317600" cy="1297080"/>
+            <a:ext cx="1317240" cy="1296720"/>
           </a:xfrm>
           <a:prstGeom prst="quadArrow">
             <a:avLst>
@@ -5630,11 +6765,11 @@
             </a:avLst>
           </a:prstGeom>
           <a:solidFill>
-            <a:srgbClr val="5b9bd5"/>
+            <a:srgbClr val="5B9BD5"/>
           </a:solidFill>
           <a:ln>
             <a:solidFill>
-              <a:srgbClr val="43729d"/>
+              <a:srgbClr val="43729D"/>
             </a:solidFill>
           </a:ln>
         </p:spPr>
@@ -5653,19 +6788,16 @@
           <a:fontRef idx="minor"/>
         </p:style>
         <p:txBody>
-          <a:bodyPr lIns="90000" rIns="90000" tIns="45000" bIns="45000" anchor="ctr">
+          <a:bodyPr lIns="90000" tIns="45000" rIns="90000" bIns="45000" anchor="ctr">
             <a:noAutofit/>
           </a:bodyPr>
           <a:p>
-            <a:pPr algn="ctr" defTabSz="914400">
-              <a:lnSpc>
-                <a:spcPct val="100000"/>
-              </a:lnSpc>
-            </a:pPr>
-            <a:endParaRPr b="0" lang="en-US" sz="1800" spc="-1" strike="noStrike">
+            <a:endParaRPr lang="en-US" sz="1800" b="0" u="none" strike="noStrike">
               <a:solidFill>
                 <a:schemeClr val="lt1"/>
               </a:solidFill>
+              <a:effectLst/>
+              <a:uFillTx/>
               <a:latin typeface="Calibri"/>
             </a:endParaRPr>
           </a:p>
@@ -5673,14 +6805,14 @@
       </p:sp>
       <p:sp>
         <p:nvSpPr>
-          <p:cNvPr id="61" name="TextBox 16"/>
+          <p:cNvPr id="67" name="TextBox 16"/>
           <p:cNvSpPr/>
           <p:nvPr/>
         </p:nvSpPr>
         <p:spPr>
           <a:xfrm>
             <a:off x="891720" y="1913400"/>
-            <a:ext cx="1693080" cy="363960"/>
+            <a:ext cx="1489320" cy="363960"/>
           </a:xfrm>
           <a:prstGeom prst="rect">
             <a:avLst/>
@@ -5697,7 +6829,7 @@
           <a:fontRef idx="minor"/>
         </p:style>
         <p:txBody>
-          <a:bodyPr wrap="none" lIns="90000" rIns="90000" tIns="45000" bIns="45000" anchor="t">
+          <a:bodyPr wrap="none" lIns="90000" tIns="45000" rIns="90000" bIns="45000" anchor="t">
             <a:spAutoFit/>
           </a:bodyPr>
           <a:p>
@@ -5707,18 +6839,22 @@
               </a:lnSpc>
             </a:pPr>
             <a:r>
-              <a:rPr b="0" lang="en-US" sz="1800" spc="-1" strike="noStrike">
+              <a:rPr lang="en-US" sz="1800" b="0" u="none" strike="noStrike">
                 <a:solidFill>
                   <a:schemeClr val="dk1"/>
                 </a:solidFill>
+                <a:effectLst/>
+                <a:uFillTx/>
                 <a:latin typeface="Calibri"/>
               </a:rPr>
               <a:t>Drive Forward</a:t>
             </a:r>
-            <a:endParaRPr b="0" lang="en-US" sz="1800" spc="-1" strike="noStrike">
-              <a:solidFill>
-                <a:srgbClr val="000000"/>
-              </a:solidFill>
+            <a:endParaRPr lang="en-US" sz="1800" b="0" u="none" strike="noStrike">
+              <a:solidFill>
+                <a:srgbClr val="000000"/>
+              </a:solidFill>
+              <a:effectLst/>
+              <a:uFillTx/>
               <a:latin typeface="Arial"/>
             </a:endParaRPr>
           </a:p>
@@ -5726,14 +6862,14 @@
       </p:sp>
       <p:sp>
         <p:nvSpPr>
-          <p:cNvPr id="62" name="TextBox 17"/>
+          <p:cNvPr id="68" name="TextBox 17"/>
           <p:cNvSpPr/>
           <p:nvPr/>
         </p:nvSpPr>
         <p:spPr>
           <a:xfrm>
             <a:off x="2160" y="2532600"/>
-            <a:ext cx="1281600" cy="363960"/>
+            <a:ext cx="1122480" cy="363960"/>
           </a:xfrm>
           <a:prstGeom prst="rect">
             <a:avLst/>
@@ -5750,7 +6886,7 @@
           <a:fontRef idx="minor"/>
         </p:style>
         <p:txBody>
-          <a:bodyPr wrap="none" lIns="90000" rIns="90000" tIns="45000" bIns="45000" anchor="t">
+          <a:bodyPr wrap="none" lIns="90000" tIns="45000" rIns="90000" bIns="45000" anchor="t">
             <a:spAutoFit/>
           </a:bodyPr>
           <a:p>
@@ -5760,18 +6896,22 @@
               </a:lnSpc>
             </a:pPr>
             <a:r>
-              <a:rPr b="0" lang="en-US" sz="1800" spc="-1" strike="noStrike">
+              <a:rPr lang="en-US" sz="1800" b="0" u="none" strike="noStrike">
                 <a:solidFill>
                   <a:schemeClr val="dk1"/>
                 </a:solidFill>
+                <a:effectLst/>
+                <a:uFillTx/>
                 <a:latin typeface="Calibri"/>
               </a:rPr>
               <a:t>Strafe Left</a:t>
             </a:r>
-            <a:endParaRPr b="0" lang="en-US" sz="1800" spc="-1" strike="noStrike">
-              <a:solidFill>
-                <a:srgbClr val="000000"/>
-              </a:solidFill>
+            <a:endParaRPr lang="en-US" sz="1800" b="0" u="none" strike="noStrike">
+              <a:solidFill>
+                <a:srgbClr val="000000"/>
+              </a:solidFill>
+              <a:effectLst/>
+              <a:uFillTx/>
               <a:latin typeface="Arial"/>
             </a:endParaRPr>
           </a:p>
@@ -5779,14 +6919,14 @@
       </p:sp>
       <p:sp>
         <p:nvSpPr>
-          <p:cNvPr id="63" name="TextBox 18"/>
+          <p:cNvPr id="69" name="TextBox 18"/>
           <p:cNvSpPr/>
           <p:nvPr/>
         </p:nvSpPr>
         <p:spPr>
           <a:xfrm>
             <a:off x="2004480" y="2526120"/>
-            <a:ext cx="1437120" cy="363960"/>
+            <a:ext cx="1252800" cy="363960"/>
           </a:xfrm>
           <a:prstGeom prst="rect">
             <a:avLst/>
@@ -5803,7 +6943,7 @@
           <a:fontRef idx="minor"/>
         </p:style>
         <p:txBody>
-          <a:bodyPr wrap="none" lIns="90000" rIns="90000" tIns="45000" bIns="45000" anchor="t">
+          <a:bodyPr wrap="none" lIns="90000" tIns="45000" rIns="90000" bIns="45000" anchor="t">
             <a:spAutoFit/>
           </a:bodyPr>
           <a:p>
@@ -5813,18 +6953,22 @@
               </a:lnSpc>
             </a:pPr>
             <a:r>
-              <a:rPr b="0" lang="en-US" sz="1800" spc="-1" strike="noStrike">
+              <a:rPr lang="en-US" sz="1800" b="0" u="none" strike="noStrike">
                 <a:solidFill>
                   <a:schemeClr val="dk1"/>
                 </a:solidFill>
+                <a:effectLst/>
+                <a:uFillTx/>
                 <a:latin typeface="Calibri"/>
               </a:rPr>
               <a:t>Strafe Right</a:t>
             </a:r>
-            <a:endParaRPr b="0" lang="en-US" sz="1800" spc="-1" strike="noStrike">
-              <a:solidFill>
-                <a:srgbClr val="000000"/>
-              </a:solidFill>
+            <a:endParaRPr lang="en-US" sz="1800" b="0" u="none" strike="noStrike">
+              <a:solidFill>
+                <a:srgbClr val="000000"/>
+              </a:solidFill>
+              <a:effectLst/>
+              <a:uFillTx/>
               <a:latin typeface="Arial"/>
             </a:endParaRPr>
           </a:p>
@@ -5832,14 +6976,14 @@
       </p:sp>
       <p:sp>
         <p:nvSpPr>
-          <p:cNvPr id="64" name="TextBox 19"/>
+          <p:cNvPr id="70" name="TextBox 19"/>
           <p:cNvSpPr/>
           <p:nvPr/>
         </p:nvSpPr>
         <p:spPr>
           <a:xfrm>
             <a:off x="7627680" y="5721120"/>
-            <a:ext cx="1296720" cy="363960"/>
+            <a:ext cx="1296360" cy="363600"/>
           </a:xfrm>
           <a:prstGeom prst="rect">
             <a:avLst/>
@@ -5856,7 +7000,7 @@
           <a:fontRef idx="minor"/>
         </p:style>
         <p:txBody>
-          <a:bodyPr wrap="none" lIns="90000" rIns="90000" tIns="45000" bIns="45000" anchor="t">
+          <a:bodyPr wrap="none" lIns="90000" tIns="45000" rIns="90000" bIns="45000" anchor="t">
             <a:spAutoFit/>
           </a:bodyPr>
           <a:p>
@@ -5866,18 +7010,22 @@
               </a:lnSpc>
             </a:pPr>
             <a:r>
-              <a:rPr b="0" lang="en-US" sz="1800" spc="-1" strike="noStrike">
+              <a:rPr lang="en-US" sz="1800" b="0" u="none" strike="noStrike">
                 <a:solidFill>
                   <a:schemeClr val="dk1"/>
                 </a:solidFill>
+                <a:effectLst/>
+                <a:uFillTx/>
                 <a:latin typeface="Calibri"/>
               </a:rPr>
               <a:t>Turn Right</a:t>
             </a:r>
-            <a:endParaRPr b="0" lang="en-US" sz="1800" spc="-1" strike="noStrike">
-              <a:solidFill>
-                <a:srgbClr val="000000"/>
-              </a:solidFill>
+            <a:endParaRPr lang="en-US" sz="1800" b="0" u="none" strike="noStrike">
+              <a:solidFill>
+                <a:srgbClr val="000000"/>
+              </a:solidFill>
+              <a:effectLst/>
+              <a:uFillTx/>
               <a:latin typeface="Arial"/>
             </a:endParaRPr>
           </a:p>
@@ -5885,23 +7033,23 @@
       </p:sp>
       <p:cxnSp>
         <p:nvCxnSpPr>
-          <p:cNvPr id="65" name="Straight Connector 2"/>
+          <p:cNvPr id="71" name="Straight Connector 2"/>
           <p:cNvCxnSpPr>
-            <a:stCxn id="56" idx="2"/>
+            <a:stCxn id="62" idx="2"/>
           </p:cNvCxnSpPr>
           <p:nvPr/>
         </p:nvCxnSpPr>
         <p:spPr>
           <a:xfrm>
-            <a:off x="2005200" y="1530720"/>
-            <a:ext cx="1913040" cy="669240"/>
+            <a:off x="1506960" y="1530720"/>
+            <a:ext cx="2411640" cy="669600"/>
           </a:xfrm>
           <a:prstGeom prst="straightConnector1">
             <a:avLst/>
           </a:prstGeom>
           <a:ln w="28575">
             <a:solidFill>
-              <a:srgbClr val="5b9bd5"/>
+              <a:srgbClr val="5B9BD5"/>
             </a:solidFill>
             <a:round/>
           </a:ln>
@@ -5909,23 +7057,23 @@
       </p:cxnSp>
       <p:cxnSp>
         <p:nvCxnSpPr>
-          <p:cNvPr id="66" name="Straight Connector 21"/>
+          <p:cNvPr id="72" name="Straight Connector 21"/>
           <p:cNvCxnSpPr>
-            <a:stCxn id="55" idx="2"/>
+            <a:stCxn id="61" idx="2"/>
           </p:cNvCxnSpPr>
           <p:nvPr/>
         </p:nvCxnSpPr>
         <p:spPr>
           <a:xfrm>
-            <a:off x="2874960" y="947160"/>
-            <a:ext cx="1419480" cy="752760"/>
+            <a:off x="2446200" y="947160"/>
+            <a:ext cx="1848600" cy="753120"/>
           </a:xfrm>
           <a:prstGeom prst="straightConnector1">
             <a:avLst/>
           </a:prstGeom>
           <a:ln w="28575">
             <a:solidFill>
-              <a:srgbClr val="5b9bd5"/>
+              <a:srgbClr val="5B9BD5"/>
             </a:solidFill>
             <a:round/>
           </a:ln>
@@ -5933,21 +7081,21 @@
       </p:cxnSp>
       <p:cxnSp>
         <p:nvCxnSpPr>
-          <p:cNvPr id="67" name="Straight Connector 25"/>
+          <p:cNvPr id="73" name="Straight Connector 25"/>
           <p:cNvCxnSpPr/>
           <p:nvPr/>
         </p:nvCxnSpPr>
         <p:spPr>
           <a:xfrm flipH="1">
             <a:off x="7898040" y="911160"/>
-            <a:ext cx="2001960" cy="625320"/>
+            <a:ext cx="2002320" cy="625680"/>
           </a:xfrm>
           <a:prstGeom prst="straightConnector1">
             <a:avLst/>
           </a:prstGeom>
           <a:ln w="28575">
             <a:solidFill>
-              <a:srgbClr val="5b9bd5"/>
+              <a:srgbClr val="5B9BD5"/>
             </a:solidFill>
             <a:round/>
           </a:ln>
@@ -5955,21 +7103,21 @@
       </p:cxnSp>
       <p:cxnSp>
         <p:nvCxnSpPr>
-          <p:cNvPr id="68" name="Straight Connector 27"/>
+          <p:cNvPr id="74" name="Straight Connector 27"/>
           <p:cNvCxnSpPr/>
           <p:nvPr/>
         </p:nvCxnSpPr>
         <p:spPr>
           <a:xfrm flipH="1">
             <a:off x="8361360" y="1725480"/>
-            <a:ext cx="1278360" cy="460080"/>
+            <a:ext cx="1278720" cy="460440"/>
           </a:xfrm>
           <a:prstGeom prst="straightConnector1">
             <a:avLst/>
           </a:prstGeom>
           <a:ln w="28575">
             <a:solidFill>
-              <a:srgbClr val="5b9bd5"/>
+              <a:srgbClr val="5B9BD5"/>
             </a:solidFill>
             <a:round/>
           </a:ln>
@@ -5977,21 +7125,21 @@
       </p:cxnSp>
       <p:cxnSp>
         <p:nvCxnSpPr>
-          <p:cNvPr id="69" name="Straight Connector 29"/>
+          <p:cNvPr id="75" name="Straight Connector 29"/>
           <p:cNvCxnSpPr/>
           <p:nvPr/>
         </p:nvCxnSpPr>
         <p:spPr>
           <a:xfrm flipH="1">
             <a:off x="8114040" y="2658960"/>
-            <a:ext cx="1592280" cy="307080"/>
+            <a:ext cx="1592640" cy="307440"/>
           </a:xfrm>
           <a:prstGeom prst="straightConnector1">
             <a:avLst/>
           </a:prstGeom>
           <a:ln w="28575">
             <a:solidFill>
-              <a:srgbClr val="5b9bd5"/>
+              <a:srgbClr val="5B9BD5"/>
             </a:solidFill>
             <a:round/>
           </a:ln>
@@ -5999,21 +7147,21 @@
       </p:cxnSp>
       <p:cxnSp>
         <p:nvCxnSpPr>
-          <p:cNvPr id="70" name="Straight Connector 31"/>
+          <p:cNvPr id="76" name="Straight Connector 31"/>
           <p:cNvCxnSpPr/>
           <p:nvPr/>
         </p:nvCxnSpPr>
         <p:spPr>
           <a:xfrm flipH="1" flipV="1">
             <a:off x="7505640" y="3429000"/>
-            <a:ext cx="2069280" cy="1990800"/>
+            <a:ext cx="2069640" cy="1991160"/>
           </a:xfrm>
           <a:prstGeom prst="straightConnector1">
             <a:avLst/>
           </a:prstGeom>
           <a:ln w="28575">
             <a:solidFill>
-              <a:srgbClr val="5b9bd5"/>
+              <a:srgbClr val="5B9BD5"/>
             </a:solidFill>
             <a:round/>
           </a:ln>
@@ -6021,21 +7169,21 @@
       </p:cxnSp>
       <p:cxnSp>
         <p:nvCxnSpPr>
-          <p:cNvPr id="71" name="Straight Connector 33"/>
+          <p:cNvPr id="77" name="Straight Connector 33"/>
           <p:cNvCxnSpPr/>
           <p:nvPr/>
         </p:nvCxnSpPr>
         <p:spPr>
           <a:xfrm flipH="1" flipV="1">
             <a:off x="8079480" y="3731760"/>
-            <a:ext cx="2284200" cy="1042920"/>
+            <a:ext cx="2284560" cy="1043280"/>
           </a:xfrm>
           <a:prstGeom prst="straightConnector1">
             <a:avLst/>
           </a:prstGeom>
           <a:ln w="28575">
             <a:solidFill>
-              <a:srgbClr val="5b9bd5"/>
+              <a:srgbClr val="5B9BD5"/>
             </a:solidFill>
             <a:round/>
           </a:ln>
@@ -6043,14 +7191,14 @@
       </p:cxnSp>
       <p:sp>
         <p:nvSpPr>
-          <p:cNvPr id="72" name="TextBox 28"/>
+          <p:cNvPr id="78" name="TextBox 28"/>
           <p:cNvSpPr/>
           <p:nvPr/>
         </p:nvSpPr>
         <p:spPr>
           <a:xfrm>
             <a:off x="5510520" y="1179720"/>
-            <a:ext cx="1755360" cy="363960"/>
+            <a:ext cx="540360" cy="363960"/>
           </a:xfrm>
           <a:prstGeom prst="rect">
             <a:avLst/>
@@ -6067,7 +7215,7 @@
           <a:fontRef idx="minor"/>
         </p:style>
         <p:txBody>
-          <a:bodyPr wrap="none" lIns="90000" rIns="90000" tIns="45000" bIns="45000" anchor="t">
+          <a:bodyPr wrap="none" lIns="90000" tIns="45000" rIns="90000" bIns="45000" anchor="t">
             <a:spAutoFit/>
           </a:bodyPr>
           <a:p>
@@ -6077,18 +7225,22 @@
               </a:lnSpc>
             </a:pPr>
             <a:r>
-              <a:rPr b="0" lang="en-US" sz="1800" spc="-1" strike="noStrike">
+              <a:rPr lang="en-US" sz="1800" b="0" u="none" strike="noStrike">
                 <a:solidFill>
                   <a:schemeClr val="dk1"/>
                 </a:solidFill>
+                <a:effectLst/>
+                <a:uFillTx/>
                 <a:latin typeface="Calibri"/>
               </a:rPr>
-              <a:t>Swap Cameras</a:t>
-            </a:r>
-            <a:endParaRPr b="0" lang="en-US" sz="1800" spc="-1" strike="noStrike">
-              <a:solidFill>
-                <a:srgbClr val="000000"/>
-              </a:solidFill>
+              <a:t>N/A</a:t>
+            </a:r>
+            <a:endParaRPr lang="en-US" sz="1800" b="0" u="none" strike="noStrike">
+              <a:solidFill>
+                <a:srgbClr val="000000"/>
+              </a:solidFill>
+              <a:effectLst/>
+              <a:uFillTx/>
               <a:latin typeface="Arial"/>
             </a:endParaRPr>
           </a:p>
@@ -6096,23 +7248,23 @@
       </p:sp>
       <p:cxnSp>
         <p:nvCxnSpPr>
-          <p:cNvPr id="73" name="Straight Connector 30"/>
+          <p:cNvPr id="79" name="Straight Connector 30"/>
           <p:cNvCxnSpPr>
-            <a:stCxn id="72" idx="2"/>
+            <a:stCxn id="78" idx="2"/>
           </p:cNvCxnSpPr>
           <p:nvPr/>
         </p:nvCxnSpPr>
         <p:spPr>
           <a:xfrm>
-            <a:off x="6388200" y="1543680"/>
-            <a:ext cx="432000" cy="1920600"/>
+            <a:off x="5780880" y="1543680"/>
+            <a:ext cx="1039680" cy="1920960"/>
           </a:xfrm>
           <a:prstGeom prst="straightConnector1">
             <a:avLst/>
           </a:prstGeom>
           <a:ln w="28575">
             <a:solidFill>
-              <a:srgbClr val="5b9bd5"/>
+              <a:srgbClr val="5B9BD5"/>
             </a:solidFill>
             <a:round/>
           </a:ln>
@@ -6120,14 +7272,14 @@
       </p:cxnSp>
       <p:sp>
         <p:nvSpPr>
-          <p:cNvPr id="74" name="TextBox 1"/>
+          <p:cNvPr id="80" name="TextBox 1"/>
           <p:cNvSpPr/>
           <p:nvPr/>
         </p:nvSpPr>
         <p:spPr>
           <a:xfrm>
             <a:off x="3984840" y="311760"/>
-            <a:ext cx="4222800" cy="577440"/>
+            <a:ext cx="4222440" cy="577080"/>
           </a:xfrm>
           <a:prstGeom prst="rect">
             <a:avLst/>
@@ -6144,7 +7296,7 @@
           <a:fontRef idx="minor"/>
         </p:style>
         <p:txBody>
-          <a:bodyPr wrap="none" lIns="90000" rIns="90000" tIns="45000" bIns="45000" anchor="t">
+          <a:bodyPr wrap="none" lIns="90000" tIns="45000" rIns="90000" bIns="45000" anchor="t">
             <a:spAutoFit/>
           </a:bodyPr>
           <a:p>
@@ -6154,18 +7306,22 @@
               </a:lnSpc>
             </a:pPr>
             <a:r>
-              <a:rPr b="1" lang="en-US" sz="3200" spc="-1" strike="noStrike">
+              <a:rPr lang="en-US" sz="3200" b="1" u="none" strike="noStrike">
                 <a:solidFill>
                   <a:schemeClr val="dk1"/>
                 </a:solidFill>
+                <a:effectLst/>
+                <a:uFillTx/>
                 <a:latin typeface="Calibri"/>
               </a:rPr>
               <a:t>Driver Controller (0)</a:t>
             </a:r>
-            <a:endParaRPr b="0" lang="en-US" sz="3200" spc="-1" strike="noStrike">
-              <a:solidFill>
-                <a:srgbClr val="000000"/>
-              </a:solidFill>
+            <a:endParaRPr lang="en-US" sz="3200" b="0" u="none" strike="noStrike">
+              <a:solidFill>
+                <a:srgbClr val="000000"/>
+              </a:solidFill>
+              <a:effectLst/>
+              <a:uFillTx/>
               <a:latin typeface="Arial"/>
             </a:endParaRPr>
           </a:p>
@@ -6173,14 +7329,14 @@
       </p:sp>
       <p:sp>
         <p:nvSpPr>
-          <p:cNvPr id="75" name="TextBox 2"/>
+          <p:cNvPr id="81" name="TextBox 2"/>
           <p:cNvSpPr/>
           <p:nvPr/>
         </p:nvSpPr>
         <p:spPr>
           <a:xfrm>
             <a:off x="9829800" y="2971800"/>
-            <a:ext cx="2044800" cy="638280"/>
+            <a:ext cx="1184760" cy="638280"/>
           </a:xfrm>
           <a:prstGeom prst="rect">
             <a:avLst/>
@@ -6197,7 +7353,7 @@
           <a:fontRef idx="minor"/>
         </p:style>
         <p:txBody>
-          <a:bodyPr wrap="none" lIns="90000" rIns="90000" tIns="45000" bIns="45000" anchor="t">
+          <a:bodyPr wrap="none" lIns="90000" tIns="45000" rIns="90000" bIns="45000" anchor="t">
             <a:spAutoFit/>
           </a:bodyPr>
           <a:p>
@@ -6207,18 +7363,22 @@
               </a:lnSpc>
             </a:pPr>
             <a:r>
-              <a:rPr b="0" lang="en-US" sz="1800" spc="-1" strike="noStrike">
+              <a:rPr lang="en-US" sz="1800" b="0" u="none" strike="noStrike">
                 <a:solidFill>
                   <a:schemeClr val="dk1"/>
                 </a:solidFill>
+                <a:effectLst/>
+                <a:uFillTx/>
                 <a:latin typeface="Calibri"/>
               </a:rPr>
-              <a:t>Reset Robot Gyro</a:t>
-            </a:r>
-            <a:endParaRPr b="0" lang="en-US" sz="1800" spc="-1" strike="noStrike">
-              <a:solidFill>
-                <a:srgbClr val="000000"/>
-              </a:solidFill>
+              <a:t>Reset Gyro</a:t>
+            </a:r>
+            <a:endParaRPr lang="en-US" sz="1800" b="0" u="none" strike="noStrike">
+              <a:solidFill>
+                <a:srgbClr val="000000"/>
+              </a:solidFill>
+              <a:effectLst/>
+              <a:uFillTx/>
               <a:latin typeface="Arial"/>
             </a:endParaRPr>
           </a:p>
@@ -6228,19 +7388,12 @@
                 <a:spcPct val="100000"/>
               </a:lnSpc>
             </a:pPr>
-            <a:r>
-              <a:rPr b="0" lang="en-US" sz="1800" spc="-1" strike="noStrike">
-                <a:solidFill>
-                  <a:schemeClr val="dk1"/>
-                </a:solidFill>
-                <a:latin typeface="Calibri"/>
-              </a:rPr>
-              <a:t>to 0 degrees</a:t>
-            </a:r>
-            <a:endParaRPr b="0" lang="en-US" sz="1800" spc="-1" strike="noStrike">
-              <a:solidFill>
-                <a:srgbClr val="000000"/>
-              </a:solidFill>
+            <a:endParaRPr lang="en-US" sz="1800" b="0" u="none" strike="noStrike">
+              <a:solidFill>
+                <a:srgbClr val="000000"/>
+              </a:solidFill>
+              <a:effectLst/>
+              <a:uFillTx/>
               <a:latin typeface="Arial"/>
             </a:endParaRPr>
           </a:p>
@@ -6248,15 +7401,15 @@
       </p:sp>
       <p:cxnSp>
         <p:nvCxnSpPr>
-          <p:cNvPr id="76" name="Straight Connector 1"/>
+          <p:cNvPr id="82" name="Straight Connector 1"/>
           <p:cNvCxnSpPr>
-            <a:stCxn id="75" idx="1"/>
+            <a:stCxn id="81" idx="1"/>
           </p:cNvCxnSpPr>
           <p:nvPr/>
         </p:nvCxnSpPr>
         <p:spPr>
           <a:xfrm flipH="1">
-            <a:off x="8695080" y="3290760"/>
+            <a:off x="8695080" y="3291120"/>
             <a:ext cx="1135080" cy="138600"/>
           </a:xfrm>
           <a:prstGeom prst="straightConnector1">
@@ -6264,7 +7417,7 @@
           </a:prstGeom>
           <a:ln w="28575">
             <a:solidFill>
-              <a:srgbClr val="5b9bd5"/>
+              <a:srgbClr val="5B9BD5"/>
             </a:solidFill>
             <a:round/>
           </a:ln>
@@ -6302,7 +7455,7 @@
       </p:grpSpPr>
       <p:pic>
         <p:nvPicPr>
-          <p:cNvPr id="77" name="Picture 3" descr=""/>
+          <p:cNvPr id="83" name="Picture 3"/>
           <p:cNvPicPr/>
           <p:nvPr/>
         </p:nvPicPr>
@@ -6313,11 +7466,12 @@
         <p:spPr>
           <a:xfrm>
             <a:off x="2552760" y="1047600"/>
-            <a:ext cx="7085880" cy="4761720"/>
+            <a:ext cx="7085520" cy="4761360"/>
           </a:xfrm>
           <a:prstGeom prst="rect">
             <a:avLst/>
           </a:prstGeom>
+          <a:noFill/>
           <a:ln w="0">
             <a:noFill/>
           </a:ln>
@@ -6325,14 +7479,14 @@
       </p:pic>
       <p:sp>
         <p:nvSpPr>
-          <p:cNvPr id="78" name="TextBox 4"/>
+          <p:cNvPr id="84" name="TextBox 4"/>
           <p:cNvSpPr/>
           <p:nvPr/>
         </p:nvSpPr>
         <p:spPr>
           <a:xfrm>
             <a:off x="10235880" y="4667040"/>
-            <a:ext cx="583560" cy="363960"/>
+            <a:ext cx="583200" cy="363600"/>
           </a:xfrm>
           <a:prstGeom prst="rect">
             <a:avLst/>
@@ -6349,7 +7503,7 @@
           <a:fontRef idx="minor"/>
         </p:style>
         <p:txBody>
-          <a:bodyPr wrap="none" lIns="90000" rIns="90000" tIns="45000" bIns="45000" anchor="t">
+          <a:bodyPr wrap="none" lIns="90000" tIns="45000" rIns="90000" bIns="45000" anchor="t">
             <a:spAutoFit/>
           </a:bodyPr>
           <a:p>
@@ -6359,18 +7513,22 @@
               </a:lnSpc>
             </a:pPr>
             <a:r>
-              <a:rPr b="0" lang="en-US" sz="1800" spc="-1" strike="noStrike">
+              <a:rPr lang="en-US" sz="1800" b="0" u="none" strike="noStrike">
                 <a:solidFill>
                   <a:schemeClr val="dk1"/>
                 </a:solidFill>
+                <a:effectLst/>
+                <a:uFillTx/>
                 <a:latin typeface="Calibri"/>
               </a:rPr>
               <a:t>N/A</a:t>
             </a:r>
-            <a:endParaRPr b="0" lang="en-US" sz="1800" spc="-1" strike="noStrike">
-              <a:solidFill>
-                <a:srgbClr val="000000"/>
-              </a:solidFill>
+            <a:endParaRPr lang="en-US" sz="1800" b="0" u="none" strike="noStrike">
+              <a:solidFill>
+                <a:srgbClr val="000000"/>
+              </a:solidFill>
+              <a:effectLst/>
+              <a:uFillTx/>
               <a:latin typeface="Arial"/>
             </a:endParaRPr>
           </a:p>
@@ -6378,14 +7536,14 @@
       </p:sp>
       <p:sp>
         <p:nvSpPr>
-          <p:cNvPr id="79" name="TextBox 5"/>
+          <p:cNvPr id="85" name="TextBox 5"/>
           <p:cNvSpPr/>
           <p:nvPr/>
         </p:nvSpPr>
         <p:spPr>
           <a:xfrm>
             <a:off x="9334800" y="5330880"/>
-            <a:ext cx="583560" cy="363960"/>
+            <a:ext cx="583200" cy="363600"/>
           </a:xfrm>
           <a:prstGeom prst="rect">
             <a:avLst/>
@@ -6402,7 +7560,7 @@
           <a:fontRef idx="minor"/>
         </p:style>
         <p:txBody>
-          <a:bodyPr wrap="none" lIns="90000" rIns="90000" tIns="45000" bIns="45000" anchor="t">
+          <a:bodyPr wrap="none" lIns="90000" tIns="45000" rIns="90000" bIns="45000" anchor="t">
             <a:spAutoFit/>
           </a:bodyPr>
           <a:p>
@@ -6412,18 +7570,22 @@
               </a:lnSpc>
             </a:pPr>
             <a:r>
-              <a:rPr b="0" lang="en-US" sz="1800" spc="-1" strike="noStrike">
+              <a:rPr lang="en-US" sz="1800" b="0" u="none" strike="noStrike">
                 <a:solidFill>
                   <a:schemeClr val="dk1"/>
                 </a:solidFill>
+                <a:effectLst/>
+                <a:uFillTx/>
                 <a:latin typeface="Calibri"/>
               </a:rPr>
               <a:t>N/A</a:t>
             </a:r>
-            <a:endParaRPr b="0" lang="en-US" sz="1800" spc="-1" strike="noStrike">
-              <a:solidFill>
-                <a:srgbClr val="000000"/>
-              </a:solidFill>
+            <a:endParaRPr lang="en-US" sz="1800" b="0" u="none" strike="noStrike">
+              <a:solidFill>
+                <a:srgbClr val="000000"/>
+              </a:solidFill>
+              <a:effectLst/>
+              <a:uFillTx/>
               <a:latin typeface="Arial"/>
             </a:endParaRPr>
           </a:p>
@@ -6431,14 +7593,14 @@
       </p:sp>
       <p:sp>
         <p:nvSpPr>
-          <p:cNvPr id="80" name="TextBox 6"/>
+          <p:cNvPr id="86" name="TextBox 6"/>
           <p:cNvSpPr/>
           <p:nvPr/>
         </p:nvSpPr>
         <p:spPr>
           <a:xfrm>
             <a:off x="9958320" y="3367800"/>
-            <a:ext cx="1458360" cy="638280"/>
+            <a:ext cx="1458000" cy="637920"/>
           </a:xfrm>
           <a:prstGeom prst="rect">
             <a:avLst/>
@@ -6455,7 +7617,7 @@
           <a:fontRef idx="minor"/>
         </p:style>
         <p:txBody>
-          <a:bodyPr wrap="none" lIns="90000" rIns="90000" tIns="45000" bIns="45000" anchor="t">
+          <a:bodyPr wrap="none" lIns="90000" tIns="45000" rIns="90000" bIns="45000" anchor="t">
             <a:spAutoFit/>
           </a:bodyPr>
           <a:p>
@@ -6465,18 +7627,22 @@
               </a:lnSpc>
             </a:pPr>
             <a:r>
-              <a:rPr b="0" lang="en-US" sz="1800" spc="-1" strike="noStrike">
+              <a:rPr lang="en-US" sz="1800" b="0" u="none" strike="noStrike">
                 <a:solidFill>
                   <a:schemeClr val="dk1"/>
                 </a:solidFill>
+                <a:effectLst/>
+                <a:uFillTx/>
                 <a:latin typeface="Calibri"/>
               </a:rPr>
               <a:t>Stop All</a:t>
             </a:r>
-            <a:endParaRPr b="0" lang="en-US" sz="1800" spc="-1" strike="noStrike">
-              <a:solidFill>
-                <a:srgbClr val="000000"/>
-              </a:solidFill>
+            <a:endParaRPr lang="en-US" sz="1800" b="0" u="none" strike="noStrike">
+              <a:solidFill>
+                <a:srgbClr val="000000"/>
+              </a:solidFill>
+              <a:effectLst/>
+              <a:uFillTx/>
               <a:latin typeface="Arial"/>
             </a:endParaRPr>
           </a:p>
@@ -6487,18 +7653,22 @@
               </a:lnSpc>
             </a:pPr>
             <a:r>
-              <a:rPr b="0" lang="en-US" sz="1800" spc="-1" strike="noStrike">
+              <a:rPr lang="en-US" sz="1800" b="0" u="none" strike="noStrike">
                 <a:solidFill>
                   <a:schemeClr val="dk1"/>
                 </a:solidFill>
+                <a:effectLst/>
+                <a:uFillTx/>
                 <a:latin typeface="Calibri"/>
               </a:rPr>
               <a:t>Subsystems</a:t>
             </a:r>
-            <a:endParaRPr b="0" lang="en-US" sz="1800" spc="-1" strike="noStrike">
-              <a:solidFill>
-                <a:srgbClr val="000000"/>
-              </a:solidFill>
+            <a:endParaRPr lang="en-US" sz="1800" b="0" u="none" strike="noStrike">
+              <a:solidFill>
+                <a:srgbClr val="000000"/>
+              </a:solidFill>
+              <a:effectLst/>
+              <a:uFillTx/>
               <a:latin typeface="Arial"/>
             </a:endParaRPr>
           </a:p>
@@ -6506,14 +7676,14 @@
       </p:sp>
       <p:sp>
         <p:nvSpPr>
-          <p:cNvPr id="81" name="TextBox 7"/>
+          <p:cNvPr id="87" name="TextBox 7"/>
           <p:cNvSpPr/>
           <p:nvPr/>
         </p:nvSpPr>
         <p:spPr>
           <a:xfrm>
             <a:off x="9607680" y="1431720"/>
-            <a:ext cx="583560" cy="363960"/>
+            <a:ext cx="1039680" cy="638280"/>
           </a:xfrm>
           <a:prstGeom prst="rect">
             <a:avLst/>
@@ -6530,43 +7700,73 @@
           <a:fontRef idx="minor"/>
         </p:style>
         <p:txBody>
-          <a:bodyPr wrap="none" lIns="90000" rIns="90000" tIns="45000" bIns="45000" anchor="t">
+          <a:bodyPr wrap="none" lIns="90000" tIns="45000" rIns="90000" bIns="45000" anchor="t">
             <a:spAutoFit/>
           </a:bodyPr>
           <a:p>
-            <a:pPr defTabSz="914400">
+            <a:pPr algn="ctr" defTabSz="914400">
               <a:lnSpc>
                 <a:spcPct val="100000"/>
               </a:lnSpc>
             </a:pPr>
             <a:r>
-              <a:rPr b="0" lang="en-US" sz="1800" spc="-1" strike="noStrike">
+              <a:rPr lang="en-US" sz="1800" b="0" u="none" strike="noStrike">
                 <a:solidFill>
                   <a:schemeClr val="dk1"/>
                 </a:solidFill>
+                <a:effectLst/>
+                <a:uFillTx/>
                 <a:latin typeface="Calibri"/>
               </a:rPr>
-              <a:t>N/A</a:t>
-            </a:r>
-            <a:endParaRPr b="0" lang="en-US" sz="1800" spc="-1" strike="noStrike">
-              <a:solidFill>
-                <a:srgbClr val="000000"/>
-              </a:solidFill>
+              <a:t>Shoot</a:t>
+            </a:r>
+            <a:endParaRPr lang="en-US" sz="1800" b="0" u="none" strike="noStrike">
+              <a:solidFill>
+                <a:srgbClr val="000000"/>
+              </a:solidFill>
+              <a:effectLst/>
+              <a:uFillTx/>
               <a:latin typeface="Arial"/>
             </a:endParaRPr>
           </a:p>
-        </p:txBody>
-      </p:sp>
-      <p:sp>
-        <p:nvSpPr>
-          <p:cNvPr id="82" name="TextBox 8"/>
+          <a:p>
+            <a:pPr algn="ctr" defTabSz="914400">
+              <a:lnSpc>
+                <a:spcPct val="100000"/>
+              </a:lnSpc>
+            </a:pPr>
+            <a:r>
+              <a:rPr lang="en-US" sz="1800" b="0" u="none" strike="noStrike">
+                <a:solidFill>
+                  <a:schemeClr val="dk1"/>
+                </a:solidFill>
+                <a:effectLst/>
+                <a:uFillTx/>
+                <a:latin typeface="Calibri"/>
+              </a:rPr>
+              <a:t>Position1</a:t>
+            </a:r>
+            <a:endParaRPr lang="en-US" sz="1800" b="0" u="none" strike="noStrike">
+              <a:solidFill>
+                <a:srgbClr val="000000"/>
+              </a:solidFill>
+              <a:effectLst/>
+              <a:uFillTx/>
+              <a:latin typeface="Arial"/>
+            </a:endParaRPr>
+          </a:p>
+        </p:txBody>
+      </p:sp>
+      <p:sp>
+        <p:nvSpPr>
+          <p:cNvPr id="88" name="TextBox 8"/>
           <p:cNvSpPr/>
           <p:nvPr/>
         </p:nvSpPr>
         <p:spPr>
           <a:xfrm>
             <a:off x="9784800" y="583200"/>
-            <a:ext cx="583560" cy="363960"/>
+            <a:ext cx="1039680" cy="638280"/>
           </a:xfrm>
           <a:prstGeom prst="rect">
             <a:avLst/>
@@ -6583,43 +7783,73 @@
           <a:fontRef idx="minor"/>
         </p:style>
         <p:txBody>
-          <a:bodyPr wrap="none" lIns="90000" rIns="90000" tIns="45000" bIns="45000" anchor="t">
+          <a:bodyPr wrap="none" lIns="90000" tIns="45000" rIns="90000" bIns="45000" anchor="t">
             <a:spAutoFit/>
           </a:bodyPr>
           <a:p>
-            <a:pPr defTabSz="914400">
+            <a:pPr algn="ctr" defTabSz="914400">
               <a:lnSpc>
                 <a:spcPct val="100000"/>
               </a:lnSpc>
             </a:pPr>
             <a:r>
-              <a:rPr b="0" lang="en-US" sz="1800" spc="-1" strike="noStrike">
+              <a:rPr lang="en-US" sz="1800" b="0" u="none" strike="noStrike">
                 <a:solidFill>
                   <a:schemeClr val="dk1"/>
                 </a:solidFill>
+                <a:effectLst/>
+                <a:uFillTx/>
                 <a:latin typeface="Calibri"/>
               </a:rPr>
-              <a:t>N/A</a:t>
-            </a:r>
-            <a:endParaRPr b="0" lang="en-US" sz="1800" spc="-1" strike="noStrike">
-              <a:solidFill>
-                <a:srgbClr val="000000"/>
-              </a:solidFill>
+              <a:t>Shoot</a:t>
+            </a:r>
+            <a:endParaRPr lang="en-US" sz="1800" b="0" u="none" strike="noStrike">
+              <a:solidFill>
+                <a:srgbClr val="000000"/>
+              </a:solidFill>
+              <a:effectLst/>
+              <a:uFillTx/>
               <a:latin typeface="Arial"/>
             </a:endParaRPr>
           </a:p>
-        </p:txBody>
-      </p:sp>
-      <p:sp>
-        <p:nvSpPr>
-          <p:cNvPr id="83" name="TextBox 9"/>
+          <a:p>
+            <a:pPr algn="ctr" defTabSz="914400">
+              <a:lnSpc>
+                <a:spcPct val="100000"/>
+              </a:lnSpc>
+            </a:pPr>
+            <a:r>
+              <a:rPr lang="en-US" sz="1800" b="0" u="none" strike="noStrike">
+                <a:solidFill>
+                  <a:schemeClr val="dk1"/>
+                </a:solidFill>
+                <a:effectLst/>
+                <a:uFillTx/>
+                <a:latin typeface="Calibri"/>
+              </a:rPr>
+              <a:t>Position3</a:t>
+            </a:r>
+            <a:endParaRPr lang="en-US" sz="1800" b="0" u="none" strike="noStrike">
+              <a:solidFill>
+                <a:srgbClr val="000000"/>
+              </a:solidFill>
+              <a:effectLst/>
+              <a:uFillTx/>
+              <a:latin typeface="Arial"/>
+            </a:endParaRPr>
+          </a:p>
+        </p:txBody>
+      </p:sp>
+      <p:sp>
+        <p:nvSpPr>
+          <p:cNvPr id="89" name="TextBox 9"/>
           <p:cNvSpPr/>
           <p:nvPr/>
         </p:nvSpPr>
         <p:spPr>
           <a:xfrm>
-            <a:off x="2583360" y="583200"/>
-            <a:ext cx="583560" cy="363960"/>
+            <a:off x="2971800" y="504720"/>
+            <a:ext cx="1039680" cy="638280"/>
           </a:xfrm>
           <a:prstGeom prst="rect">
             <a:avLst/>
@@ -6636,43 +7866,73 @@
           <a:fontRef idx="minor"/>
         </p:style>
         <p:txBody>
-          <a:bodyPr wrap="none" lIns="90000" rIns="90000" tIns="45000" bIns="45000" anchor="t">
+          <a:bodyPr wrap="none" lIns="90000" tIns="45000" rIns="90000" bIns="45000" anchor="t">
             <a:spAutoFit/>
           </a:bodyPr>
           <a:p>
-            <a:pPr defTabSz="914400">
+            <a:pPr algn="ctr" defTabSz="914400">
               <a:lnSpc>
                 <a:spcPct val="100000"/>
               </a:lnSpc>
             </a:pPr>
             <a:r>
-              <a:rPr b="0" lang="en-US" sz="1800" spc="-1" strike="noStrike">
+              <a:rPr lang="en-US" sz="1800" b="0" u="none" strike="noStrike">
                 <a:solidFill>
                   <a:schemeClr val="dk1"/>
                 </a:solidFill>
+                <a:effectLst/>
+                <a:uFillTx/>
                 <a:latin typeface="Calibri"/>
               </a:rPr>
-              <a:t>N/A</a:t>
-            </a:r>
-            <a:endParaRPr b="0" lang="en-US" sz="1800" spc="-1" strike="noStrike">
-              <a:solidFill>
-                <a:srgbClr val="000000"/>
-              </a:solidFill>
+              <a:t>Shoot</a:t>
+            </a:r>
+            <a:endParaRPr lang="en-US" sz="1800" b="0" u="none" strike="noStrike">
+              <a:solidFill>
+                <a:srgbClr val="000000"/>
+              </a:solidFill>
+              <a:effectLst/>
+              <a:uFillTx/>
               <a:latin typeface="Arial"/>
             </a:endParaRPr>
           </a:p>
-        </p:txBody>
-      </p:sp>
-      <p:sp>
-        <p:nvSpPr>
-          <p:cNvPr id="84" name="TextBox 10"/>
+          <a:p>
+            <a:pPr algn="ctr" defTabSz="914400">
+              <a:lnSpc>
+                <a:spcPct val="100000"/>
+              </a:lnSpc>
+            </a:pPr>
+            <a:r>
+              <a:rPr lang="en-US" sz="1800" b="0" u="none" strike="noStrike">
+                <a:solidFill>
+                  <a:schemeClr val="dk1"/>
+                </a:solidFill>
+                <a:effectLst/>
+                <a:uFillTx/>
+                <a:latin typeface="Calibri"/>
+              </a:rPr>
+              <a:t>Position2</a:t>
+            </a:r>
+            <a:endParaRPr lang="en-US" sz="1800" b="0" u="none" strike="noStrike">
+              <a:solidFill>
+                <a:srgbClr val="000000"/>
+              </a:solidFill>
+              <a:effectLst/>
+              <a:uFillTx/>
+              <a:latin typeface="Arial"/>
+            </a:endParaRPr>
+          </a:p>
+        </p:txBody>
+      </p:sp>
+      <p:sp>
+        <p:nvSpPr>
+          <p:cNvPr id="90" name="TextBox 10"/>
           <p:cNvSpPr/>
           <p:nvPr/>
         </p:nvSpPr>
         <p:spPr>
           <a:xfrm>
             <a:off x="1713600" y="1166760"/>
-            <a:ext cx="583560" cy="363960"/>
+            <a:ext cx="583200" cy="363600"/>
           </a:xfrm>
           <a:prstGeom prst="rect">
             <a:avLst/>
@@ -6689,7 +7949,7 @@
           <a:fontRef idx="minor"/>
         </p:style>
         <p:txBody>
-          <a:bodyPr wrap="none" lIns="90000" rIns="90000" tIns="45000" bIns="45000" anchor="t">
+          <a:bodyPr wrap="none" lIns="90000" tIns="45000" rIns="90000" bIns="45000" anchor="t">
             <a:spAutoFit/>
           </a:bodyPr>
           <a:p>
@@ -6699,18 +7959,22 @@
               </a:lnSpc>
             </a:pPr>
             <a:r>
-              <a:rPr b="0" lang="en-US" sz="1800" spc="-1" strike="noStrike">
+              <a:rPr lang="en-US" sz="1800" b="0" u="none" strike="noStrike">
                 <a:solidFill>
                   <a:schemeClr val="dk1"/>
                 </a:solidFill>
+                <a:effectLst/>
+                <a:uFillTx/>
                 <a:latin typeface="Calibri"/>
               </a:rPr>
               <a:t>N/A</a:t>
             </a:r>
-            <a:endParaRPr b="0" lang="en-US" sz="1800" spc="-1" strike="noStrike">
-              <a:solidFill>
-                <a:srgbClr val="000000"/>
-              </a:solidFill>
+            <a:endParaRPr lang="en-US" sz="1800" b="0" u="none" strike="noStrike">
+              <a:solidFill>
+                <a:srgbClr val="000000"/>
+              </a:solidFill>
+              <a:effectLst/>
+              <a:uFillTx/>
               <a:latin typeface="Arial"/>
             </a:endParaRPr>
           </a:p>
@@ -6718,14 +7982,14 @@
       </p:sp>
       <p:sp>
         <p:nvSpPr>
-          <p:cNvPr id="85" name="TextBox 12"/>
+          <p:cNvPr id="91" name="TextBox 12"/>
           <p:cNvSpPr/>
           <p:nvPr/>
         </p:nvSpPr>
         <p:spPr>
           <a:xfrm>
             <a:off x="1376280" y="3218400"/>
-            <a:ext cx="583560" cy="363960"/>
+            <a:ext cx="583200" cy="363600"/>
           </a:xfrm>
           <a:prstGeom prst="rect">
             <a:avLst/>
@@ -6742,7 +8006,7 @@
           <a:fontRef idx="minor"/>
         </p:style>
         <p:txBody>
-          <a:bodyPr wrap="none" lIns="90000" rIns="90000" tIns="45000" bIns="45000" anchor="t">
+          <a:bodyPr wrap="none" lIns="90000" tIns="45000" rIns="90000" bIns="45000" anchor="t">
             <a:spAutoFit/>
           </a:bodyPr>
           <a:p>
@@ -6752,18 +8016,22 @@
               </a:lnSpc>
             </a:pPr>
             <a:r>
-              <a:rPr b="0" lang="en-US" sz="1800" spc="-1" strike="noStrike">
+              <a:rPr lang="en-US" sz="1800" b="0" u="none" strike="noStrike">
                 <a:solidFill>
                   <a:schemeClr val="dk1"/>
                 </a:solidFill>
+                <a:effectLst/>
+                <a:uFillTx/>
                 <a:latin typeface="Calibri"/>
               </a:rPr>
               <a:t>N/A</a:t>
             </a:r>
-            <a:endParaRPr b="0" lang="en-US" sz="1800" spc="-1" strike="noStrike">
-              <a:solidFill>
-                <a:srgbClr val="000000"/>
-              </a:solidFill>
+            <a:endParaRPr lang="en-US" sz="1800" b="0" u="none" strike="noStrike">
+              <a:solidFill>
+                <a:srgbClr val="000000"/>
+              </a:solidFill>
+              <a:effectLst/>
+              <a:uFillTx/>
               <a:latin typeface="Arial"/>
             </a:endParaRPr>
           </a:p>
@@ -6771,14 +8039,14 @@
       </p:sp>
       <p:sp>
         <p:nvSpPr>
-          <p:cNvPr id="86" name="TextBox 13"/>
+          <p:cNvPr id="92" name="TextBox 13"/>
           <p:cNvSpPr/>
           <p:nvPr/>
         </p:nvSpPr>
         <p:spPr>
           <a:xfrm>
             <a:off x="5473080" y="5715360"/>
-            <a:ext cx="583560" cy="363960"/>
+            <a:ext cx="583200" cy="363600"/>
           </a:xfrm>
           <a:prstGeom prst="rect">
             <a:avLst/>
@@ -6795,7 +8063,7 @@
           <a:fontRef idx="minor"/>
         </p:style>
         <p:txBody>
-          <a:bodyPr wrap="none" lIns="90000" rIns="90000" tIns="45000" bIns="45000" anchor="t">
+          <a:bodyPr wrap="none" lIns="90000" tIns="45000" rIns="90000" bIns="45000" anchor="t">
             <a:spAutoFit/>
           </a:bodyPr>
           <a:p>
@@ -6805,18 +8073,22 @@
               </a:lnSpc>
             </a:pPr>
             <a:r>
-              <a:rPr b="0" lang="en-US" sz="1800" spc="-1" strike="noStrike">
+              <a:rPr lang="en-US" sz="1800" b="0" u="none" strike="noStrike">
                 <a:solidFill>
                   <a:schemeClr val="dk1"/>
                 </a:solidFill>
+                <a:effectLst/>
+                <a:uFillTx/>
                 <a:latin typeface="Calibri"/>
               </a:rPr>
               <a:t>N/A</a:t>
             </a:r>
-            <a:endParaRPr b="0" lang="en-US" sz="1800" spc="-1" strike="noStrike">
-              <a:solidFill>
-                <a:srgbClr val="000000"/>
-              </a:solidFill>
+            <a:endParaRPr lang="en-US" sz="1800" b="0" u="none" strike="noStrike">
+              <a:solidFill>
+                <a:srgbClr val="000000"/>
+              </a:solidFill>
+              <a:effectLst/>
+              <a:uFillTx/>
               <a:latin typeface="Arial"/>
             </a:endParaRPr>
           </a:p>
@@ -6824,14 +8096,14 @@
       </p:sp>
       <p:sp>
         <p:nvSpPr>
-          <p:cNvPr id="87" name="Quad Arrow 14"/>
+          <p:cNvPr id="93" name="Quad Arrow 14"/>
           <p:cNvSpPr/>
           <p:nvPr/>
         </p:nvSpPr>
         <p:spPr>
           <a:xfrm>
             <a:off x="1215360" y="2315880"/>
-            <a:ext cx="905400" cy="901800"/>
+            <a:ext cx="905040" cy="901440"/>
           </a:xfrm>
           <a:prstGeom prst="quadArrow">
             <a:avLst>
@@ -6841,11 +8113,11 @@
             </a:avLst>
           </a:prstGeom>
           <a:solidFill>
-            <a:srgbClr val="5b9bd5"/>
+            <a:srgbClr val="5B9BD5"/>
           </a:solidFill>
           <a:ln>
             <a:solidFill>
-              <a:srgbClr val="43729d"/>
+              <a:srgbClr val="43729D"/>
             </a:solidFill>
           </a:ln>
         </p:spPr>
@@ -6864,19 +8136,16 @@
           <a:fontRef idx="minor"/>
         </p:style>
         <p:txBody>
-          <a:bodyPr lIns="90000" rIns="90000" tIns="45000" bIns="45000" anchor="ctr">
+          <a:bodyPr lIns="90000" tIns="45000" rIns="90000" bIns="45000" anchor="ctr">
             <a:noAutofit/>
           </a:bodyPr>
           <a:p>
-            <a:pPr algn="ctr" defTabSz="914400">
-              <a:lnSpc>
-                <a:spcPct val="100000"/>
-              </a:lnSpc>
-            </a:pPr>
-            <a:endParaRPr b="0" lang="en-US" sz="1800" spc="-1" strike="noStrike">
+            <a:endParaRPr lang="en-US" sz="1800" b="0" u="none" strike="noStrike">
               <a:solidFill>
                 <a:schemeClr val="lt1"/>
               </a:solidFill>
+              <a:effectLst/>
+              <a:uFillTx/>
               <a:latin typeface="Calibri"/>
             </a:endParaRPr>
           </a:p>
@@ -6884,14 +8153,14 @@
       </p:sp>
       <p:sp>
         <p:nvSpPr>
-          <p:cNvPr id="88" name="Quad Arrow 15"/>
+          <p:cNvPr id="94" name="Quad Arrow 15"/>
           <p:cNvSpPr/>
           <p:nvPr/>
         </p:nvSpPr>
         <p:spPr>
           <a:xfrm>
             <a:off x="6329880" y="5256720"/>
-            <a:ext cx="1317600" cy="1297080"/>
+            <a:ext cx="1317240" cy="1296720"/>
           </a:xfrm>
           <a:prstGeom prst="quadArrow">
             <a:avLst>
@@ -6901,11 +8170,11 @@
             </a:avLst>
           </a:prstGeom>
           <a:solidFill>
-            <a:srgbClr val="5b9bd5"/>
+            <a:srgbClr val="5B9BD5"/>
           </a:solidFill>
           <a:ln>
             <a:solidFill>
-              <a:srgbClr val="43729d"/>
+              <a:srgbClr val="43729D"/>
             </a:solidFill>
           </a:ln>
         </p:spPr>
@@ -6924,19 +8193,16 @@
           <a:fontRef idx="minor"/>
         </p:style>
         <p:txBody>
-          <a:bodyPr lIns="90000" rIns="90000" tIns="45000" bIns="45000" anchor="ctr">
+          <a:bodyPr lIns="90000" tIns="45000" rIns="90000" bIns="45000" anchor="ctr">
             <a:noAutofit/>
           </a:bodyPr>
           <a:p>
-            <a:pPr algn="ctr" defTabSz="914400">
-              <a:lnSpc>
-                <a:spcPct val="100000"/>
-              </a:lnSpc>
-            </a:pPr>
-            <a:endParaRPr b="0" lang="en-US" sz="1800" spc="-1" strike="noStrike">
+            <a:endParaRPr lang="en-US" sz="1800" b="0" u="none" strike="noStrike">
               <a:solidFill>
                 <a:schemeClr val="lt1"/>
               </a:solidFill>
+              <a:effectLst/>
+              <a:uFillTx/>
               <a:latin typeface="Calibri"/>
             </a:endParaRPr>
           </a:p>
@@ -6944,14 +8210,14 @@
       </p:sp>
       <p:sp>
         <p:nvSpPr>
-          <p:cNvPr id="89" name="TextBox 16"/>
+          <p:cNvPr id="95" name="TextBox 16"/>
           <p:cNvSpPr/>
           <p:nvPr/>
         </p:nvSpPr>
         <p:spPr>
           <a:xfrm>
             <a:off x="1446480" y="1913400"/>
-            <a:ext cx="583560" cy="363960"/>
+            <a:ext cx="583200" cy="363600"/>
           </a:xfrm>
           <a:prstGeom prst="rect">
             <a:avLst/>
@@ -6968,7 +8234,7 @@
           <a:fontRef idx="minor"/>
         </p:style>
         <p:txBody>
-          <a:bodyPr wrap="none" lIns="90000" rIns="90000" tIns="45000" bIns="45000" anchor="t">
+          <a:bodyPr wrap="none" lIns="90000" tIns="45000" rIns="90000" bIns="45000" anchor="t">
             <a:spAutoFit/>
           </a:bodyPr>
           <a:p>
@@ -6978,18 +8244,22 @@
               </a:lnSpc>
             </a:pPr>
             <a:r>
-              <a:rPr b="0" lang="en-US" sz="1800" spc="-1" strike="noStrike">
+              <a:rPr lang="en-US" sz="1800" b="0" u="none" strike="noStrike">
                 <a:solidFill>
                   <a:schemeClr val="dk1"/>
                 </a:solidFill>
+                <a:effectLst/>
+                <a:uFillTx/>
                 <a:latin typeface="Calibri"/>
               </a:rPr>
               <a:t>N/A</a:t>
             </a:r>
-            <a:endParaRPr b="0" lang="en-US" sz="1800" spc="-1" strike="noStrike">
-              <a:solidFill>
-                <a:srgbClr val="000000"/>
-              </a:solidFill>
+            <a:endParaRPr lang="en-US" sz="1800" b="0" u="none" strike="noStrike">
+              <a:solidFill>
+                <a:srgbClr val="000000"/>
+              </a:solidFill>
+              <a:effectLst/>
+              <a:uFillTx/>
               <a:latin typeface="Arial"/>
             </a:endParaRPr>
           </a:p>
@@ -6997,14 +8267,14 @@
       </p:sp>
       <p:sp>
         <p:nvSpPr>
-          <p:cNvPr id="90" name="TextBox 17"/>
+          <p:cNvPr id="96" name="TextBox 17"/>
           <p:cNvSpPr/>
           <p:nvPr/>
         </p:nvSpPr>
         <p:spPr>
           <a:xfrm>
             <a:off x="351360" y="2532600"/>
-            <a:ext cx="583560" cy="364680"/>
+            <a:ext cx="583200" cy="364320"/>
           </a:xfrm>
           <a:prstGeom prst="rect">
             <a:avLst/>
@@ -7021,7 +8291,7 @@
           <a:fontRef idx="minor"/>
         </p:style>
         <p:txBody>
-          <a:bodyPr wrap="none" lIns="90000" rIns="90000" tIns="45000" bIns="45000" anchor="t">
+          <a:bodyPr wrap="none" lIns="90000" tIns="45000" rIns="90000" bIns="45000" anchor="t">
             <a:spAutoFit/>
           </a:bodyPr>
           <a:p>
@@ -7031,18 +8301,22 @@
               </a:lnSpc>
             </a:pPr>
             <a:r>
-              <a:rPr b="0" lang="en-US" sz="1800" spc="-1" strike="noStrike">
+              <a:rPr lang="en-US" sz="1800" b="0" u="none" strike="noStrike">
                 <a:solidFill>
                   <a:schemeClr val="dk1"/>
                 </a:solidFill>
+                <a:effectLst/>
+                <a:uFillTx/>
                 <a:latin typeface="Calibri"/>
               </a:rPr>
               <a:t>N/A</a:t>
             </a:r>
-            <a:endParaRPr b="0" lang="en-US" sz="1800" spc="-1" strike="noStrike">
-              <a:solidFill>
-                <a:srgbClr val="000000"/>
-              </a:solidFill>
+            <a:endParaRPr lang="en-US" sz="1800" b="0" u="none" strike="noStrike">
+              <a:solidFill>
+                <a:srgbClr val="000000"/>
+              </a:solidFill>
+              <a:effectLst/>
+              <a:uFillTx/>
               <a:latin typeface="Arial"/>
             </a:endParaRPr>
           </a:p>
@@ -7050,14 +8324,14 @@
       </p:sp>
       <p:sp>
         <p:nvSpPr>
-          <p:cNvPr id="91" name="TextBox 18"/>
+          <p:cNvPr id="97" name="TextBox 18"/>
           <p:cNvSpPr/>
           <p:nvPr/>
         </p:nvSpPr>
         <p:spPr>
           <a:xfrm>
             <a:off x="2431440" y="2526120"/>
-            <a:ext cx="583560" cy="363960"/>
+            <a:ext cx="583200" cy="363600"/>
           </a:xfrm>
           <a:prstGeom prst="rect">
             <a:avLst/>
@@ -7074,7 +8348,7 @@
           <a:fontRef idx="minor"/>
         </p:style>
         <p:txBody>
-          <a:bodyPr wrap="none" lIns="90000" rIns="90000" tIns="45000" bIns="45000" anchor="t">
+          <a:bodyPr wrap="none" lIns="90000" tIns="45000" rIns="90000" bIns="45000" anchor="t">
             <a:spAutoFit/>
           </a:bodyPr>
           <a:p>
@@ -7084,18 +8358,22 @@
               </a:lnSpc>
             </a:pPr>
             <a:r>
-              <a:rPr b="0" lang="en-US" sz="1800" spc="-1" strike="noStrike">
+              <a:rPr lang="en-US" sz="1800" b="0" u="none" strike="noStrike">
                 <a:solidFill>
                   <a:schemeClr val="dk1"/>
                 </a:solidFill>
+                <a:effectLst/>
+                <a:uFillTx/>
                 <a:latin typeface="Calibri"/>
               </a:rPr>
               <a:t>N/A</a:t>
             </a:r>
-            <a:endParaRPr b="0" lang="en-US" sz="1800" spc="-1" strike="noStrike">
-              <a:solidFill>
-                <a:srgbClr val="000000"/>
-              </a:solidFill>
+            <a:endParaRPr lang="en-US" sz="1800" b="0" u="none" strike="noStrike">
+              <a:solidFill>
+                <a:srgbClr val="000000"/>
+              </a:solidFill>
+              <a:effectLst/>
+              <a:uFillTx/>
               <a:latin typeface="Arial"/>
             </a:endParaRPr>
           </a:p>
@@ -7103,14 +8381,14 @@
       </p:sp>
       <p:sp>
         <p:nvSpPr>
-          <p:cNvPr id="92" name="TextBox 19"/>
+          <p:cNvPr id="98" name="TextBox 19"/>
           <p:cNvSpPr/>
           <p:nvPr/>
         </p:nvSpPr>
         <p:spPr>
           <a:xfrm>
             <a:off x="7984440" y="5721120"/>
-            <a:ext cx="583560" cy="363960"/>
+            <a:ext cx="583200" cy="363600"/>
           </a:xfrm>
           <a:prstGeom prst="rect">
             <a:avLst/>
@@ -7127,7 +8405,7 @@
           <a:fontRef idx="minor"/>
         </p:style>
         <p:txBody>
-          <a:bodyPr wrap="none" lIns="90000" rIns="90000" tIns="45000" bIns="45000" anchor="t">
+          <a:bodyPr wrap="none" lIns="90000" tIns="45000" rIns="90000" bIns="45000" anchor="t">
             <a:spAutoFit/>
           </a:bodyPr>
           <a:p>
@@ -7137,18 +8415,22 @@
               </a:lnSpc>
             </a:pPr>
             <a:r>
-              <a:rPr b="0" lang="en-US" sz="1800" spc="-1" strike="noStrike">
+              <a:rPr lang="en-US" sz="1800" b="0" u="none" strike="noStrike">
                 <a:solidFill>
                   <a:schemeClr val="dk1"/>
                 </a:solidFill>
+                <a:effectLst/>
+                <a:uFillTx/>
                 <a:latin typeface="Calibri"/>
               </a:rPr>
               <a:t>N/A</a:t>
             </a:r>
-            <a:endParaRPr b="0" lang="en-US" sz="1800" spc="-1" strike="noStrike">
-              <a:solidFill>
-                <a:srgbClr val="000000"/>
-              </a:solidFill>
+            <a:endParaRPr lang="en-US" sz="1800" b="0" u="none" strike="noStrike">
+              <a:solidFill>
+                <a:srgbClr val="000000"/>
+              </a:solidFill>
+              <a:effectLst/>
+              <a:uFillTx/>
               <a:latin typeface="Arial"/>
             </a:endParaRPr>
           </a:p>
@@ -7156,23 +8438,23 @@
       </p:sp>
       <p:cxnSp>
         <p:nvCxnSpPr>
-          <p:cNvPr id="93" name="Straight Connector 2"/>
+          <p:cNvPr id="99" name="Straight Connector 2"/>
           <p:cNvCxnSpPr>
-            <a:stCxn id="84" idx="2"/>
+            <a:stCxn id="90" idx="2"/>
           </p:cNvCxnSpPr>
           <p:nvPr/>
         </p:nvCxnSpPr>
         <p:spPr>
           <a:xfrm>
-            <a:off x="2005200" y="1530720"/>
-            <a:ext cx="1913040" cy="669240"/>
+            <a:off x="2005200" y="1530360"/>
+            <a:ext cx="1913400" cy="669960"/>
           </a:xfrm>
           <a:prstGeom prst="straightConnector1">
             <a:avLst/>
           </a:prstGeom>
           <a:ln w="28575">
             <a:solidFill>
-              <a:srgbClr val="5b9bd5"/>
+              <a:srgbClr val="5B9BD5"/>
             </a:solidFill>
             <a:round/>
           </a:ln>
@@ -7180,23 +8462,23 @@
       </p:cxnSp>
       <p:cxnSp>
         <p:nvCxnSpPr>
-          <p:cNvPr id="94" name="Straight Connector 21"/>
+          <p:cNvPr id="100" name="Straight Connector 21"/>
           <p:cNvCxnSpPr>
-            <a:stCxn id="83" idx="2"/>
+            <a:stCxn id="89" idx="2"/>
           </p:cNvCxnSpPr>
           <p:nvPr/>
         </p:nvCxnSpPr>
         <p:spPr>
           <a:xfrm>
-            <a:off x="2874960" y="947160"/>
-            <a:ext cx="1419480" cy="752760"/>
+            <a:off x="3491640" y="1143000"/>
+            <a:ext cx="803160" cy="557280"/>
           </a:xfrm>
           <a:prstGeom prst="straightConnector1">
             <a:avLst/>
           </a:prstGeom>
           <a:ln w="28575">
             <a:solidFill>
-              <a:srgbClr val="5b9bd5"/>
+              <a:srgbClr val="5B9BD5"/>
             </a:solidFill>
             <a:round/>
           </a:ln>
@@ -7204,21 +8486,21 @@
       </p:cxnSp>
       <p:cxnSp>
         <p:nvCxnSpPr>
-          <p:cNvPr id="95" name="Straight Connector 25"/>
+          <p:cNvPr id="101" name="Straight Connector 25"/>
           <p:cNvCxnSpPr/>
           <p:nvPr/>
         </p:nvCxnSpPr>
         <p:spPr>
           <a:xfrm flipH="1">
             <a:off x="7898040" y="911160"/>
-            <a:ext cx="2001960" cy="625320"/>
+            <a:ext cx="2002320" cy="625680"/>
           </a:xfrm>
           <a:prstGeom prst="straightConnector1">
             <a:avLst/>
           </a:prstGeom>
           <a:ln w="28575">
             <a:solidFill>
-              <a:srgbClr val="5b9bd5"/>
+              <a:srgbClr val="5B9BD5"/>
             </a:solidFill>
             <a:round/>
           </a:ln>
@@ -7226,21 +8508,21 @@
       </p:cxnSp>
       <p:cxnSp>
         <p:nvCxnSpPr>
-          <p:cNvPr id="96" name="Straight Connector 27"/>
+          <p:cNvPr id="102" name="Straight Connector 27"/>
           <p:cNvCxnSpPr/>
           <p:nvPr/>
         </p:nvCxnSpPr>
         <p:spPr>
           <a:xfrm flipH="1">
             <a:off x="8361360" y="1725480"/>
-            <a:ext cx="1278360" cy="460080"/>
+            <a:ext cx="1278720" cy="460440"/>
           </a:xfrm>
           <a:prstGeom prst="straightConnector1">
             <a:avLst/>
           </a:prstGeom>
           <a:ln w="28575">
             <a:solidFill>
-              <a:srgbClr val="5b9bd5"/>
+              <a:srgbClr val="5B9BD5"/>
             </a:solidFill>
             <a:round/>
           </a:ln>
@@ -7248,21 +8530,21 @@
       </p:cxnSp>
       <p:cxnSp>
         <p:nvCxnSpPr>
-          <p:cNvPr id="97" name="Straight Connector 29"/>
+          <p:cNvPr id="103" name="Straight Connector 29"/>
           <p:cNvCxnSpPr/>
           <p:nvPr/>
         </p:nvCxnSpPr>
         <p:spPr>
           <a:xfrm flipH="1">
             <a:off x="8114040" y="2658960"/>
-            <a:ext cx="1592280" cy="307080"/>
+            <a:ext cx="1592640" cy="307440"/>
           </a:xfrm>
           <a:prstGeom prst="straightConnector1">
             <a:avLst/>
           </a:prstGeom>
           <a:ln w="28575">
             <a:solidFill>
-              <a:srgbClr val="5b9bd5"/>
+              <a:srgbClr val="5B9BD5"/>
             </a:solidFill>
             <a:round/>
           </a:ln>
@@ -7270,21 +8552,21 @@
       </p:cxnSp>
       <p:cxnSp>
         <p:nvCxnSpPr>
-          <p:cNvPr id="98" name="Straight Connector 31"/>
+          <p:cNvPr id="104" name="Straight Connector 31"/>
           <p:cNvCxnSpPr/>
           <p:nvPr/>
         </p:nvCxnSpPr>
         <p:spPr>
           <a:xfrm flipH="1" flipV="1">
             <a:off x="7505640" y="3429000"/>
-            <a:ext cx="2069280" cy="1990800"/>
+            <a:ext cx="2069640" cy="1991160"/>
           </a:xfrm>
           <a:prstGeom prst="straightConnector1">
             <a:avLst/>
           </a:prstGeom>
           <a:ln w="28575">
             <a:solidFill>
-              <a:srgbClr val="5b9bd5"/>
+              <a:srgbClr val="5B9BD5"/>
             </a:solidFill>
             <a:round/>
           </a:ln>
@@ -7292,21 +8574,21 @@
       </p:cxnSp>
       <p:cxnSp>
         <p:nvCxnSpPr>
-          <p:cNvPr id="99" name="Straight Connector 33"/>
+          <p:cNvPr id="105" name="Straight Connector 33"/>
           <p:cNvCxnSpPr/>
           <p:nvPr/>
         </p:nvCxnSpPr>
         <p:spPr>
           <a:xfrm flipH="1" flipV="1">
             <a:off x="8079480" y="3731760"/>
-            <a:ext cx="2284200" cy="1042920"/>
+            <a:ext cx="2284560" cy="1043280"/>
           </a:xfrm>
           <a:prstGeom prst="straightConnector1">
             <a:avLst/>
           </a:prstGeom>
           <a:ln w="28575">
             <a:solidFill>
-              <a:srgbClr val="5b9bd5"/>
+              <a:srgbClr val="5B9BD5"/>
             </a:solidFill>
             <a:round/>
           </a:ln>
@@ -7314,14 +8596,14 @@
       </p:cxnSp>
       <p:sp>
         <p:nvSpPr>
-          <p:cNvPr id="100" name="TextBox 28"/>
+          <p:cNvPr id="106" name="TextBox 28"/>
           <p:cNvSpPr/>
           <p:nvPr/>
         </p:nvSpPr>
         <p:spPr>
           <a:xfrm>
             <a:off x="6096600" y="1179720"/>
-            <a:ext cx="583560" cy="363960"/>
+            <a:ext cx="583200" cy="363600"/>
           </a:xfrm>
           <a:prstGeom prst="rect">
             <a:avLst/>
@@ -7338,7 +8620,7 @@
           <a:fontRef idx="minor"/>
         </p:style>
         <p:txBody>
-          <a:bodyPr wrap="none" lIns="90000" rIns="90000" tIns="45000" bIns="45000" anchor="t">
+          <a:bodyPr wrap="none" lIns="90000" tIns="45000" rIns="90000" bIns="45000" anchor="t">
             <a:spAutoFit/>
           </a:bodyPr>
           <a:p>
@@ -7348,18 +8630,22 @@
               </a:lnSpc>
             </a:pPr>
             <a:r>
-              <a:rPr b="0" lang="en-US" sz="1800" spc="-1" strike="noStrike">
+              <a:rPr lang="en-US" sz="1800" b="0" u="none" strike="noStrike">
                 <a:solidFill>
                   <a:schemeClr val="dk1"/>
                 </a:solidFill>
+                <a:effectLst/>
+                <a:uFillTx/>
                 <a:latin typeface="Calibri"/>
               </a:rPr>
               <a:t>N/A</a:t>
             </a:r>
-            <a:endParaRPr b="0" lang="en-US" sz="1800" spc="-1" strike="noStrike">
-              <a:solidFill>
-                <a:srgbClr val="000000"/>
-              </a:solidFill>
+            <a:endParaRPr lang="en-US" sz="1800" b="0" u="none" strike="noStrike">
+              <a:solidFill>
+                <a:srgbClr val="000000"/>
+              </a:solidFill>
+              <a:effectLst/>
+              <a:uFillTx/>
               <a:latin typeface="Arial"/>
             </a:endParaRPr>
           </a:p>
@@ -7367,23 +8653,23 @@
       </p:sp>
       <p:cxnSp>
         <p:nvCxnSpPr>
-          <p:cNvPr id="101" name="Straight Connector 30"/>
+          <p:cNvPr id="107" name="Straight Connector 30"/>
           <p:cNvCxnSpPr>
-            <a:stCxn id="100" idx="2"/>
+            <a:stCxn id="106" idx="2"/>
           </p:cNvCxnSpPr>
           <p:nvPr/>
         </p:nvCxnSpPr>
         <p:spPr>
           <a:xfrm>
-            <a:off x="6388200" y="1543680"/>
-            <a:ext cx="432000" cy="1920600"/>
+            <a:off x="6388200" y="1543320"/>
+            <a:ext cx="432360" cy="1921320"/>
           </a:xfrm>
           <a:prstGeom prst="straightConnector1">
             <a:avLst/>
           </a:prstGeom>
           <a:ln w="28575">
             <a:solidFill>
-              <a:srgbClr val="5b9bd5"/>
+              <a:srgbClr val="5B9BD5"/>
             </a:solidFill>
             <a:round/>
           </a:ln>
@@ -7391,14 +8677,14 @@
       </p:cxnSp>
       <p:sp>
         <p:nvSpPr>
-          <p:cNvPr id="102" name="TextBox 1"/>
+          <p:cNvPr id="108" name="TextBox 1"/>
           <p:cNvSpPr/>
           <p:nvPr/>
         </p:nvSpPr>
         <p:spPr>
           <a:xfrm>
             <a:off x="3688920" y="311760"/>
-            <a:ext cx="4814280" cy="577440"/>
+            <a:ext cx="4813920" cy="577080"/>
           </a:xfrm>
           <a:prstGeom prst="rect">
             <a:avLst/>
@@ -7415,7 +8701,7 @@
           <a:fontRef idx="minor"/>
         </p:style>
         <p:txBody>
-          <a:bodyPr wrap="none" lIns="90000" rIns="90000" tIns="45000" bIns="45000" anchor="t">
+          <a:bodyPr wrap="none" lIns="90000" tIns="45000" rIns="90000" bIns="45000" anchor="t">
             <a:spAutoFit/>
           </a:bodyPr>
           <a:p>
@@ -7425,18 +8711,22 @@
               </a:lnSpc>
             </a:pPr>
             <a:r>
-              <a:rPr b="1" lang="en-US" sz="3200" spc="-1" strike="noStrike">
-                <a:solidFill>
-                  <a:srgbClr val="00b050"/>
-                </a:solidFill>
+              <a:rPr lang="en-US" sz="3200" b="1" u="none" strike="noStrike">
+                <a:solidFill>
+                  <a:srgbClr val="00B050"/>
+                </a:solidFill>
+                <a:effectLst/>
+                <a:uFillTx/>
                 <a:latin typeface="Calibri"/>
               </a:rPr>
               <a:t>Operator Controller (1)</a:t>
             </a:r>
-            <a:endParaRPr b="0" lang="en-US" sz="3200" spc="-1" strike="noStrike">
-              <a:solidFill>
-                <a:srgbClr val="000000"/>
-              </a:solidFill>
+            <a:endParaRPr lang="en-US" sz="3200" b="0" u="none" strike="noStrike">
+              <a:solidFill>
+                <a:srgbClr val="000000"/>
+              </a:solidFill>
+              <a:effectLst/>
+              <a:uFillTx/>
               <a:latin typeface="Arial"/>
             </a:endParaRPr>
           </a:p>
@@ -7444,14 +8734,14 @@
       </p:sp>
       <p:sp>
         <p:nvSpPr>
-          <p:cNvPr id="103" name="Quad Arrow 1"/>
+          <p:cNvPr id="109" name="Quad Arrow 1"/>
           <p:cNvSpPr/>
           <p:nvPr/>
         </p:nvSpPr>
         <p:spPr>
           <a:xfrm>
             <a:off x="1654200" y="5257800"/>
-            <a:ext cx="1317600" cy="1297080"/>
+            <a:ext cx="1317240" cy="1296720"/>
           </a:xfrm>
           <a:prstGeom prst="quadArrow">
             <a:avLst>
@@ -7461,11 +8751,11 @@
             </a:avLst>
           </a:prstGeom>
           <a:solidFill>
-            <a:srgbClr val="5b9bd5"/>
+            <a:srgbClr val="5B9BD5"/>
           </a:solidFill>
           <a:ln>
             <a:solidFill>
-              <a:srgbClr val="43729d"/>
+              <a:srgbClr val="43729D"/>
             </a:solidFill>
           </a:ln>
         </p:spPr>
@@ -7484,14 +8774,16 @@
           <a:fontRef idx="minor"/>
         </p:style>
         <p:txBody>
-          <a:bodyPr lIns="90000" rIns="90000" tIns="45000" bIns="45000" anchor="ctr">
+          <a:bodyPr lIns="90000" tIns="45000" rIns="90000" bIns="45000" anchor="ctr">
             <a:noAutofit/>
           </a:bodyPr>
           <a:p>
-            <a:endParaRPr b="0" lang="en-US" sz="1800" spc="-1" strike="noStrike">
+            <a:endParaRPr lang="en-US" sz="1800" b="0" u="none" strike="noStrike">
               <a:solidFill>
                 <a:schemeClr val="lt1"/>
               </a:solidFill>
+              <a:effectLst/>
+              <a:uFillTx/>
               <a:latin typeface="Calibri"/>
             </a:endParaRPr>
           </a:p>
@@ -7499,14 +8791,14 @@
       </p:sp>
       <p:sp>
         <p:nvSpPr>
-          <p:cNvPr id="104" name="TextBox 3"/>
+          <p:cNvPr id="110" name="TextBox 3"/>
           <p:cNvSpPr/>
           <p:nvPr/>
         </p:nvSpPr>
         <p:spPr>
           <a:xfrm>
-            <a:off x="457200" y="5533920"/>
-            <a:ext cx="1176480" cy="638280"/>
+            <a:off x="1058760" y="5715000"/>
+            <a:ext cx="541440" cy="364680"/>
           </a:xfrm>
           <a:prstGeom prst="rect">
             <a:avLst/>
@@ -7523,65 +8815,47 @@
           <a:fontRef idx="minor"/>
         </p:style>
         <p:txBody>
-          <a:bodyPr wrap="none" lIns="90000" rIns="90000" tIns="45000" bIns="45000" anchor="t">
+          <a:bodyPr wrap="none" lIns="90000" tIns="45000" rIns="90000" bIns="45000" anchor="t">
             <a:spAutoFit/>
           </a:bodyPr>
           <a:p>
-            <a:pPr algn="ctr" defTabSz="914400">
+            <a:pPr defTabSz="914400">
               <a:lnSpc>
                 <a:spcPct val="100000"/>
               </a:lnSpc>
             </a:pPr>
             <a:r>
-              <a:rPr b="0" lang="en-US" sz="1800" spc="-1" strike="noStrike">
+              <a:rPr lang="en-US" sz="1800" b="0" u="none" strike="noStrike">
                 <a:solidFill>
                   <a:schemeClr val="dk1"/>
                 </a:solidFill>
+                <a:effectLst/>
+                <a:uFillTx/>
                 <a:latin typeface="Calibri"/>
               </a:rPr>
-              <a:t>Shoot</a:t>
-            </a:r>
-            <a:endParaRPr b="0" lang="en-US" sz="1800" spc="-1" strike="noStrike">
-              <a:solidFill>
-                <a:srgbClr val="000000"/>
-              </a:solidFill>
+              <a:t>N/A</a:t>
+            </a:r>
+            <a:endParaRPr lang="en-US" sz="1800" b="0" u="none" strike="noStrike">
+              <a:solidFill>
+                <a:srgbClr val="000000"/>
+              </a:solidFill>
+              <a:effectLst/>
+              <a:uFillTx/>
               <a:latin typeface="Arial"/>
             </a:endParaRPr>
           </a:p>
-          <a:p>
-            <a:pPr algn="ctr" defTabSz="914400">
-              <a:lnSpc>
-                <a:spcPct val="100000"/>
-              </a:lnSpc>
-            </a:pPr>
-            <a:r>
-              <a:rPr b="0" lang="en-US" sz="1800" spc="-1" strike="noStrike">
-                <a:solidFill>
-                  <a:schemeClr val="dk1"/>
-                </a:solidFill>
-                <a:latin typeface="Calibri"/>
-              </a:rPr>
-              <a:t>Position1</a:t>
-            </a:r>
-            <a:endParaRPr b="0" lang="en-US" sz="1800" spc="-1" strike="noStrike">
-              <a:solidFill>
-                <a:srgbClr val="000000"/>
-              </a:solidFill>
-              <a:latin typeface="Arial"/>
-            </a:endParaRPr>
-          </a:p>
-        </p:txBody>
-      </p:sp>
-      <p:sp>
-        <p:nvSpPr>
-          <p:cNvPr id="105" name="TextBox 11"/>
+        </p:txBody>
+      </p:sp>
+      <p:sp>
+        <p:nvSpPr>
+          <p:cNvPr id="111" name="TextBox 11"/>
           <p:cNvSpPr/>
           <p:nvPr/>
         </p:nvSpPr>
         <p:spPr>
           <a:xfrm>
-            <a:off x="1795320" y="4619520"/>
-            <a:ext cx="1176480" cy="638280"/>
+            <a:off x="2112480" y="4800600"/>
+            <a:ext cx="541440" cy="363960"/>
           </a:xfrm>
           <a:prstGeom prst="rect">
             <a:avLst/>
@@ -7598,65 +8872,47 @@
           <a:fontRef idx="minor"/>
         </p:style>
         <p:txBody>
-          <a:bodyPr wrap="none" lIns="90000" rIns="90000" tIns="45000" bIns="45000" anchor="t">
+          <a:bodyPr wrap="none" lIns="90000" tIns="45000" rIns="90000" bIns="45000" anchor="t">
             <a:spAutoFit/>
           </a:bodyPr>
           <a:p>
-            <a:pPr algn="ctr" defTabSz="914400">
+            <a:pPr defTabSz="914400">
               <a:lnSpc>
                 <a:spcPct val="100000"/>
               </a:lnSpc>
             </a:pPr>
             <a:r>
-              <a:rPr b="0" lang="en-US" sz="1800" spc="-1" strike="noStrike">
+              <a:rPr lang="en-US" sz="1800" b="0" u="none" strike="noStrike">
                 <a:solidFill>
                   <a:schemeClr val="dk1"/>
                 </a:solidFill>
+                <a:effectLst/>
+                <a:uFillTx/>
                 <a:latin typeface="Calibri"/>
               </a:rPr>
-              <a:t>Shoot</a:t>
-            </a:r>
-            <a:endParaRPr b="0" lang="en-US" sz="1800" spc="-1" strike="noStrike">
-              <a:solidFill>
-                <a:srgbClr val="000000"/>
-              </a:solidFill>
+              <a:t>N/A</a:t>
+            </a:r>
+            <a:endParaRPr lang="en-US" sz="1800" b="0" u="none" strike="noStrike">
+              <a:solidFill>
+                <a:srgbClr val="000000"/>
+              </a:solidFill>
+              <a:effectLst/>
+              <a:uFillTx/>
               <a:latin typeface="Arial"/>
             </a:endParaRPr>
           </a:p>
-          <a:p>
-            <a:pPr algn="ctr" defTabSz="914400">
-              <a:lnSpc>
-                <a:spcPct val="100000"/>
-              </a:lnSpc>
-            </a:pPr>
-            <a:r>
-              <a:rPr b="0" lang="en-US" sz="1800" spc="-1" strike="noStrike">
-                <a:solidFill>
-                  <a:schemeClr val="dk1"/>
-                </a:solidFill>
-                <a:latin typeface="Calibri"/>
-              </a:rPr>
-              <a:t>Position2</a:t>
-            </a:r>
-            <a:endParaRPr b="0" lang="en-US" sz="1800" spc="-1" strike="noStrike">
-              <a:solidFill>
-                <a:srgbClr val="000000"/>
-              </a:solidFill>
-              <a:latin typeface="Arial"/>
-            </a:endParaRPr>
-          </a:p>
-        </p:txBody>
-      </p:sp>
-      <p:sp>
-        <p:nvSpPr>
-          <p:cNvPr id="106" name="TextBox 14"/>
+        </p:txBody>
+      </p:sp>
+      <p:sp>
+        <p:nvSpPr>
+          <p:cNvPr id="112" name="TextBox 14"/>
           <p:cNvSpPr/>
           <p:nvPr/>
         </p:nvSpPr>
         <p:spPr>
           <a:xfrm>
-            <a:off x="3166920" y="5533920"/>
-            <a:ext cx="1176480" cy="638280"/>
+            <a:off x="3484080" y="5533920"/>
+            <a:ext cx="541440" cy="364680"/>
           </a:xfrm>
           <a:prstGeom prst="rect">
             <a:avLst/>
@@ -7673,7 +8929,7 @@
           <a:fontRef idx="minor"/>
         </p:style>
         <p:txBody>
-          <a:bodyPr wrap="none" lIns="90000" rIns="90000" tIns="45000" bIns="45000" anchor="t">
+          <a:bodyPr wrap="none" lIns="90000" tIns="45000" rIns="90000" bIns="45000" anchor="t">
             <a:spAutoFit/>
           </a:bodyPr>
           <a:p>
@@ -7683,40 +8939,22 @@
               </a:lnSpc>
             </a:pPr>
             <a:r>
-              <a:rPr b="0" lang="en-US" sz="1800" spc="-1" strike="noStrike">
+              <a:rPr lang="en-US" sz="1800" b="0" u="none" strike="noStrike">
                 <a:solidFill>
                   <a:schemeClr val="dk1"/>
                 </a:solidFill>
+                <a:effectLst/>
+                <a:uFillTx/>
                 <a:latin typeface="Calibri"/>
               </a:rPr>
-              <a:t>Shoot</a:t>
-            </a:r>
-            <a:endParaRPr b="0" lang="en-US" sz="1800" spc="-1" strike="noStrike">
-              <a:solidFill>
-                <a:srgbClr val="000000"/>
-              </a:solidFill>
-              <a:latin typeface="Arial"/>
-            </a:endParaRPr>
-          </a:p>
-          <a:p>
-            <a:pPr algn="ctr" defTabSz="914400">
-              <a:lnSpc>
-                <a:spcPct val="100000"/>
-              </a:lnSpc>
-            </a:pPr>
-            <a:r>
-              <a:rPr b="0" lang="en-US" sz="1800" spc="-1" strike="noStrike">
-                <a:solidFill>
-                  <a:schemeClr val="dk1"/>
-                </a:solidFill>
-                <a:latin typeface="Calibri"/>
-              </a:rPr>
-              <a:t>Position3</a:t>
-            </a:r>
-            <a:endParaRPr b="0" lang="en-US" sz="1800" spc="-1" strike="noStrike">
-              <a:solidFill>
-                <a:srgbClr val="000000"/>
-              </a:solidFill>
+              <a:t>N/A</a:t>
+            </a:r>
+            <a:endParaRPr lang="en-US" sz="1800" b="0" u="none" strike="noStrike">
+              <a:solidFill>
+                <a:srgbClr val="000000"/>
+              </a:solidFill>
+              <a:effectLst/>
+              <a:uFillTx/>
               <a:latin typeface="Arial"/>
             </a:endParaRPr>
           </a:p>
@@ -7724,23 +8962,23 @@
       </p:sp>
       <p:cxnSp>
         <p:nvCxnSpPr>
-          <p:cNvPr id="107" name="Straight Connector 3"/>
+          <p:cNvPr id="113" name="Straight Connector 3"/>
           <p:cNvCxnSpPr>
-            <a:stCxn id="103" idx="-1"/>
+            <a:stCxn id="109" idx="1"/>
           </p:cNvCxnSpPr>
           <p:nvPr/>
         </p:nvCxnSpPr>
         <p:spPr>
           <a:xfrm flipV="1">
-            <a:off x="2971800" y="4941720"/>
-            <a:ext cx="2054880" cy="964800"/>
+            <a:off x="1654200" y="4941720"/>
+            <a:ext cx="3372840" cy="964800"/>
           </a:xfrm>
           <a:prstGeom prst="straightConnector1">
             <a:avLst/>
           </a:prstGeom>
           <a:ln w="28575">
             <a:solidFill>
-              <a:srgbClr val="5b9bd5"/>
+              <a:srgbClr val="5B9BD5"/>
             </a:solidFill>
             <a:round/>
           </a:ln>
@@ -7748,9 +8986,9 @@
       </p:cxnSp>
       <p:cxnSp>
         <p:nvCxnSpPr>
-          <p:cNvPr id="108" name="Straight Connector 4"/>
+          <p:cNvPr id="114" name="Straight Connector 4"/>
           <p:cNvCxnSpPr>
-            <a:stCxn id="80" idx="1"/>
+            <a:stCxn id="86" idx="1"/>
           </p:cNvCxnSpPr>
           <p:nvPr/>
         </p:nvCxnSpPr>
@@ -7764,7 +9002,7 @@
           </a:prstGeom>
           <a:ln w="28575">
             <a:solidFill>
-              <a:srgbClr val="5b9bd5"/>
+              <a:srgbClr val="5B9BD5"/>
             </a:solidFill>
             <a:round/>
           </a:ln>
@@ -7791,37 +9029,37 @@
         <a:srgbClr val="000000"/>
       </a:dk1>
       <a:lt1>
-        <a:srgbClr val="ffffff"/>
+        <a:srgbClr val="FFFFFF"/>
       </a:lt1>
       <a:dk2>
-        <a:srgbClr val="44546a"/>
+        <a:srgbClr val="44546A"/>
       </a:dk2>
       <a:lt2>
-        <a:srgbClr val="e7e6e6"/>
+        <a:srgbClr val="E7E6E6"/>
       </a:lt2>
       <a:accent1>
-        <a:srgbClr val="5b9bd5"/>
+        <a:srgbClr val="5B9BD5"/>
       </a:accent1>
       <a:accent2>
-        <a:srgbClr val="ed7d31"/>
+        <a:srgbClr val="ED7D31"/>
       </a:accent2>
       <a:accent3>
-        <a:srgbClr val="a5a5a5"/>
+        <a:srgbClr val="A5A5A5"/>
       </a:accent3>
       <a:accent4>
-        <a:srgbClr val="ffc000"/>
+        <a:srgbClr val="FFC000"/>
       </a:accent4>
       <a:accent5>
-        <a:srgbClr val="4472c4"/>
+        <a:srgbClr val="4472C4"/>
       </a:accent5>
       <a:accent6>
-        <a:srgbClr val="70ad47"/>
+        <a:srgbClr val="70AD47"/>
       </a:accent6>
       <a:hlink>
-        <a:srgbClr val="0563c1"/>
+        <a:srgbClr val="0563C1"/>
       </a:hlink>
       <a:folHlink>
-        <a:srgbClr val="954f72"/>
+        <a:srgbClr val="954F72"/>
       </a:folHlink>
     </a:clrScheme>
     <a:fontScheme name="Office">
@@ -7963,37 +9201,37 @@
         <a:srgbClr val="000000"/>
       </a:dk1>
       <a:lt1>
-        <a:srgbClr val="ffffff"/>
+        <a:srgbClr val="FFFFFF"/>
       </a:lt1>
       <a:dk2>
-        <a:srgbClr val="44546a"/>
+        <a:srgbClr val="44546A"/>
       </a:dk2>
       <a:lt2>
-        <a:srgbClr val="e7e6e6"/>
+        <a:srgbClr val="E7E6E6"/>
       </a:lt2>
       <a:accent1>
-        <a:srgbClr val="5b9bd5"/>
+        <a:srgbClr val="5B9BD5"/>
       </a:accent1>
       <a:accent2>
-        <a:srgbClr val="ed7d31"/>
+        <a:srgbClr val="ED7D31"/>
       </a:accent2>
       <a:accent3>
-        <a:srgbClr val="a5a5a5"/>
+        <a:srgbClr val="A5A5A5"/>
       </a:accent3>
       <a:accent4>
-        <a:srgbClr val="ffc000"/>
+        <a:srgbClr val="FFC000"/>
       </a:accent4>
       <a:accent5>
-        <a:srgbClr val="4472c4"/>
+        <a:srgbClr val="4472C4"/>
       </a:accent5>
       <a:accent6>
-        <a:srgbClr val="70ad47"/>
+        <a:srgbClr val="70AD47"/>
       </a:accent6>
       <a:hlink>
-        <a:srgbClr val="0563c1"/>
+        <a:srgbClr val="0563C1"/>
       </a:hlink>
       <a:folHlink>
-        <a:srgbClr val="954f72"/>
+        <a:srgbClr val="954F72"/>
       </a:folHlink>
     </a:clrScheme>
     <a:fontScheme name="Office">
@@ -8135,37 +9373,37 @@
         <a:srgbClr val="000000"/>
       </a:dk1>
       <a:lt1>
-        <a:srgbClr val="ffffff"/>
+        <a:srgbClr val="FFFFFF"/>
       </a:lt1>
       <a:dk2>
-        <a:srgbClr val="44546a"/>
+        <a:srgbClr val="44546A"/>
       </a:dk2>
       <a:lt2>
-        <a:srgbClr val="e7e6e6"/>
+        <a:srgbClr val="E7E6E6"/>
       </a:lt2>
       <a:accent1>
-        <a:srgbClr val="5b9bd5"/>
+        <a:srgbClr val="5B9BD5"/>
       </a:accent1>
       <a:accent2>
-        <a:srgbClr val="ed7d31"/>
+        <a:srgbClr val="ED7D31"/>
       </a:accent2>
       <a:accent3>
-        <a:srgbClr val="a5a5a5"/>
+        <a:srgbClr val="A5A5A5"/>
       </a:accent3>
       <a:accent4>
-        <a:srgbClr val="ffc000"/>
+        <a:srgbClr val="FFC000"/>
       </a:accent4>
       <a:accent5>
-        <a:srgbClr val="4472c4"/>
+        <a:srgbClr val="4472C4"/>
       </a:accent5>
       <a:accent6>
-        <a:srgbClr val="70ad47"/>
+        <a:srgbClr val="70AD47"/>
       </a:accent6>
       <a:hlink>
-        <a:srgbClr val="0563c1"/>
+        <a:srgbClr val="0563C1"/>
       </a:hlink>
       <a:folHlink>
-        <a:srgbClr val="954f72"/>
+        <a:srgbClr val="954F72"/>
       </a:folHlink>
     </a:clrScheme>
     <a:fontScheme name="Office">
@@ -8307,37 +9545,37 @@
         <a:srgbClr val="000000"/>
       </a:dk1>
       <a:lt1>
-        <a:srgbClr val="ffffff"/>
+        <a:srgbClr val="FFFFFF"/>
       </a:lt1>
       <a:dk2>
-        <a:srgbClr val="44546a"/>
+        <a:srgbClr val="44546A"/>
       </a:dk2>
       <a:lt2>
-        <a:srgbClr val="e7e6e6"/>
+        <a:srgbClr val="E7E6E6"/>
       </a:lt2>
       <a:accent1>
-        <a:srgbClr val="5b9bd5"/>
+        <a:srgbClr val="5B9BD5"/>
       </a:accent1>
       <a:accent2>
-        <a:srgbClr val="ed7d31"/>
+        <a:srgbClr val="ED7D31"/>
       </a:accent2>
       <a:accent3>
-        <a:srgbClr val="a5a5a5"/>
+        <a:srgbClr val="A5A5A5"/>
       </a:accent3>
       <a:accent4>
-        <a:srgbClr val="ffc000"/>
+        <a:srgbClr val="FFC000"/>
       </a:accent4>
       <a:accent5>
-        <a:srgbClr val="4472c4"/>
+        <a:srgbClr val="4472C4"/>
       </a:accent5>
       <a:accent6>
-        <a:srgbClr val="70ad47"/>
+        <a:srgbClr val="70AD47"/>
       </a:accent6>
       <a:hlink>
-        <a:srgbClr val="0563c1"/>
+        <a:srgbClr val="0563C1"/>
       </a:hlink>
       <a:folHlink>
-        <a:srgbClr val="954f72"/>
+        <a:srgbClr val="954F72"/>
       </a:folHlink>
     </a:clrScheme>
     <a:fontScheme name="Office">
@@ -8479,37 +9717,37 @@
         <a:srgbClr val="000000"/>
       </a:dk1>
       <a:lt1>
-        <a:srgbClr val="ffffff"/>
+        <a:srgbClr val="FFFFFF"/>
       </a:lt1>
       <a:dk2>
-        <a:srgbClr val="44546a"/>
+        <a:srgbClr val="44546A"/>
       </a:dk2>
       <a:lt2>
-        <a:srgbClr val="e7e6e6"/>
+        <a:srgbClr val="E7E6E6"/>
       </a:lt2>
       <a:accent1>
-        <a:srgbClr val="5b9bd5"/>
+        <a:srgbClr val="5B9BD5"/>
       </a:accent1>
       <a:accent2>
-        <a:srgbClr val="ed7d31"/>
+        <a:srgbClr val="ED7D31"/>
       </a:accent2>
       <a:accent3>
-        <a:srgbClr val="a5a5a5"/>
+        <a:srgbClr val="A5A5A5"/>
       </a:accent3>
       <a:accent4>
-        <a:srgbClr val="ffc000"/>
+        <a:srgbClr val="FFC000"/>
       </a:accent4>
       <a:accent5>
-        <a:srgbClr val="4472c4"/>
+        <a:srgbClr val="4472C4"/>
       </a:accent5>
       <a:accent6>
-        <a:srgbClr val="70ad47"/>
+        <a:srgbClr val="70AD47"/>
       </a:accent6>
       <a:hlink>
-        <a:srgbClr val="0563c1"/>
+        <a:srgbClr val="0563C1"/>
       </a:hlink>
       <a:folHlink>
-        <a:srgbClr val="954f72"/>
+        <a:srgbClr val="954F72"/>
       </a:folHlink>
     </a:clrScheme>
     <a:fontScheme name="Office">
@@ -8651,37 +9889,37 @@
         <a:srgbClr val="000000"/>
       </a:dk1>
       <a:lt1>
-        <a:srgbClr val="ffffff"/>
+        <a:srgbClr val="FFFFFF"/>
       </a:lt1>
       <a:dk2>
-        <a:srgbClr val="44546a"/>
+        <a:srgbClr val="44546A"/>
       </a:dk2>
       <a:lt2>
-        <a:srgbClr val="e7e6e6"/>
+        <a:srgbClr val="E7E6E6"/>
       </a:lt2>
       <a:accent1>
-        <a:srgbClr val="5b9bd5"/>
+        <a:srgbClr val="5B9BD5"/>
       </a:accent1>
       <a:accent2>
-        <a:srgbClr val="ed7d31"/>
+        <a:srgbClr val="ED7D31"/>
       </a:accent2>
       <a:accent3>
-        <a:srgbClr val="a5a5a5"/>
+        <a:srgbClr val="A5A5A5"/>
       </a:accent3>
       <a:accent4>
-        <a:srgbClr val="ffc000"/>
+        <a:srgbClr val="FFC000"/>
       </a:accent4>
       <a:accent5>
-        <a:srgbClr val="4472c4"/>
+        <a:srgbClr val="4472C4"/>
       </a:accent5>
       <a:accent6>
-        <a:srgbClr val="70ad47"/>
+        <a:srgbClr val="70AD47"/>
       </a:accent6>
       <a:hlink>
-        <a:srgbClr val="0563c1"/>
+        <a:srgbClr val="0563C1"/>
       </a:hlink>
       <a:folHlink>
-        <a:srgbClr val="954f72"/>
+        <a:srgbClr val="954F72"/>
       </a:folHlink>
     </a:clrScheme>
     <a:fontScheme name="Office">
@@ -8823,37 +10061,37 @@
         <a:srgbClr val="000000"/>
       </a:dk1>
       <a:lt1>
-        <a:srgbClr val="ffffff"/>
+        <a:srgbClr val="FFFFFF"/>
       </a:lt1>
       <a:dk2>
-        <a:srgbClr val="44546a"/>
+        <a:srgbClr val="44546A"/>
       </a:dk2>
       <a:lt2>
-        <a:srgbClr val="e7e6e6"/>
+        <a:srgbClr val="E7E6E6"/>
       </a:lt2>
       <a:accent1>
-        <a:srgbClr val="5b9bd5"/>
+        <a:srgbClr val="5B9BD5"/>
       </a:accent1>
       <a:accent2>
-        <a:srgbClr val="ed7d31"/>
+        <a:srgbClr val="ED7D31"/>
       </a:accent2>
       <a:accent3>
-        <a:srgbClr val="a5a5a5"/>
+        <a:srgbClr val="A5A5A5"/>
       </a:accent3>
       <a:accent4>
-        <a:srgbClr val="ffc000"/>
+        <a:srgbClr val="FFC000"/>
       </a:accent4>
       <a:accent5>
-        <a:srgbClr val="4472c4"/>
+        <a:srgbClr val="4472C4"/>
       </a:accent5>
       <a:accent6>
-        <a:srgbClr val="70ad47"/>
+        <a:srgbClr val="70AD47"/>
       </a:accent6>
       <a:hlink>
-        <a:srgbClr val="0563c1"/>
+        <a:srgbClr val="0563C1"/>
       </a:hlink>
       <a:folHlink>
-        <a:srgbClr val="954f72"/>
+        <a:srgbClr val="954F72"/>
       </a:folHlink>
     </a:clrScheme>
     <a:fontScheme name="Office">
@@ -8995,37 +10233,37 @@
         <a:srgbClr val="000000"/>
       </a:dk1>
       <a:lt1>
-        <a:srgbClr val="ffffff"/>
+        <a:srgbClr val="FFFFFF"/>
       </a:lt1>
       <a:dk2>
-        <a:srgbClr val="44546a"/>
+        <a:srgbClr val="44546A"/>
       </a:dk2>
       <a:lt2>
-        <a:srgbClr val="e7e6e6"/>
+        <a:srgbClr val="E7E6E6"/>
       </a:lt2>
       <a:accent1>
-        <a:srgbClr val="5b9bd5"/>
+        <a:srgbClr val="5B9BD5"/>
       </a:accent1>
       <a:accent2>
-        <a:srgbClr val="ed7d31"/>
+        <a:srgbClr val="ED7D31"/>
       </a:accent2>
       <a:accent3>
-        <a:srgbClr val="a5a5a5"/>
+        <a:srgbClr val="A5A5A5"/>
       </a:accent3>
       <a:accent4>
-        <a:srgbClr val="ffc000"/>
+        <a:srgbClr val="FFC000"/>
       </a:accent4>
       <a:accent5>
-        <a:srgbClr val="4472c4"/>
+        <a:srgbClr val="4472C4"/>
       </a:accent5>
       <a:accent6>
-        <a:srgbClr val="70ad47"/>
+        <a:srgbClr val="70AD47"/>
       </a:accent6>
       <a:hlink>
-        <a:srgbClr val="0563c1"/>
+        <a:srgbClr val="0563C1"/>
       </a:hlink>
       <a:folHlink>
-        <a:srgbClr val="954f72"/>
+        <a:srgbClr val="954F72"/>
       </a:folHlink>
     </a:clrScheme>
     <a:fontScheme name="Office">
@@ -9167,37 +10405,37 @@
         <a:srgbClr val="000000"/>
       </a:dk1>
       <a:lt1>
-        <a:srgbClr val="ffffff"/>
+        <a:srgbClr val="FFFFFF"/>
       </a:lt1>
       <a:dk2>
-        <a:srgbClr val="44546a"/>
+        <a:srgbClr val="44546A"/>
       </a:dk2>
       <a:lt2>
-        <a:srgbClr val="e7e6e6"/>
+        <a:srgbClr val="E7E6E6"/>
       </a:lt2>
       <a:accent1>
-        <a:srgbClr val="5b9bd5"/>
+        <a:srgbClr val="5B9BD5"/>
       </a:accent1>
       <a:accent2>
-        <a:srgbClr val="ed7d31"/>
+        <a:srgbClr val="ED7D31"/>
       </a:accent2>
       <a:accent3>
-        <a:srgbClr val="a5a5a5"/>
+        <a:srgbClr val="A5A5A5"/>
       </a:accent3>
       <a:accent4>
-        <a:srgbClr val="ffc000"/>
+        <a:srgbClr val="FFC000"/>
       </a:accent4>
       <a:accent5>
-        <a:srgbClr val="4472c4"/>
+        <a:srgbClr val="4472C4"/>
       </a:accent5>
       <a:accent6>
-        <a:srgbClr val="70ad47"/>
+        <a:srgbClr val="70AD47"/>
       </a:accent6>
       <a:hlink>
-        <a:srgbClr val="0563c1"/>
+        <a:srgbClr val="0563C1"/>
       </a:hlink>
       <a:folHlink>
-        <a:srgbClr val="954f72"/>
+        <a:srgbClr val="954F72"/>
       </a:folHlink>
     </a:clrScheme>
     <a:fontScheme name="Office">
@@ -9339,37 +10577,37 @@
         <a:srgbClr val="000000"/>
       </a:dk1>
       <a:lt1>
-        <a:srgbClr val="ffffff"/>
+        <a:srgbClr val="FFFFFF"/>
       </a:lt1>
       <a:dk2>
-        <a:srgbClr val="44546a"/>
+        <a:srgbClr val="44546A"/>
       </a:dk2>
       <a:lt2>
-        <a:srgbClr val="e7e6e6"/>
+        <a:srgbClr val="E7E6E6"/>
       </a:lt2>
       <a:accent1>
-        <a:srgbClr val="5b9bd5"/>
+        <a:srgbClr val="5B9BD5"/>
       </a:accent1>
       <a:accent2>
-        <a:srgbClr val="ed7d31"/>
+        <a:srgbClr val="ED7D31"/>
       </a:accent2>
       <a:accent3>
-        <a:srgbClr val="a5a5a5"/>
+        <a:srgbClr val="A5A5A5"/>
       </a:accent3>
       <a:accent4>
-        <a:srgbClr val="ffc000"/>
+        <a:srgbClr val="FFC000"/>
       </a:accent4>
       <a:accent5>
-        <a:srgbClr val="4472c4"/>
+        <a:srgbClr val="4472C4"/>
       </a:accent5>
       <a:accent6>
-        <a:srgbClr val="70ad47"/>
+        <a:srgbClr val="70AD47"/>
       </a:accent6>
       <a:hlink>
-        <a:srgbClr val="0563c1"/>
+        <a:srgbClr val="0563C1"/>
       </a:hlink>
       <a:folHlink>
-        <a:srgbClr val="954f72"/>
+        <a:srgbClr val="954F72"/>
       </a:folHlink>
     </a:clrScheme>
     <a:fontScheme name="Office">
@@ -9511,37 +10749,37 @@
         <a:srgbClr val="000000"/>
       </a:dk1>
       <a:lt1>
-        <a:srgbClr val="ffffff"/>
+        <a:srgbClr val="FFFFFF"/>
       </a:lt1>
       <a:dk2>
-        <a:srgbClr val="44546a"/>
+        <a:srgbClr val="44546A"/>
       </a:dk2>
       <a:lt2>
-        <a:srgbClr val="e7e6e6"/>
+        <a:srgbClr val="E7E6E6"/>
       </a:lt2>
       <a:accent1>
-        <a:srgbClr val="5b9bd5"/>
+        <a:srgbClr val="5B9BD5"/>
       </a:accent1>
       <a:accent2>
-        <a:srgbClr val="ed7d31"/>
+        <a:srgbClr val="ED7D31"/>
       </a:accent2>
       <a:accent3>
-        <a:srgbClr val="a5a5a5"/>
+        <a:srgbClr val="A5A5A5"/>
       </a:accent3>
       <a:accent4>
-        <a:srgbClr val="ffc000"/>
+        <a:srgbClr val="FFC000"/>
       </a:accent4>
       <a:accent5>
-        <a:srgbClr val="4472c4"/>
+        <a:srgbClr val="4472C4"/>
       </a:accent5>
       <a:accent6>
-        <a:srgbClr val="70ad47"/>
+        <a:srgbClr val="70AD47"/>
       </a:accent6>
       <a:hlink>
-        <a:srgbClr val="0563c1"/>
+        <a:srgbClr val="0563C1"/>
       </a:hlink>
       <a:folHlink>
-        <a:srgbClr val="954f72"/>
+        <a:srgbClr val="954F72"/>
       </a:folHlink>
     </a:clrScheme>
     <a:fontScheme name="Office">
